--- a/docs/curso/slides/m02-marco-legal.pptx
+++ b/docs/curso/slides/m02-marco-legal.pptx
@@ -3340,6 +3340,54 @@
           <a:chExt cx="0" cy="0"/>
         </a:xfrm>
       </p:grpSpPr>
+      <p:sp>
+        <p:nvSpPr>
+          <p:cNvPr id="25" name="Slide Number Placeholder 0"/>
+          <p:cNvSpPr>
+            <a:spLocks noGrp="1"/>
+          </p:cNvSpPr>
+          <p:nvPr>
+            <p:ph type="sldNum" sz="quarter" idx="4294967295"/>
+          </p:nvPr>
+        </p:nvSpPr>
+        <p:spPr>
+          <a:xfrm>
+            <a:off x="11292840" y="6556248"/>
+            <a:ext cx="548640" cy="256032"/>
+          </a:xfrm>
+          <a:prstGeom prst="rect">
+            <a:avLst/>
+          </a:prstGeom>
+          <a:extLst>
+            <a:ext uri="{C572A759-6A51-4108-AA02-DFA0A04FC94B}">
+              <ma14:wrappingTextBoxFlag xmlns:ma14="http://schemas.microsoft.com/office/mac/drawingml/2011/main" val="0"/>
+            </a:ext>
+          </a:extLst>
+        </p:spPr>
+        <p:txBody>
+          <a:bodyPr/>
+          <a:lstStyle>
+            <a:lvl1pPr>
+              <a:defRPr sz="900">
+                <a:solidFill>
+                  <a:srgbClr val="1B3A6B"/>
+                </a:solidFill>
+                <a:latin typeface="Arial"/>
+                <a:ea typeface="Arial"/>
+                <a:cs typeface="Arial"/>
+              </a:defRPr>
+            </a:lvl1pPr>
+          </a:lstStyle>
+          <a:p>
+            <a:pPr algn="r"/>
+            <a:fld id="{F7021451-1387-4CA6-816F-3879F97B5CBC}" type="slidenum">
+              <a:rPr b="1" lang="en-US"/>
+              <a:t>1000</a:t>
+            </a:fld>
+            <a:endParaRPr lang="en-US"/>
+          </a:p>
+        </p:txBody>
+      </p:sp>
     </p:spTree>
   </p:cSld>
   <p:clrMapOvr>
@@ -3365,6 +3413,54 @@
           <a:chExt cx="0" cy="0"/>
         </a:xfrm>
       </p:grpSpPr>
+      <p:sp>
+        <p:nvSpPr>
+          <p:cNvPr id="25" name="Slide Number Placeholder 0"/>
+          <p:cNvSpPr>
+            <a:spLocks noGrp="1"/>
+          </p:cNvSpPr>
+          <p:nvPr>
+            <p:ph type="sldNum" sz="quarter" idx="4294967295"/>
+          </p:nvPr>
+        </p:nvSpPr>
+        <p:spPr>
+          <a:xfrm>
+            <a:off x="11292840" y="6556248"/>
+            <a:ext cx="548640" cy="256032"/>
+          </a:xfrm>
+          <a:prstGeom prst="rect">
+            <a:avLst/>
+          </a:prstGeom>
+          <a:extLst>
+            <a:ext uri="{C572A759-6A51-4108-AA02-DFA0A04FC94B}">
+              <ma14:wrappingTextBoxFlag xmlns:ma14="http://schemas.microsoft.com/office/mac/drawingml/2011/main" val="0"/>
+            </a:ext>
+          </a:extLst>
+        </p:spPr>
+        <p:txBody>
+          <a:bodyPr/>
+          <a:lstStyle>
+            <a:lvl1pPr>
+              <a:defRPr sz="900">
+                <a:solidFill>
+                  <a:srgbClr val="1B3A6B"/>
+                </a:solidFill>
+                <a:latin typeface="Arial"/>
+                <a:ea typeface="Arial"/>
+                <a:cs typeface="Arial"/>
+              </a:defRPr>
+            </a:lvl1pPr>
+          </a:lstStyle>
+          <a:p>
+            <a:pPr algn="r"/>
+            <a:fld id="{F7021451-1387-4CA6-816F-3879F97B5CBC}" type="slidenum">
+              <a:rPr b="1" lang="en-US"/>
+              <a:t>null</a:t>
+            </a:fld>
+            <a:endParaRPr lang="en-US"/>
+          </a:p>
+        </p:txBody>
+      </p:sp>
     </p:spTree>
   </p:cSld>
   <p:clrMap bg1="lt1" tx1="dk1" bg2="lt2" tx2="dk2" accent1="accent1" accent2="accent2" accent3="accent3" accent4="accent4" accent5="accent5" accent6="accent6" hlink="hlink" folHlink="folHlink"/>
@@ -4218,7 +4314,7 @@
         </p:blipFill>
         <p:spPr>
           <a:xfrm>
-            <a:off x="411480" y="6547104"/>
+            <a:off x="548640" y="6547104"/>
             <a:ext cx="274320" cy="274320"/>
           </a:xfrm>
           <a:prstGeom prst="rect">
@@ -4234,7 +4330,7 @@
         </p:nvSpPr>
         <p:spPr>
           <a:xfrm>
-            <a:off x="749808" y="6528816"/>
+            <a:off x="886968" y="6528816"/>
             <a:ext cx="6400800" cy="310896"/>
           </a:xfrm>
           <a:prstGeom prst="rect">
@@ -4274,7 +4370,7 @@
         <p:spPr>
           <a:xfrm>
             <a:off x="7132320" y="6528816"/>
-            <a:ext cx="4663440" cy="310896"/>
+            <a:ext cx="4023360" cy="310896"/>
           </a:xfrm>
           <a:prstGeom prst="rect">
             <a:avLst/>
@@ -4312,7 +4408,7 @@
         </p:nvSpPr>
         <p:spPr>
           <a:xfrm>
-            <a:off x="411480" y="384048"/>
+            <a:off x="548640" y="384048"/>
             <a:ext cx="82296" cy="658368"/>
           </a:xfrm>
           <a:prstGeom prst="rect">
@@ -4332,7 +4428,7 @@
         </p:nvSpPr>
         <p:spPr>
           <a:xfrm>
-            <a:off x="640080" y="292608"/>
+            <a:off x="777240" y="292608"/>
             <a:ext cx="10972800" cy="274320"/>
           </a:xfrm>
           <a:prstGeom prst="rect">
@@ -4371,8 +4467,8 @@
         </p:nvSpPr>
         <p:spPr>
           <a:xfrm>
-            <a:off x="640080" y="530352"/>
-            <a:ext cx="11155680" cy="566928"/>
+            <a:off x="777240" y="530352"/>
+            <a:ext cx="10881360" cy="566928"/>
           </a:xfrm>
           <a:prstGeom prst="rect">
             <a:avLst/>
@@ -4412,8 +4508,8 @@
         </p:nvSpPr>
         <p:spPr>
           <a:xfrm>
-            <a:off x="411480" y="1325880"/>
-            <a:ext cx="11384280" cy="4892040"/>
+            <a:off x="548640" y="1325880"/>
+            <a:ext cx="11091672" cy="4892040"/>
           </a:xfrm>
           <a:prstGeom prst="roundRect">
             <a:avLst>
@@ -4446,7 +4542,7 @@
         </p:nvSpPr>
         <p:spPr>
           <a:xfrm>
-            <a:off x="594360" y="1508760"/>
+            <a:off x="731520" y="1508760"/>
             <a:ext cx="457200" cy="457200"/>
           </a:xfrm>
           <a:prstGeom prst="ellipse">
@@ -4466,7 +4562,7 @@
         </p:nvSpPr>
         <p:spPr>
           <a:xfrm>
-            <a:off x="594360" y="1508760"/>
+            <a:off x="731520" y="1508760"/>
             <a:ext cx="457200" cy="457200"/>
           </a:xfrm>
           <a:prstGeom prst="rect">
@@ -4505,8 +4601,8 @@
         </p:nvSpPr>
         <p:spPr>
           <a:xfrm>
-            <a:off x="1188720" y="1435608"/>
-            <a:ext cx="10469880" cy="4672584"/>
+            <a:off x="1325880" y="1435608"/>
+            <a:ext cx="10177272" cy="4672584"/>
           </a:xfrm>
           <a:prstGeom prst="rect">
             <a:avLst/>
@@ -4524,7 +4620,7 @@
               <a:buNone/>
             </a:pPr>
             <a:r>
-              <a:rPr lang="en-US" sz="1600" dirty="0">
+              <a:rPr lang="en-US" sz="1800" dirty="0">
                 <a:solidFill>
                   <a:srgbClr val="1F2937"/>
                 </a:solidFill>
@@ -4534,7 +4630,55 @@
               </a:rPr>
               <a:t>EMUC — empreendimento com múltiplas unidades consumidoras: condomínios, mesma propriedade, áreas contíguas</a:t>
             </a:r>
-            <a:endParaRPr lang="en-US" sz="1600" dirty="0"/>
+            <a:endParaRPr lang="en-US" sz="1800" dirty="0"/>
+          </a:p>
+        </p:txBody>
+      </p:sp>
+      <p:sp>
+        <p:nvSpPr>
+          <p:cNvPr id="25" name="Slide Number Placeholder 0"/>
+          <p:cNvSpPr>
+            <a:spLocks noGrp="1"/>
+          </p:cNvSpPr>
+          <p:nvPr>
+            <p:ph type="sldNum" sz="quarter" idx="4294967295"/>
+          </p:nvPr>
+        </p:nvSpPr>
+        <p:spPr>
+          <a:xfrm>
+            <a:off x="11292840" y="6556248"/>
+            <a:ext cx="548640" cy="256032"/>
+          </a:xfrm>
+          <a:prstGeom prst="rect">
+            <a:avLst/>
+          </a:prstGeom>
+          <a:extLst>
+            <a:ext uri="{C572A759-6A51-4108-AA02-DFA0A04FC94B}">
+              <ma14:wrappingTextBoxFlag xmlns:ma14="http://schemas.microsoft.com/office/mac/drawingml/2011/main" val="0"/>
+            </a:ext>
+          </a:extLst>
+        </p:spPr>
+        <p:txBody>
+          <a:bodyPr/>
+          <a:lstStyle>
+            <a:lvl1pPr>
+              <a:defRPr sz="900">
+                <a:solidFill>
+                  <a:srgbClr val="1B3A6B"/>
+                </a:solidFill>
+                <a:latin typeface="Arial"/>
+                <a:ea typeface="Arial"/>
+                <a:cs typeface="Arial"/>
+              </a:defRPr>
+            </a:lvl1pPr>
+          </a:lstStyle>
+          <a:p>
+            <a:pPr algn="r"/>
+            <a:fld id="{F7021451-1387-4CA6-816F-3879F97B5CBC}" type="slidenum">
+              <a:rPr b="1" lang="en-US"/>
+              <a:t>10</a:t>
+            </a:fld>
+            <a:endParaRPr lang="en-US"/>
           </a:p>
         </p:txBody>
       </p:sp>
@@ -4611,7 +4755,7 @@
         </p:blipFill>
         <p:spPr>
           <a:xfrm>
-            <a:off x="411480" y="6547104"/>
+            <a:off x="548640" y="6547104"/>
             <a:ext cx="274320" cy="274320"/>
           </a:xfrm>
           <a:prstGeom prst="rect">
@@ -4627,7 +4771,7 @@
         </p:nvSpPr>
         <p:spPr>
           <a:xfrm>
-            <a:off x="749808" y="6528816"/>
+            <a:off x="886968" y="6528816"/>
             <a:ext cx="6400800" cy="310896"/>
           </a:xfrm>
           <a:prstGeom prst="rect">
@@ -4667,7 +4811,7 @@
         <p:spPr>
           <a:xfrm>
             <a:off x="7132320" y="6528816"/>
-            <a:ext cx="4663440" cy="310896"/>
+            <a:ext cx="4023360" cy="310896"/>
           </a:xfrm>
           <a:prstGeom prst="rect">
             <a:avLst/>
@@ -4705,7 +4849,7 @@
         </p:nvSpPr>
         <p:spPr>
           <a:xfrm>
-            <a:off x="411480" y="384048"/>
+            <a:off x="548640" y="384048"/>
             <a:ext cx="82296" cy="658368"/>
           </a:xfrm>
           <a:prstGeom prst="rect">
@@ -4725,7 +4869,7 @@
         </p:nvSpPr>
         <p:spPr>
           <a:xfrm>
-            <a:off x="640080" y="292608"/>
+            <a:off x="777240" y="292608"/>
             <a:ext cx="10972800" cy="274320"/>
           </a:xfrm>
           <a:prstGeom prst="rect">
@@ -4764,8 +4908,8 @@
         </p:nvSpPr>
         <p:spPr>
           <a:xfrm>
-            <a:off x="640080" y="530352"/>
-            <a:ext cx="11155680" cy="566928"/>
+            <a:off x="777240" y="530352"/>
+            <a:ext cx="10881360" cy="566928"/>
           </a:xfrm>
           <a:prstGeom prst="rect">
             <a:avLst/>
@@ -4812,17 +4956,17 @@
           </p:nvPr>
         </p:nvGraphicFramePr>
         <p:xfrm>
-          <a:off x="411480" y="1417320"/>
-          <a:ext cx="11384280" cy="914400"/>
+          <a:off x="548640" y="1417320"/>
+          <a:ext cx="11091672" cy="914400"/>
         </p:xfrm>
         <a:graphic>
           <a:graphicData uri="http://schemas.openxmlformats.org/drawingml/2006/table">
             <a:tbl>
               <a:tblPr/>
               <a:tblGrid>
-                <a:gridCol w="3794760"/>
-                <a:gridCol w="3794760"/>
-                <a:gridCol w="3794760"/>
+                <a:gridCol w="3697224"/>
+                <a:gridCol w="3697224"/>
+                <a:gridCol w="3697224"/>
               </a:tblGrid>
               <a:tr h="0">
                 <a:tc>
@@ -5858,6 +6002,54 @@
           </a:graphicData>
         </a:graphic>
       </p:graphicFrame>
+      <p:sp>
+        <p:nvSpPr>
+          <p:cNvPr id="25" name="Slide Number Placeholder 0"/>
+          <p:cNvSpPr>
+            <a:spLocks noGrp="1"/>
+          </p:cNvSpPr>
+          <p:nvPr>
+            <p:ph type="sldNum" sz="quarter" idx="4294967295"/>
+          </p:nvPr>
+        </p:nvSpPr>
+        <p:spPr>
+          <a:xfrm>
+            <a:off x="11292840" y="6556248"/>
+            <a:ext cx="548640" cy="256032"/>
+          </a:xfrm>
+          <a:prstGeom prst="rect">
+            <a:avLst/>
+          </a:prstGeom>
+          <a:extLst>
+            <a:ext uri="{C572A759-6A51-4108-AA02-DFA0A04FC94B}">
+              <ma14:wrappingTextBoxFlag xmlns:ma14="http://schemas.microsoft.com/office/mac/drawingml/2011/main" val="0"/>
+            </a:ext>
+          </a:extLst>
+        </p:spPr>
+        <p:txBody>
+          <a:bodyPr/>
+          <a:lstStyle>
+            <a:lvl1pPr>
+              <a:defRPr sz="900">
+                <a:solidFill>
+                  <a:srgbClr val="1B3A6B"/>
+                </a:solidFill>
+                <a:latin typeface="Arial"/>
+                <a:ea typeface="Arial"/>
+                <a:cs typeface="Arial"/>
+              </a:defRPr>
+            </a:lvl1pPr>
+          </a:lstStyle>
+          <a:p>
+            <a:pPr algn="r"/>
+            <a:fld id="{F7021451-1387-4CA6-816F-3879F97B5CBC}" type="slidenum">
+              <a:rPr b="1" lang="en-US"/>
+              <a:t>11</a:t>
+            </a:fld>
+            <a:endParaRPr lang="en-US"/>
+          </a:p>
+        </p:txBody>
+      </p:sp>
     </p:spTree>
   </p:cSld>
   <p:clrMapOvr>
@@ -5931,7 +6123,7 @@
         </p:blipFill>
         <p:spPr>
           <a:xfrm>
-            <a:off x="411480" y="6547104"/>
+            <a:off x="548640" y="6547104"/>
             <a:ext cx="274320" cy="274320"/>
           </a:xfrm>
           <a:prstGeom prst="rect">
@@ -5947,7 +6139,7 @@
         </p:nvSpPr>
         <p:spPr>
           <a:xfrm>
-            <a:off x="749808" y="6528816"/>
+            <a:off x="886968" y="6528816"/>
             <a:ext cx="6400800" cy="310896"/>
           </a:xfrm>
           <a:prstGeom prst="rect">
@@ -5987,7 +6179,7 @@
         <p:spPr>
           <a:xfrm>
             <a:off x="7132320" y="6528816"/>
-            <a:ext cx="4663440" cy="310896"/>
+            <a:ext cx="4023360" cy="310896"/>
           </a:xfrm>
           <a:prstGeom prst="rect">
             <a:avLst/>
@@ -6025,7 +6217,7 @@
         </p:nvSpPr>
         <p:spPr>
           <a:xfrm>
-            <a:off x="411480" y="384048"/>
+            <a:off x="548640" y="384048"/>
             <a:ext cx="82296" cy="658368"/>
           </a:xfrm>
           <a:prstGeom prst="rect">
@@ -6045,7 +6237,7 @@
         </p:nvSpPr>
         <p:spPr>
           <a:xfrm>
-            <a:off x="640080" y="292608"/>
+            <a:off x="777240" y="292608"/>
             <a:ext cx="10972800" cy="274320"/>
           </a:xfrm>
           <a:prstGeom prst="rect">
@@ -6084,8 +6276,8 @@
         </p:nvSpPr>
         <p:spPr>
           <a:xfrm>
-            <a:off x="640080" y="530352"/>
-            <a:ext cx="11155680" cy="566928"/>
+            <a:off x="777240" y="530352"/>
+            <a:ext cx="10881360" cy="566928"/>
           </a:xfrm>
           <a:prstGeom prst="rect">
             <a:avLst/>
@@ -6125,12 +6317,12 @@
         </p:nvSpPr>
         <p:spPr>
           <a:xfrm>
-            <a:off x="411480" y="1325880"/>
-            <a:ext cx="3642360" cy="4892040"/>
+            <a:off x="548640" y="1325880"/>
+            <a:ext cx="3544824" cy="4892040"/>
           </a:xfrm>
           <a:prstGeom prst="roundRect">
             <a:avLst>
-              <a:gd name="adj" fmla="val 2008"/>
+              <a:gd name="adj" fmla="val 2064"/>
             </a:avLst>
           </a:prstGeom>
           <a:solidFill>
@@ -6159,7 +6351,7 @@
         </p:nvSpPr>
         <p:spPr>
           <a:xfrm>
-            <a:off x="594360" y="1508760"/>
+            <a:off x="731520" y="1508760"/>
             <a:ext cx="457200" cy="457200"/>
           </a:xfrm>
           <a:prstGeom prst="ellipse">
@@ -6179,7 +6371,7 @@
         </p:nvSpPr>
         <p:spPr>
           <a:xfrm>
-            <a:off x="594360" y="1508760"/>
+            <a:off x="731520" y="1508760"/>
             <a:ext cx="457200" cy="457200"/>
           </a:xfrm>
           <a:prstGeom prst="rect">
@@ -6218,8 +6410,8 @@
         </p:nvSpPr>
         <p:spPr>
           <a:xfrm>
-            <a:off x="1188720" y="1435608"/>
-            <a:ext cx="2727960" cy="4672584"/>
+            <a:off x="1325880" y="1435608"/>
+            <a:ext cx="2630424" cy="4672584"/>
           </a:xfrm>
           <a:prstGeom prst="rect">
             <a:avLst/>
@@ -6259,12 +6451,12 @@
         </p:nvSpPr>
         <p:spPr>
           <a:xfrm>
-            <a:off x="4282440" y="1325880"/>
-            <a:ext cx="3642360" cy="4892040"/>
+            <a:off x="4322064" y="1325880"/>
+            <a:ext cx="3544824" cy="4892040"/>
           </a:xfrm>
           <a:prstGeom prst="roundRect">
             <a:avLst>
-              <a:gd name="adj" fmla="val 2008"/>
+              <a:gd name="adj" fmla="val 2064"/>
             </a:avLst>
           </a:prstGeom>
           <a:solidFill>
@@ -6293,7 +6485,7 @@
         </p:nvSpPr>
         <p:spPr>
           <a:xfrm>
-            <a:off x="4465320" y="1508760"/>
+            <a:off x="4504944" y="1508760"/>
             <a:ext cx="457200" cy="457200"/>
           </a:xfrm>
           <a:prstGeom prst="ellipse">
@@ -6313,7 +6505,7 @@
         </p:nvSpPr>
         <p:spPr>
           <a:xfrm>
-            <a:off x="4465320" y="1508760"/>
+            <a:off x="4504944" y="1508760"/>
             <a:ext cx="457200" cy="457200"/>
           </a:xfrm>
           <a:prstGeom prst="rect">
@@ -6352,8 +6544,8 @@
         </p:nvSpPr>
         <p:spPr>
           <a:xfrm>
-            <a:off x="5059680" y="1435608"/>
-            <a:ext cx="2727960" cy="4672584"/>
+            <a:off x="5099304" y="1435608"/>
+            <a:ext cx="2630424" cy="4672584"/>
           </a:xfrm>
           <a:prstGeom prst="rect">
             <a:avLst/>
@@ -6393,12 +6585,12 @@
         </p:nvSpPr>
         <p:spPr>
           <a:xfrm>
-            <a:off x="8153400" y="1325880"/>
-            <a:ext cx="3642360" cy="4892040"/>
+            <a:off x="8095488" y="1325880"/>
+            <a:ext cx="3544824" cy="4892040"/>
           </a:xfrm>
           <a:prstGeom prst="roundRect">
             <a:avLst>
-              <a:gd name="adj" fmla="val 2008"/>
+              <a:gd name="adj" fmla="val 2064"/>
             </a:avLst>
           </a:prstGeom>
           <a:solidFill>
@@ -6427,7 +6619,7 @@
         </p:nvSpPr>
         <p:spPr>
           <a:xfrm>
-            <a:off x="8336280" y="1508760"/>
+            <a:off x="8278368" y="1508760"/>
             <a:ext cx="457200" cy="457200"/>
           </a:xfrm>
           <a:prstGeom prst="ellipse">
@@ -6447,7 +6639,7 @@
         </p:nvSpPr>
         <p:spPr>
           <a:xfrm>
-            <a:off x="8336280" y="1508760"/>
+            <a:off x="8278368" y="1508760"/>
             <a:ext cx="457200" cy="457200"/>
           </a:xfrm>
           <a:prstGeom prst="rect">
@@ -6486,8 +6678,8 @@
         </p:nvSpPr>
         <p:spPr>
           <a:xfrm>
-            <a:off x="8930640" y="1435608"/>
-            <a:ext cx="2727960" cy="4672584"/>
+            <a:off x="8872728" y="1435608"/>
+            <a:ext cx="2630424" cy="4672584"/>
           </a:xfrm>
           <a:prstGeom prst="rect">
             <a:avLst/>
@@ -6516,6 +6708,54 @@
               <a:t>entidade jurídica reúne os participantes</a:t>
             </a:r>
             <a:endParaRPr lang="en-US" sz="1800" dirty="0"/>
+          </a:p>
+        </p:txBody>
+      </p:sp>
+      <p:sp>
+        <p:nvSpPr>
+          <p:cNvPr id="25" name="Slide Number Placeholder 0"/>
+          <p:cNvSpPr>
+            <a:spLocks noGrp="1"/>
+          </p:cNvSpPr>
+          <p:nvPr>
+            <p:ph type="sldNum" sz="quarter" idx="4294967295"/>
+          </p:nvPr>
+        </p:nvSpPr>
+        <p:spPr>
+          <a:xfrm>
+            <a:off x="11292840" y="6556248"/>
+            <a:ext cx="548640" cy="256032"/>
+          </a:xfrm>
+          <a:prstGeom prst="rect">
+            <a:avLst/>
+          </a:prstGeom>
+          <a:extLst>
+            <a:ext uri="{C572A759-6A51-4108-AA02-DFA0A04FC94B}">
+              <ma14:wrappingTextBoxFlag xmlns:ma14="http://schemas.microsoft.com/office/mac/drawingml/2011/main" val="0"/>
+            </a:ext>
+          </a:extLst>
+        </p:spPr>
+        <p:txBody>
+          <a:bodyPr/>
+          <a:lstStyle>
+            <a:lvl1pPr>
+              <a:defRPr sz="900">
+                <a:solidFill>
+                  <a:srgbClr val="1B3A6B"/>
+                </a:solidFill>
+                <a:latin typeface="Arial"/>
+                <a:ea typeface="Arial"/>
+                <a:cs typeface="Arial"/>
+              </a:defRPr>
+            </a:lvl1pPr>
+          </a:lstStyle>
+          <a:p>
+            <a:pPr algn="r"/>
+            <a:fld id="{F7021451-1387-4CA6-816F-3879F97B5CBC}" type="slidenum">
+              <a:rPr b="1" lang="en-US"/>
+              <a:t>12</a:t>
+            </a:fld>
+            <a:endParaRPr lang="en-US"/>
           </a:p>
         </p:txBody>
       </p:sp>
@@ -6579,6 +6819,45 @@
         </p:nvSpPr>
         <p:spPr>
           <a:xfrm>
+            <a:off x="457200" y="548640"/>
+            <a:ext cx="3474720" cy="1737360"/>
+          </a:xfrm>
+          <a:prstGeom prst="rect">
+            <a:avLst/>
+          </a:prstGeom>
+          <a:noFill/>
+          <a:ln/>
+        </p:spPr>
+        <p:txBody>
+          <a:bodyPr wrap="square" rtlCol="0" anchor="ctr"/>
+          <a:lstStyle/>
+          <a:p>
+            <a:pPr indent="0" marL="0">
+              <a:buNone/>
+            </a:pPr>
+            <a:r>
+              <a:rPr lang="en-US" sz="11000" b="1" dirty="0">
+                <a:solidFill>
+                  <a:srgbClr val="11396F"/>
+                </a:solidFill>
+                <a:latin typeface="Arial" pitchFamily="34" charset="0"/>
+                <a:ea typeface="Arial" pitchFamily="34" charset="-122"/>
+                <a:cs typeface="Arial" pitchFamily="34" charset="-120"/>
+              </a:rPr>
+              <a:t>04</a:t>
+            </a:r>
+            <a:endParaRPr lang="en-US" sz="11000" dirty="0"/>
+          </a:p>
+        </p:txBody>
+      </p:sp>
+      <p:sp>
+        <p:nvSpPr>
+          <p:cNvPr id="4" name="Text 2"/>
+          <p:cNvSpPr/>
+          <p:nvPr/>
+        </p:nvSpPr>
+        <p:spPr>
+          <a:xfrm>
             <a:off x="548640" y="2194560"/>
             <a:ext cx="3291840" cy="548640"/>
           </a:xfrm>
@@ -6612,7 +6891,46 @@
       </p:sp>
       <p:sp>
         <p:nvSpPr>
-          <p:cNvPr id="4" name="Text 2"/>
+          <p:cNvPr id="5" name="Text 3"/>
+          <p:cNvSpPr/>
+          <p:nvPr/>
+        </p:nvSpPr>
+        <p:spPr>
+          <a:xfrm>
+            <a:off x="548640" y="3200400"/>
+            <a:ext cx="3383280" cy="457200"/>
+          </a:xfrm>
+          <a:prstGeom prst="rect">
+            <a:avLst/>
+          </a:prstGeom>
+          <a:noFill/>
+          <a:ln/>
+        </p:spPr>
+        <p:txBody>
+          <a:bodyPr wrap="square" rtlCol="0" anchor="ctr"/>
+          <a:lstStyle/>
+          <a:p>
+            <a:pPr indent="0" marL="0">
+              <a:buNone/>
+            </a:pPr>
+            <a:r>
+              <a:rPr lang="en-US" sz="1100" dirty="0">
+                <a:solidFill>
+                  <a:srgbClr val="C7D2E3"/>
+                </a:solidFill>
+                <a:latin typeface="Arial" pitchFamily="34" charset="0"/>
+                <a:ea typeface="Arial" pitchFamily="34" charset="-122"/>
+                <a:cs typeface="Arial" pitchFamily="34" charset="-120"/>
+              </a:rPr>
+              <a:t>M2 · Etapa 2 · Regulação e negócio</a:t>
+            </a:r>
+            <a:endParaRPr lang="en-US" sz="1100" dirty="0"/>
+          </a:p>
+        </p:txBody>
+      </p:sp>
+      <p:sp>
+        <p:nvSpPr>
+          <p:cNvPr id="6" name="Text 4"/>
           <p:cNvSpPr/>
           <p:nvPr/>
         </p:nvSpPr>
@@ -6651,7 +6969,7 @@
       </p:sp>
       <p:pic>
         <p:nvPicPr>
-          <p:cNvPr id="5" name="Image 0" descr="/www/wwwroot/rexar/gdsolar/docs/curso/slides/assets/logo-gdsolar.png">    </p:cNvPr>
+          <p:cNvPr id="7" name="Image 0" descr="/www/wwwroot/rexar/gdsolar/docs/curso/slides/assets/logo-gdsolar.png">    </p:cNvPr>
           <p:cNvPicPr>
             <a:picLocks noChangeAspect="1"/>
           </p:cNvPicPr>
@@ -6675,7 +6993,7 @@
       </p:pic>
       <p:sp>
         <p:nvSpPr>
-          <p:cNvPr id="6" name="Text 3"/>
+          <p:cNvPr id="8" name="Text 5"/>
           <p:cNvSpPr/>
           <p:nvPr/>
         </p:nvSpPr>
@@ -6716,7 +7034,7 @@
       </p:sp>
       <p:sp>
         <p:nvSpPr>
-          <p:cNvPr id="7" name="Text 4"/>
+          <p:cNvPr id="9" name="Text 6"/>
           <p:cNvSpPr/>
           <p:nvPr/>
         </p:nvSpPr>
@@ -6757,7 +7075,7 @@
       </p:sp>
       <p:sp>
         <p:nvSpPr>
-          <p:cNvPr id="8" name="Text 5"/>
+          <p:cNvPr id="10" name="Text 7"/>
           <p:cNvSpPr/>
           <p:nvPr/>
         </p:nvSpPr>
@@ -6957,7 +7275,7 @@
         </p:blipFill>
         <p:spPr>
           <a:xfrm>
-            <a:off x="411480" y="6547104"/>
+            <a:off x="548640" y="6547104"/>
             <a:ext cx="274320" cy="274320"/>
           </a:xfrm>
           <a:prstGeom prst="rect">
@@ -6973,7 +7291,7 @@
         </p:nvSpPr>
         <p:spPr>
           <a:xfrm>
-            <a:off x="749808" y="6528816"/>
+            <a:off x="886968" y="6528816"/>
             <a:ext cx="6400800" cy="310896"/>
           </a:xfrm>
           <a:prstGeom prst="rect">
@@ -7013,7 +7331,7 @@
         <p:spPr>
           <a:xfrm>
             <a:off x="7132320" y="6528816"/>
-            <a:ext cx="4663440" cy="310896"/>
+            <a:ext cx="4023360" cy="310896"/>
           </a:xfrm>
           <a:prstGeom prst="rect">
             <a:avLst/>
@@ -7051,7 +7369,7 @@
         </p:nvSpPr>
         <p:spPr>
           <a:xfrm>
-            <a:off x="411480" y="384048"/>
+            <a:off x="548640" y="384048"/>
             <a:ext cx="82296" cy="658368"/>
           </a:xfrm>
           <a:prstGeom prst="rect">
@@ -7071,7 +7389,7 @@
         </p:nvSpPr>
         <p:spPr>
           <a:xfrm>
-            <a:off x="640080" y="292608"/>
+            <a:off x="777240" y="292608"/>
             <a:ext cx="10972800" cy="274320"/>
           </a:xfrm>
           <a:prstGeom prst="rect">
@@ -7110,8 +7428,8 @@
         </p:nvSpPr>
         <p:spPr>
           <a:xfrm>
-            <a:off x="640080" y="530352"/>
-            <a:ext cx="11155680" cy="566928"/>
+            <a:off x="777240" y="530352"/>
+            <a:ext cx="10881360" cy="566928"/>
           </a:xfrm>
           <a:prstGeom prst="rect">
             <a:avLst/>
@@ -7151,8 +7469,8 @@
         </p:nvSpPr>
         <p:spPr>
           <a:xfrm>
-            <a:off x="411480" y="1325880"/>
-            <a:ext cx="5554980" cy="4937760"/>
+            <a:off x="548640" y="1325880"/>
+            <a:ext cx="5408676" cy="4937760"/>
           </a:xfrm>
           <a:prstGeom prst="roundRect">
             <a:avLst>
@@ -7185,8 +7503,8 @@
         </p:nvSpPr>
         <p:spPr>
           <a:xfrm>
-            <a:off x="411480" y="1325880"/>
-            <a:ext cx="5554980" cy="109728"/>
+            <a:off x="548640" y="1325880"/>
+            <a:ext cx="5408676" cy="109728"/>
           </a:xfrm>
           <a:prstGeom prst="rect">
             <a:avLst/>
@@ -7205,8 +7523,8 @@
         </p:nvSpPr>
         <p:spPr>
           <a:xfrm>
-            <a:off x="685800" y="1554480"/>
-            <a:ext cx="5006340" cy="685800"/>
+            <a:off x="822960" y="1554480"/>
+            <a:ext cx="4860036" cy="685800"/>
           </a:xfrm>
           <a:prstGeom prst="rect">
             <a:avLst/>
@@ -7246,8 +7564,8 @@
         </p:nvSpPr>
         <p:spPr>
           <a:xfrm>
-            <a:off x="685800" y="2286000"/>
-            <a:ext cx="5006340" cy="3749040"/>
+            <a:off x="822960" y="2286000"/>
+            <a:ext cx="4860036" cy="3749040"/>
           </a:xfrm>
           <a:prstGeom prst="rect">
             <a:avLst/>
@@ -7265,7 +7583,7 @@
               <a:buNone/>
             </a:pPr>
             <a:r>
-              <a:rPr lang="en-US" sz="1800" dirty="0">
+              <a:rPr lang="en-US" sz="2200" dirty="0">
                 <a:solidFill>
                   <a:srgbClr val="1F2937"/>
                 </a:solidFill>
@@ -7275,7 +7593,7 @@
               </a:rPr>
               <a:t>Energia injetada (kWh) − consumo da própria usina = excedente que vira crédito (em kWh)</a:t>
             </a:r>
-            <a:endParaRPr lang="en-US" sz="1800" dirty="0"/>
+            <a:endParaRPr lang="en-US" sz="2200" dirty="0"/>
           </a:p>
         </p:txBody>
       </p:sp>
@@ -7287,8 +7605,8 @@
         </p:nvSpPr>
         <p:spPr>
           <a:xfrm>
-            <a:off x="6240780" y="1325880"/>
-            <a:ext cx="5554980" cy="4937760"/>
+            <a:off x="6231636" y="1325880"/>
+            <a:ext cx="5408676" cy="4937760"/>
           </a:xfrm>
           <a:prstGeom prst="roundRect">
             <a:avLst>
@@ -7321,8 +7639,8 @@
         </p:nvSpPr>
         <p:spPr>
           <a:xfrm>
-            <a:off x="6240780" y="1325880"/>
-            <a:ext cx="5554980" cy="109728"/>
+            <a:off x="6231636" y="1325880"/>
+            <a:ext cx="5408676" cy="109728"/>
           </a:xfrm>
           <a:prstGeom prst="rect">
             <a:avLst/>
@@ -7341,8 +7659,8 @@
         </p:nvSpPr>
         <p:spPr>
           <a:xfrm>
-            <a:off x="6515100" y="1554480"/>
-            <a:ext cx="5006340" cy="685800"/>
+            <a:off x="6505956" y="1554480"/>
+            <a:ext cx="4860036" cy="685800"/>
           </a:xfrm>
           <a:prstGeom prst="rect">
             <a:avLst/>
@@ -7382,8 +7700,8 @@
         </p:nvSpPr>
         <p:spPr>
           <a:xfrm>
-            <a:off x="6515100" y="2286000"/>
-            <a:ext cx="5006340" cy="3749040"/>
+            <a:off x="6505956" y="2286000"/>
+            <a:ext cx="4860036" cy="3749040"/>
           </a:xfrm>
           <a:prstGeom prst="rect">
             <a:avLst/>
@@ -7401,7 +7719,7 @@
               <a:buNone/>
             </a:pPr>
             <a:r>
-              <a:rPr lang="en-US" sz="1800" dirty="0">
+              <a:rPr lang="en-US" sz="2200" dirty="0">
                 <a:solidFill>
                   <a:srgbClr val="1F2937"/>
                 </a:solidFill>
@@ -7411,7 +7729,55 @@
               </a:rPr>
               <a:t>Rateio: cada beneficiário recebe um percentual dos créditos (informado à distribuidora)</a:t>
             </a:r>
-            <a:endParaRPr lang="en-US" sz="1800" dirty="0"/>
+            <a:endParaRPr lang="en-US" sz="2200" dirty="0"/>
+          </a:p>
+        </p:txBody>
+      </p:sp>
+      <p:sp>
+        <p:nvSpPr>
+          <p:cNvPr id="25" name="Slide Number Placeholder 0"/>
+          <p:cNvSpPr>
+            <a:spLocks noGrp="1"/>
+          </p:cNvSpPr>
+          <p:nvPr>
+            <p:ph type="sldNum" sz="quarter" idx="4294967295"/>
+          </p:nvPr>
+        </p:nvSpPr>
+        <p:spPr>
+          <a:xfrm>
+            <a:off x="11292840" y="6556248"/>
+            <a:ext cx="548640" cy="256032"/>
+          </a:xfrm>
+          <a:prstGeom prst="rect">
+            <a:avLst/>
+          </a:prstGeom>
+          <a:extLst>
+            <a:ext uri="{C572A759-6A51-4108-AA02-DFA0A04FC94B}">
+              <ma14:wrappingTextBoxFlag xmlns:ma14="http://schemas.microsoft.com/office/mac/drawingml/2011/main" val="0"/>
+            </a:ext>
+          </a:extLst>
+        </p:spPr>
+        <p:txBody>
+          <a:bodyPr/>
+          <a:lstStyle>
+            <a:lvl1pPr>
+              <a:defRPr sz="900">
+                <a:solidFill>
+                  <a:srgbClr val="1B3A6B"/>
+                </a:solidFill>
+                <a:latin typeface="Arial"/>
+                <a:ea typeface="Arial"/>
+                <a:cs typeface="Arial"/>
+              </a:defRPr>
+            </a:lvl1pPr>
+          </a:lstStyle>
+          <a:p>
+            <a:pPr algn="r"/>
+            <a:fld id="{F7021451-1387-4CA6-816F-3879F97B5CBC}" type="slidenum">
+              <a:rPr b="1" lang="en-US"/>
+              <a:t>14</a:t>
+            </a:fld>
+            <a:endParaRPr lang="en-US"/>
           </a:p>
         </p:txBody>
       </p:sp>
@@ -7488,7 +7854,7 @@
         </p:blipFill>
         <p:spPr>
           <a:xfrm>
-            <a:off x="411480" y="6547104"/>
+            <a:off x="548640" y="6547104"/>
             <a:ext cx="274320" cy="274320"/>
           </a:xfrm>
           <a:prstGeom prst="rect">
@@ -7504,7 +7870,7 @@
         </p:nvSpPr>
         <p:spPr>
           <a:xfrm>
-            <a:off x="749808" y="6528816"/>
+            <a:off x="886968" y="6528816"/>
             <a:ext cx="6400800" cy="310896"/>
           </a:xfrm>
           <a:prstGeom prst="rect">
@@ -7544,7 +7910,7 @@
         <p:spPr>
           <a:xfrm>
             <a:off x="7132320" y="6528816"/>
-            <a:ext cx="4663440" cy="310896"/>
+            <a:ext cx="4023360" cy="310896"/>
           </a:xfrm>
           <a:prstGeom prst="rect">
             <a:avLst/>
@@ -7582,7 +7948,7 @@
         </p:nvSpPr>
         <p:spPr>
           <a:xfrm>
-            <a:off x="411480" y="384048"/>
+            <a:off x="548640" y="384048"/>
             <a:ext cx="82296" cy="658368"/>
           </a:xfrm>
           <a:prstGeom prst="rect">
@@ -7602,7 +7968,7 @@
         </p:nvSpPr>
         <p:spPr>
           <a:xfrm>
-            <a:off x="640080" y="292608"/>
+            <a:off x="777240" y="292608"/>
             <a:ext cx="10972800" cy="274320"/>
           </a:xfrm>
           <a:prstGeom prst="rect">
@@ -7641,8 +8007,8 @@
         </p:nvSpPr>
         <p:spPr>
           <a:xfrm>
-            <a:off x="640080" y="530352"/>
-            <a:ext cx="11155680" cy="566928"/>
+            <a:off x="777240" y="530352"/>
+            <a:ext cx="10881360" cy="566928"/>
           </a:xfrm>
           <a:prstGeom prst="rect">
             <a:avLst/>
@@ -7682,8 +8048,8 @@
         </p:nvSpPr>
         <p:spPr>
           <a:xfrm>
-            <a:off x="411480" y="1325880"/>
-            <a:ext cx="11384280" cy="4937760"/>
+            <a:off x="548640" y="1325880"/>
+            <a:ext cx="11091672" cy="4937760"/>
           </a:xfrm>
           <a:prstGeom prst="roundRect">
             <a:avLst>
@@ -7704,8 +8070,8 @@
         </p:nvSpPr>
         <p:spPr>
           <a:xfrm>
-            <a:off x="777240" y="1554480"/>
-            <a:ext cx="10652760" cy="4480560"/>
+            <a:off x="914400" y="1554480"/>
+            <a:ext cx="10360152" cy="4480560"/>
           </a:xfrm>
           <a:prstGeom prst="rect">
             <a:avLst/>
@@ -7726,7 +8092,7 @@
               <a:buNone/>
             </a:pPr>
             <a:r>
-              <a:rPr lang="en-US" sz="1800" b="1" dirty="0">
+              <a:rPr lang="en-US" sz="2400" b="1" dirty="0">
                 <a:solidFill>
                   <a:srgbClr val="FFFFFF"/>
                 </a:solidFill>
@@ -7736,7 +8102,7 @@
               </a:rPr>
               <a:t>Padaria: consumo 2.500 kWh · créditos recebidos 2.400 kWh</a:t>
             </a:r>
-            <a:endParaRPr lang="en-US" sz="1800" dirty="0"/>
+            <a:endParaRPr lang="en-US" sz="2400" dirty="0"/>
           </a:p>
           <a:p>
             <a:pPr indent="0" marL="0">
@@ -7746,7 +8112,7 @@
               <a:buNone/>
             </a:pPr>
             <a:r>
-              <a:rPr lang="en-US" sz="1800" b="1" dirty="0">
+              <a:rPr lang="en-US" sz="2400" b="1" dirty="0">
                 <a:solidFill>
                   <a:srgbClr val="F7A23B"/>
                 </a:solidFill>
@@ -7756,7 +8122,55 @@
               </a:rPr>
               <a:t>Paga à distribuidora: 100 kWh (mínimo trifásico) + parcela não compensada do Fio B sobre 2.400 kWh + iluminação pública</a:t>
             </a:r>
-            <a:endParaRPr lang="en-US" sz="1800" dirty="0"/>
+            <a:endParaRPr lang="en-US" sz="2400" dirty="0"/>
+          </a:p>
+        </p:txBody>
+      </p:sp>
+      <p:sp>
+        <p:nvSpPr>
+          <p:cNvPr id="25" name="Slide Number Placeholder 0"/>
+          <p:cNvSpPr>
+            <a:spLocks noGrp="1"/>
+          </p:cNvSpPr>
+          <p:nvPr>
+            <p:ph type="sldNum" sz="quarter" idx="4294967295"/>
+          </p:nvPr>
+        </p:nvSpPr>
+        <p:spPr>
+          <a:xfrm>
+            <a:off x="11292840" y="6556248"/>
+            <a:ext cx="548640" cy="256032"/>
+          </a:xfrm>
+          <a:prstGeom prst="rect">
+            <a:avLst/>
+          </a:prstGeom>
+          <a:extLst>
+            <a:ext uri="{C572A759-6A51-4108-AA02-DFA0A04FC94B}">
+              <ma14:wrappingTextBoxFlag xmlns:ma14="http://schemas.microsoft.com/office/mac/drawingml/2011/main" val="0"/>
+            </a:ext>
+          </a:extLst>
+        </p:spPr>
+        <p:txBody>
+          <a:bodyPr/>
+          <a:lstStyle>
+            <a:lvl1pPr>
+              <a:defRPr sz="900">
+                <a:solidFill>
+                  <a:srgbClr val="1B3A6B"/>
+                </a:solidFill>
+                <a:latin typeface="Arial"/>
+                <a:ea typeface="Arial"/>
+                <a:cs typeface="Arial"/>
+              </a:defRPr>
+            </a:lvl1pPr>
+          </a:lstStyle>
+          <a:p>
+            <a:pPr algn="r"/>
+            <a:fld id="{F7021451-1387-4CA6-816F-3879F97B5CBC}" type="slidenum">
+              <a:rPr b="1" lang="en-US"/>
+              <a:t>15</a:t>
+            </a:fld>
+            <a:endParaRPr lang="en-US"/>
           </a:p>
         </p:txBody>
       </p:sp>
@@ -7833,7 +8247,7 @@
         </p:blipFill>
         <p:spPr>
           <a:xfrm>
-            <a:off x="411480" y="6547104"/>
+            <a:off x="548640" y="6547104"/>
             <a:ext cx="274320" cy="274320"/>
           </a:xfrm>
           <a:prstGeom prst="rect">
@@ -7849,7 +8263,7 @@
         </p:nvSpPr>
         <p:spPr>
           <a:xfrm>
-            <a:off x="749808" y="6528816"/>
+            <a:off x="886968" y="6528816"/>
             <a:ext cx="6400800" cy="310896"/>
           </a:xfrm>
           <a:prstGeom prst="rect">
@@ -7889,7 +8303,7 @@
         <p:spPr>
           <a:xfrm>
             <a:off x="7132320" y="6528816"/>
-            <a:ext cx="4663440" cy="310896"/>
+            <a:ext cx="4023360" cy="310896"/>
           </a:xfrm>
           <a:prstGeom prst="rect">
             <a:avLst/>
@@ -7927,7 +8341,7 @@
         </p:nvSpPr>
         <p:spPr>
           <a:xfrm>
-            <a:off x="411480" y="384048"/>
+            <a:off x="548640" y="384048"/>
             <a:ext cx="82296" cy="658368"/>
           </a:xfrm>
           <a:prstGeom prst="rect">
@@ -7947,7 +8361,7 @@
         </p:nvSpPr>
         <p:spPr>
           <a:xfrm>
-            <a:off x="640080" y="292608"/>
+            <a:off x="777240" y="292608"/>
             <a:ext cx="10972800" cy="274320"/>
           </a:xfrm>
           <a:prstGeom prst="rect">
@@ -7986,8 +8400,8 @@
         </p:nvSpPr>
         <p:spPr>
           <a:xfrm>
-            <a:off x="640080" y="530352"/>
-            <a:ext cx="11155680" cy="566928"/>
+            <a:off x="777240" y="530352"/>
+            <a:ext cx="10881360" cy="566928"/>
           </a:xfrm>
           <a:prstGeom prst="rect">
             <a:avLst/>
@@ -8027,8 +8441,8 @@
         </p:nvSpPr>
         <p:spPr>
           <a:xfrm>
-            <a:off x="411480" y="1325880"/>
-            <a:ext cx="5554980" cy="4937760"/>
+            <a:off x="548640" y="1325880"/>
+            <a:ext cx="5408676" cy="4937760"/>
           </a:xfrm>
           <a:prstGeom prst="roundRect">
             <a:avLst>
@@ -8061,8 +8475,8 @@
         </p:nvSpPr>
         <p:spPr>
           <a:xfrm>
-            <a:off x="411480" y="1325880"/>
-            <a:ext cx="5554980" cy="109728"/>
+            <a:off x="548640" y="1325880"/>
+            <a:ext cx="5408676" cy="109728"/>
           </a:xfrm>
           <a:prstGeom prst="rect">
             <a:avLst/>
@@ -8081,8 +8495,8 @@
         </p:nvSpPr>
         <p:spPr>
           <a:xfrm>
-            <a:off x="685800" y="1554480"/>
-            <a:ext cx="5006340" cy="685800"/>
+            <a:off x="822960" y="1554480"/>
+            <a:ext cx="4860036" cy="685800"/>
           </a:xfrm>
           <a:prstGeom prst="rect">
             <a:avLst/>
@@ -8122,8 +8536,8 @@
         </p:nvSpPr>
         <p:spPr>
           <a:xfrm>
-            <a:off x="685800" y="2286000"/>
-            <a:ext cx="5006340" cy="3749040"/>
+            <a:off x="822960" y="2286000"/>
+            <a:ext cx="4860036" cy="3749040"/>
           </a:xfrm>
           <a:prstGeom prst="rect">
             <a:avLst/>
@@ -8209,8 +8623,8 @@
         </p:nvSpPr>
         <p:spPr>
           <a:xfrm>
-            <a:off x="6240780" y="1325880"/>
-            <a:ext cx="5554980" cy="4937760"/>
+            <a:off x="6231636" y="1325880"/>
+            <a:ext cx="5408676" cy="4937760"/>
           </a:xfrm>
           <a:prstGeom prst="roundRect">
             <a:avLst>
@@ -8243,8 +8657,8 @@
         </p:nvSpPr>
         <p:spPr>
           <a:xfrm>
-            <a:off x="6240780" y="1325880"/>
-            <a:ext cx="5554980" cy="109728"/>
+            <a:off x="6231636" y="1325880"/>
+            <a:ext cx="5408676" cy="109728"/>
           </a:xfrm>
           <a:prstGeom prst="rect">
             <a:avLst/>
@@ -8263,8 +8677,8 @@
         </p:nvSpPr>
         <p:spPr>
           <a:xfrm>
-            <a:off x="6515100" y="1554480"/>
-            <a:ext cx="5006340" cy="685800"/>
+            <a:off x="6505956" y="1554480"/>
+            <a:ext cx="4860036" cy="685800"/>
           </a:xfrm>
           <a:prstGeom prst="rect">
             <a:avLst/>
@@ -8304,8 +8718,8 @@
         </p:nvSpPr>
         <p:spPr>
           <a:xfrm>
-            <a:off x="6515100" y="2286000"/>
-            <a:ext cx="5006340" cy="3749040"/>
+            <a:off x="6505956" y="2286000"/>
+            <a:ext cx="4860036" cy="3749040"/>
           </a:xfrm>
           <a:prstGeom prst="rect">
             <a:avLst/>
@@ -8327,7 +8741,7 @@
               <a:buChar char="●"/>
             </a:pPr>
             <a:r>
-              <a:rPr lang="en-US" sz="1600" dirty="0">
+              <a:rPr lang="en-US" sz="1700" dirty="0">
                 <a:solidFill>
                   <a:srgbClr val="1F2937"/>
                 </a:solidFill>
@@ -8337,7 +8751,7 @@
               </a:rPr>
               <a:t>Distribuidora: mede, gera créditos, rateia, fatura o cliente</a:t>
             </a:r>
-            <a:endParaRPr lang="en-US" sz="1600" dirty="0"/>
+            <a:endParaRPr lang="en-US" sz="1700" dirty="0"/>
           </a:p>
           <a:p>
             <a:pPr marL="342900" indent="-342900">
@@ -8348,7 +8762,7 @@
               <a:buChar char="●"/>
             </a:pPr>
             <a:r>
-              <a:rPr lang="en-US" sz="1600" dirty="0">
+              <a:rPr lang="en-US" sz="1700" dirty="0">
                 <a:solidFill>
                   <a:srgbClr val="1F2937"/>
                 </a:solidFill>
@@ -8358,7 +8772,55 @@
               </a:rPr>
               <a:t>Sua empresa: mantém a lista de rateio, confere as faturas, cobra o cliente, paga o produtor, acompanha saldos</a:t>
             </a:r>
-            <a:endParaRPr lang="en-US" sz="1600" dirty="0"/>
+            <a:endParaRPr lang="en-US" sz="1700" dirty="0"/>
+          </a:p>
+        </p:txBody>
+      </p:sp>
+      <p:sp>
+        <p:nvSpPr>
+          <p:cNvPr id="25" name="Slide Number Placeholder 0"/>
+          <p:cNvSpPr>
+            <a:spLocks noGrp="1"/>
+          </p:cNvSpPr>
+          <p:nvPr>
+            <p:ph type="sldNum" sz="quarter" idx="4294967295"/>
+          </p:nvPr>
+        </p:nvSpPr>
+        <p:spPr>
+          <a:xfrm>
+            <a:off x="11292840" y="6556248"/>
+            <a:ext cx="548640" cy="256032"/>
+          </a:xfrm>
+          <a:prstGeom prst="rect">
+            <a:avLst/>
+          </a:prstGeom>
+          <a:extLst>
+            <a:ext uri="{C572A759-6A51-4108-AA02-DFA0A04FC94B}">
+              <ma14:wrappingTextBoxFlag xmlns:ma14="http://schemas.microsoft.com/office/mac/drawingml/2011/main" val="0"/>
+            </a:ext>
+          </a:extLst>
+        </p:spPr>
+        <p:txBody>
+          <a:bodyPr/>
+          <a:lstStyle>
+            <a:lvl1pPr>
+              <a:defRPr sz="900">
+                <a:solidFill>
+                  <a:srgbClr val="1B3A6B"/>
+                </a:solidFill>
+                <a:latin typeface="Arial"/>
+                <a:ea typeface="Arial"/>
+                <a:cs typeface="Arial"/>
+              </a:defRPr>
+            </a:lvl1pPr>
+          </a:lstStyle>
+          <a:p>
+            <a:pPr algn="r"/>
+            <a:fld id="{F7021451-1387-4CA6-816F-3879F97B5CBC}" type="slidenum">
+              <a:rPr b="1" lang="en-US"/>
+              <a:t>16</a:t>
+            </a:fld>
+            <a:endParaRPr lang="en-US"/>
           </a:p>
         </p:txBody>
       </p:sp>
@@ -8435,7 +8897,7 @@
         </p:blipFill>
         <p:spPr>
           <a:xfrm>
-            <a:off x="411480" y="6547104"/>
+            <a:off x="548640" y="6547104"/>
             <a:ext cx="274320" cy="274320"/>
           </a:xfrm>
           <a:prstGeom prst="rect">
@@ -8451,7 +8913,7 @@
         </p:nvSpPr>
         <p:spPr>
           <a:xfrm>
-            <a:off x="749808" y="6528816"/>
+            <a:off x="886968" y="6528816"/>
             <a:ext cx="6400800" cy="310896"/>
           </a:xfrm>
           <a:prstGeom prst="rect">
@@ -8491,7 +8953,7 @@
         <p:spPr>
           <a:xfrm>
             <a:off x="7132320" y="6528816"/>
-            <a:ext cx="4663440" cy="310896"/>
+            <a:ext cx="4023360" cy="310896"/>
           </a:xfrm>
           <a:prstGeom prst="rect">
             <a:avLst/>
@@ -8529,7 +8991,7 @@
         </p:nvSpPr>
         <p:spPr>
           <a:xfrm>
-            <a:off x="411480" y="384048"/>
+            <a:off x="548640" y="384048"/>
             <a:ext cx="82296" cy="658368"/>
           </a:xfrm>
           <a:prstGeom prst="rect">
@@ -8549,7 +9011,7 @@
         </p:nvSpPr>
         <p:spPr>
           <a:xfrm>
-            <a:off x="640080" y="292608"/>
+            <a:off x="777240" y="292608"/>
             <a:ext cx="10972800" cy="274320"/>
           </a:xfrm>
           <a:prstGeom prst="rect">
@@ -8588,8 +9050,8 @@
         </p:nvSpPr>
         <p:spPr>
           <a:xfrm>
-            <a:off x="640080" y="530352"/>
-            <a:ext cx="11155680" cy="566928"/>
+            <a:off x="777240" y="530352"/>
+            <a:ext cx="10881360" cy="566928"/>
           </a:xfrm>
           <a:prstGeom prst="rect">
             <a:avLst/>
@@ -8629,8 +9091,8 @@
         </p:nvSpPr>
         <p:spPr>
           <a:xfrm>
-            <a:off x="411480" y="1325880"/>
-            <a:ext cx="5577840" cy="2331720"/>
+            <a:off x="548640" y="1325880"/>
+            <a:ext cx="5431536" cy="2331720"/>
           </a:xfrm>
           <a:prstGeom prst="roundRect">
             <a:avLst>
@@ -8663,7 +9125,7 @@
         </p:nvSpPr>
         <p:spPr>
           <a:xfrm>
-            <a:off x="594360" y="1508760"/>
+            <a:off x="731520" y="1508760"/>
             <a:ext cx="457200" cy="457200"/>
           </a:xfrm>
           <a:prstGeom prst="ellipse">
@@ -8683,7 +9145,7 @@
         </p:nvSpPr>
         <p:spPr>
           <a:xfrm>
-            <a:off x="594360" y="1508760"/>
+            <a:off x="731520" y="1508760"/>
             <a:ext cx="457200" cy="457200"/>
           </a:xfrm>
           <a:prstGeom prst="rect">
@@ -8722,8 +9184,8 @@
         </p:nvSpPr>
         <p:spPr>
           <a:xfrm>
-            <a:off x="1188720" y="1435608"/>
-            <a:ext cx="4663440" cy="2112264"/>
+            <a:off x="1325880" y="1435608"/>
+            <a:ext cx="4517136" cy="2112264"/>
           </a:xfrm>
           <a:prstGeom prst="rect">
             <a:avLst/>
@@ -8763,8 +9225,8 @@
         </p:nvSpPr>
         <p:spPr>
           <a:xfrm>
-            <a:off x="6217920" y="1325880"/>
-            <a:ext cx="5577840" cy="2331720"/>
+            <a:off x="6208776" y="1325880"/>
+            <a:ext cx="5431536" cy="2331720"/>
           </a:xfrm>
           <a:prstGeom prst="roundRect">
             <a:avLst>
@@ -8797,7 +9259,7 @@
         </p:nvSpPr>
         <p:spPr>
           <a:xfrm>
-            <a:off x="6400800" y="1508760"/>
+            <a:off x="6391656" y="1508760"/>
             <a:ext cx="457200" cy="457200"/>
           </a:xfrm>
           <a:prstGeom prst="ellipse">
@@ -8817,7 +9279,7 @@
         </p:nvSpPr>
         <p:spPr>
           <a:xfrm>
-            <a:off x="6400800" y="1508760"/>
+            <a:off x="6391656" y="1508760"/>
             <a:ext cx="457200" cy="457200"/>
           </a:xfrm>
           <a:prstGeom prst="rect">
@@ -8856,8 +9318,8 @@
         </p:nvSpPr>
         <p:spPr>
           <a:xfrm>
-            <a:off x="6995160" y="1435608"/>
-            <a:ext cx="4663440" cy="2112264"/>
+            <a:off x="6986016" y="1435608"/>
+            <a:ext cx="4517136" cy="2112264"/>
           </a:xfrm>
           <a:prstGeom prst="rect">
             <a:avLst/>
@@ -8897,8 +9359,8 @@
         </p:nvSpPr>
         <p:spPr>
           <a:xfrm>
-            <a:off x="411480" y="3886200"/>
-            <a:ext cx="5577840" cy="2331720"/>
+            <a:off x="548640" y="3886200"/>
+            <a:ext cx="5431536" cy="2331720"/>
           </a:xfrm>
           <a:prstGeom prst="roundRect">
             <a:avLst>
@@ -8931,7 +9393,7 @@
         </p:nvSpPr>
         <p:spPr>
           <a:xfrm>
-            <a:off x="594360" y="4069080"/>
+            <a:off x="731520" y="4069080"/>
             <a:ext cx="457200" cy="457200"/>
           </a:xfrm>
           <a:prstGeom prst="ellipse">
@@ -8951,7 +9413,7 @@
         </p:nvSpPr>
         <p:spPr>
           <a:xfrm>
-            <a:off x="594360" y="4069080"/>
+            <a:off x="731520" y="4069080"/>
             <a:ext cx="457200" cy="457200"/>
           </a:xfrm>
           <a:prstGeom prst="rect">
@@ -8990,8 +9452,8 @@
         </p:nvSpPr>
         <p:spPr>
           <a:xfrm>
-            <a:off x="1188720" y="3995928"/>
-            <a:ext cx="4663440" cy="2112264"/>
+            <a:off x="1325880" y="3995928"/>
+            <a:ext cx="4517136" cy="2112264"/>
           </a:xfrm>
           <a:prstGeom prst="rect">
             <a:avLst/>
@@ -9031,8 +9493,8 @@
         </p:nvSpPr>
         <p:spPr>
           <a:xfrm>
-            <a:off x="6217920" y="3886200"/>
-            <a:ext cx="5577840" cy="2331720"/>
+            <a:off x="6208776" y="3886200"/>
+            <a:ext cx="5431536" cy="2331720"/>
           </a:xfrm>
           <a:prstGeom prst="roundRect">
             <a:avLst>
@@ -9065,7 +9527,7 @@
         </p:nvSpPr>
         <p:spPr>
           <a:xfrm>
-            <a:off x="6400800" y="4069080"/>
+            <a:off x="6391656" y="4069080"/>
             <a:ext cx="457200" cy="457200"/>
           </a:xfrm>
           <a:prstGeom prst="ellipse">
@@ -9085,7 +9547,7 @@
         </p:nvSpPr>
         <p:spPr>
           <a:xfrm>
-            <a:off x="6400800" y="4069080"/>
+            <a:off x="6391656" y="4069080"/>
             <a:ext cx="457200" cy="457200"/>
           </a:xfrm>
           <a:prstGeom prst="rect">
@@ -9124,8 +9586,8 @@
         </p:nvSpPr>
         <p:spPr>
           <a:xfrm>
-            <a:off x="6995160" y="3995928"/>
-            <a:ext cx="4663440" cy="2112264"/>
+            <a:off x="6986016" y="3995928"/>
+            <a:ext cx="4517136" cy="2112264"/>
           </a:xfrm>
           <a:prstGeom prst="rect">
             <a:avLst/>
@@ -9154,6 +9616,54 @@
               <a:t>Fatura da distribuidora = base da sua cobrança</a:t>
             </a:r>
             <a:endParaRPr lang="en-US" sz="1800" dirty="0"/>
+          </a:p>
+        </p:txBody>
+      </p:sp>
+      <p:sp>
+        <p:nvSpPr>
+          <p:cNvPr id="25" name="Slide Number Placeholder 0"/>
+          <p:cNvSpPr>
+            <a:spLocks noGrp="1"/>
+          </p:cNvSpPr>
+          <p:nvPr>
+            <p:ph type="sldNum" sz="quarter" idx="4294967295"/>
+          </p:nvPr>
+        </p:nvSpPr>
+        <p:spPr>
+          <a:xfrm>
+            <a:off x="11292840" y="6556248"/>
+            <a:ext cx="548640" cy="256032"/>
+          </a:xfrm>
+          <a:prstGeom prst="rect">
+            <a:avLst/>
+          </a:prstGeom>
+          <a:extLst>
+            <a:ext uri="{C572A759-6A51-4108-AA02-DFA0A04FC94B}">
+              <ma14:wrappingTextBoxFlag xmlns:ma14="http://schemas.microsoft.com/office/mac/drawingml/2011/main" val="0"/>
+            </a:ext>
+          </a:extLst>
+        </p:spPr>
+        <p:txBody>
+          <a:bodyPr/>
+          <a:lstStyle>
+            <a:lvl1pPr>
+              <a:defRPr sz="900">
+                <a:solidFill>
+                  <a:srgbClr val="1B3A6B"/>
+                </a:solidFill>
+                <a:latin typeface="Arial"/>
+                <a:ea typeface="Arial"/>
+                <a:cs typeface="Arial"/>
+              </a:defRPr>
+            </a:lvl1pPr>
+          </a:lstStyle>
+          <a:p>
+            <a:pPr algn="r"/>
+            <a:fld id="{F7021451-1387-4CA6-816F-3879F97B5CBC}" type="slidenum">
+              <a:rPr b="1" lang="en-US"/>
+              <a:t>17</a:t>
+            </a:fld>
+            <a:endParaRPr lang="en-US"/>
           </a:p>
         </p:txBody>
       </p:sp>
@@ -9217,6 +9727,45 @@
         </p:nvSpPr>
         <p:spPr>
           <a:xfrm>
+            <a:off x="457200" y="548640"/>
+            <a:ext cx="3474720" cy="1737360"/>
+          </a:xfrm>
+          <a:prstGeom prst="rect">
+            <a:avLst/>
+          </a:prstGeom>
+          <a:noFill/>
+          <a:ln/>
+        </p:spPr>
+        <p:txBody>
+          <a:bodyPr wrap="square" rtlCol="0" anchor="ctr"/>
+          <a:lstStyle/>
+          <a:p>
+            <a:pPr indent="0" marL="0">
+              <a:buNone/>
+            </a:pPr>
+            <a:r>
+              <a:rPr lang="en-US" sz="11000" b="1" dirty="0">
+                <a:solidFill>
+                  <a:srgbClr val="11396F"/>
+                </a:solidFill>
+                <a:latin typeface="Arial" pitchFamily="34" charset="0"/>
+                <a:ea typeface="Arial" pitchFamily="34" charset="-122"/>
+                <a:cs typeface="Arial" pitchFamily="34" charset="-120"/>
+              </a:rPr>
+              <a:t>05</a:t>
+            </a:r>
+            <a:endParaRPr lang="en-US" sz="11000" dirty="0"/>
+          </a:p>
+        </p:txBody>
+      </p:sp>
+      <p:sp>
+        <p:nvSpPr>
+          <p:cNvPr id="4" name="Text 2"/>
+          <p:cNvSpPr/>
+          <p:nvPr/>
+        </p:nvSpPr>
+        <p:spPr>
+          <a:xfrm>
             <a:off x="548640" y="2194560"/>
             <a:ext cx="3291840" cy="548640"/>
           </a:xfrm>
@@ -9250,7 +9799,46 @@
       </p:sp>
       <p:sp>
         <p:nvSpPr>
-          <p:cNvPr id="4" name="Text 2"/>
+          <p:cNvPr id="5" name="Text 3"/>
+          <p:cNvSpPr/>
+          <p:nvPr/>
+        </p:nvSpPr>
+        <p:spPr>
+          <a:xfrm>
+            <a:off x="548640" y="3200400"/>
+            <a:ext cx="3383280" cy="457200"/>
+          </a:xfrm>
+          <a:prstGeom prst="rect">
+            <a:avLst/>
+          </a:prstGeom>
+          <a:noFill/>
+          <a:ln/>
+        </p:spPr>
+        <p:txBody>
+          <a:bodyPr wrap="square" rtlCol="0" anchor="ctr"/>
+          <a:lstStyle/>
+          <a:p>
+            <a:pPr indent="0" marL="0">
+              <a:buNone/>
+            </a:pPr>
+            <a:r>
+              <a:rPr lang="en-US" sz="1100" dirty="0">
+                <a:solidFill>
+                  <a:srgbClr val="C7D2E3"/>
+                </a:solidFill>
+                <a:latin typeface="Arial" pitchFamily="34" charset="0"/>
+                <a:ea typeface="Arial" pitchFamily="34" charset="-122"/>
+                <a:cs typeface="Arial" pitchFamily="34" charset="-120"/>
+              </a:rPr>
+              <a:t>M2 · Etapa 2 · Regulação e negócio</a:t>
+            </a:r>
+            <a:endParaRPr lang="en-US" sz="1100" dirty="0"/>
+          </a:p>
+        </p:txBody>
+      </p:sp>
+      <p:sp>
+        <p:nvSpPr>
+          <p:cNvPr id="6" name="Text 4"/>
           <p:cNvSpPr/>
           <p:nvPr/>
         </p:nvSpPr>
@@ -9289,7 +9877,7 @@
       </p:sp>
       <p:pic>
         <p:nvPicPr>
-          <p:cNvPr id="5" name="Image 0" descr="/www/wwwroot/rexar/gdsolar/docs/curso/slides/assets/logo-gdsolar.png">    </p:cNvPr>
+          <p:cNvPr id="7" name="Image 0" descr="/www/wwwroot/rexar/gdsolar/docs/curso/slides/assets/logo-gdsolar.png">    </p:cNvPr>
           <p:cNvPicPr>
             <a:picLocks noChangeAspect="1"/>
           </p:cNvPicPr>
@@ -9313,7 +9901,7 @@
       </p:pic>
       <p:sp>
         <p:nvSpPr>
-          <p:cNvPr id="6" name="Text 3"/>
+          <p:cNvPr id="8" name="Text 5"/>
           <p:cNvSpPr/>
           <p:nvPr/>
         </p:nvSpPr>
@@ -9354,7 +9942,7 @@
       </p:sp>
       <p:sp>
         <p:nvSpPr>
-          <p:cNvPr id="7" name="Text 4"/>
+          <p:cNvPr id="9" name="Text 6"/>
           <p:cNvSpPr/>
           <p:nvPr/>
         </p:nvSpPr>
@@ -9395,7 +9983,7 @@
       </p:sp>
       <p:sp>
         <p:nvSpPr>
-          <p:cNvPr id="8" name="Text 5"/>
+          <p:cNvPr id="10" name="Text 7"/>
           <p:cNvSpPr/>
           <p:nvPr/>
         </p:nvSpPr>
@@ -9595,7 +10183,7 @@
         </p:blipFill>
         <p:spPr>
           <a:xfrm>
-            <a:off x="411480" y="6547104"/>
+            <a:off x="548640" y="6547104"/>
             <a:ext cx="274320" cy="274320"/>
           </a:xfrm>
           <a:prstGeom prst="rect">
@@ -9611,7 +10199,7 @@
         </p:nvSpPr>
         <p:spPr>
           <a:xfrm>
-            <a:off x="749808" y="6528816"/>
+            <a:off x="886968" y="6528816"/>
             <a:ext cx="6400800" cy="310896"/>
           </a:xfrm>
           <a:prstGeom prst="rect">
@@ -9651,7 +10239,7 @@
         <p:spPr>
           <a:xfrm>
             <a:off x="7132320" y="6528816"/>
-            <a:ext cx="4663440" cy="310896"/>
+            <a:ext cx="4023360" cy="310896"/>
           </a:xfrm>
           <a:prstGeom prst="rect">
             <a:avLst/>
@@ -9689,7 +10277,7 @@
         </p:nvSpPr>
         <p:spPr>
           <a:xfrm>
-            <a:off x="411480" y="384048"/>
+            <a:off x="548640" y="384048"/>
             <a:ext cx="82296" cy="658368"/>
           </a:xfrm>
           <a:prstGeom prst="rect">
@@ -9709,7 +10297,7 @@
         </p:nvSpPr>
         <p:spPr>
           <a:xfrm>
-            <a:off x="640080" y="292608"/>
+            <a:off x="777240" y="292608"/>
             <a:ext cx="10972800" cy="274320"/>
           </a:xfrm>
           <a:prstGeom prst="rect">
@@ -9748,8 +10336,8 @@
         </p:nvSpPr>
         <p:spPr>
           <a:xfrm>
-            <a:off x="640080" y="530352"/>
-            <a:ext cx="11155680" cy="566928"/>
+            <a:off x="777240" y="530352"/>
+            <a:ext cx="10881360" cy="566928"/>
           </a:xfrm>
           <a:prstGeom prst="rect">
             <a:avLst/>
@@ -9789,8 +10377,8 @@
         </p:nvSpPr>
         <p:spPr>
           <a:xfrm>
-            <a:off x="411480" y="1325880"/>
-            <a:ext cx="5577840" cy="4892040"/>
+            <a:off x="548640" y="1325880"/>
+            <a:ext cx="5431536" cy="4892040"/>
           </a:xfrm>
           <a:prstGeom prst="roundRect">
             <a:avLst>
@@ -9823,7 +10411,7 @@
         </p:nvSpPr>
         <p:spPr>
           <a:xfrm>
-            <a:off x="594360" y="1508760"/>
+            <a:off x="731520" y="1508760"/>
             <a:ext cx="457200" cy="457200"/>
           </a:xfrm>
           <a:prstGeom prst="ellipse">
@@ -9843,7 +10431,7 @@
         </p:nvSpPr>
         <p:spPr>
           <a:xfrm>
-            <a:off x="594360" y="1508760"/>
+            <a:off x="731520" y="1508760"/>
             <a:ext cx="457200" cy="457200"/>
           </a:xfrm>
           <a:prstGeom prst="rect">
@@ -9882,8 +10470,8 @@
         </p:nvSpPr>
         <p:spPr>
           <a:xfrm>
-            <a:off x="1188720" y="1435608"/>
-            <a:ext cx="4663440" cy="4672584"/>
+            <a:off x="1325880" y="1435608"/>
+            <a:ext cx="4517136" cy="4672584"/>
           </a:xfrm>
           <a:prstGeom prst="rect">
             <a:avLst/>
@@ -9923,8 +10511,8 @@
         </p:nvSpPr>
         <p:spPr>
           <a:xfrm>
-            <a:off x="6217920" y="1325880"/>
-            <a:ext cx="5577840" cy="4892040"/>
+            <a:off x="6208776" y="1325880"/>
+            <a:ext cx="5431536" cy="4892040"/>
           </a:xfrm>
           <a:prstGeom prst="roundRect">
             <a:avLst>
@@ -9957,7 +10545,7 @@
         </p:nvSpPr>
         <p:spPr>
           <a:xfrm>
-            <a:off x="6400800" y="1508760"/>
+            <a:off x="6391656" y="1508760"/>
             <a:ext cx="457200" cy="457200"/>
           </a:xfrm>
           <a:prstGeom prst="ellipse">
@@ -9977,7 +10565,7 @@
         </p:nvSpPr>
         <p:spPr>
           <a:xfrm>
-            <a:off x="6400800" y="1508760"/>
+            <a:off x="6391656" y="1508760"/>
             <a:ext cx="457200" cy="457200"/>
           </a:xfrm>
           <a:prstGeom prst="rect">
@@ -10016,8 +10604,8 @@
         </p:nvSpPr>
         <p:spPr>
           <a:xfrm>
-            <a:off x="6995160" y="1435608"/>
-            <a:ext cx="4663440" cy="4672584"/>
+            <a:off x="6986016" y="1435608"/>
+            <a:ext cx="4517136" cy="4672584"/>
           </a:xfrm>
           <a:prstGeom prst="rect">
             <a:avLst/>
@@ -10046,6 +10634,54 @@
               <a:t>regra antiga (compensação integral) até 31/12/2045</a:t>
             </a:r>
             <a:endParaRPr lang="en-US" sz="1800" dirty="0"/>
+          </a:p>
+        </p:txBody>
+      </p:sp>
+      <p:sp>
+        <p:nvSpPr>
+          <p:cNvPr id="25" name="Slide Number Placeholder 0"/>
+          <p:cNvSpPr>
+            <a:spLocks noGrp="1"/>
+          </p:cNvSpPr>
+          <p:nvPr>
+            <p:ph type="sldNum" sz="quarter" idx="4294967295"/>
+          </p:nvPr>
+        </p:nvSpPr>
+        <p:spPr>
+          <a:xfrm>
+            <a:off x="11292840" y="6556248"/>
+            <a:ext cx="548640" cy="256032"/>
+          </a:xfrm>
+          <a:prstGeom prst="rect">
+            <a:avLst/>
+          </a:prstGeom>
+          <a:extLst>
+            <a:ext uri="{C572A759-6A51-4108-AA02-DFA0A04FC94B}">
+              <ma14:wrappingTextBoxFlag xmlns:ma14="http://schemas.microsoft.com/office/mac/drawingml/2011/main" val="0"/>
+            </a:ext>
+          </a:extLst>
+        </p:spPr>
+        <p:txBody>
+          <a:bodyPr/>
+          <a:lstStyle>
+            <a:lvl1pPr>
+              <a:defRPr sz="900">
+                <a:solidFill>
+                  <a:srgbClr val="1B3A6B"/>
+                </a:solidFill>
+                <a:latin typeface="Arial"/>
+                <a:ea typeface="Arial"/>
+                <a:cs typeface="Arial"/>
+              </a:defRPr>
+            </a:lvl1pPr>
+          </a:lstStyle>
+          <a:p>
+            <a:pPr algn="r"/>
+            <a:fld id="{F7021451-1387-4CA6-816F-3879F97B5CBC}" type="slidenum">
+              <a:rPr b="1" lang="en-US"/>
+              <a:t>19</a:t>
+            </a:fld>
+            <a:endParaRPr lang="en-US"/>
           </a:p>
         </p:txBody>
       </p:sp>
@@ -10109,6 +10745,45 @@
         </p:nvSpPr>
         <p:spPr>
           <a:xfrm>
+            <a:off x="457200" y="548640"/>
+            <a:ext cx="3474720" cy="1737360"/>
+          </a:xfrm>
+          <a:prstGeom prst="rect">
+            <a:avLst/>
+          </a:prstGeom>
+          <a:noFill/>
+          <a:ln/>
+        </p:spPr>
+        <p:txBody>
+          <a:bodyPr wrap="square" rtlCol="0" anchor="ctr"/>
+          <a:lstStyle/>
+          <a:p>
+            <a:pPr indent="0" marL="0">
+              <a:buNone/>
+            </a:pPr>
+            <a:r>
+              <a:rPr lang="en-US" sz="11000" b="1" dirty="0">
+                <a:solidFill>
+                  <a:srgbClr val="11396F"/>
+                </a:solidFill>
+                <a:latin typeface="Arial" pitchFamily="34" charset="0"/>
+                <a:ea typeface="Arial" pitchFamily="34" charset="-122"/>
+                <a:cs typeface="Arial" pitchFamily="34" charset="-120"/>
+              </a:rPr>
+              <a:t>01</a:t>
+            </a:r>
+            <a:endParaRPr lang="en-US" sz="11000" dirty="0"/>
+          </a:p>
+        </p:txBody>
+      </p:sp>
+      <p:sp>
+        <p:nvSpPr>
+          <p:cNvPr id="4" name="Text 2"/>
+          <p:cNvSpPr/>
+          <p:nvPr/>
+        </p:nvSpPr>
+        <p:spPr>
+          <a:xfrm>
             <a:off x="548640" y="2194560"/>
             <a:ext cx="3291840" cy="548640"/>
           </a:xfrm>
@@ -10142,7 +10817,46 @@
       </p:sp>
       <p:sp>
         <p:nvSpPr>
-          <p:cNvPr id="4" name="Text 2"/>
+          <p:cNvPr id="5" name="Text 3"/>
+          <p:cNvSpPr/>
+          <p:nvPr/>
+        </p:nvSpPr>
+        <p:spPr>
+          <a:xfrm>
+            <a:off x="548640" y="3200400"/>
+            <a:ext cx="3383280" cy="457200"/>
+          </a:xfrm>
+          <a:prstGeom prst="rect">
+            <a:avLst/>
+          </a:prstGeom>
+          <a:noFill/>
+          <a:ln/>
+        </p:spPr>
+        <p:txBody>
+          <a:bodyPr wrap="square" rtlCol="0" anchor="ctr"/>
+          <a:lstStyle/>
+          <a:p>
+            <a:pPr indent="0" marL="0">
+              <a:buNone/>
+            </a:pPr>
+            <a:r>
+              <a:rPr lang="en-US" sz="1100" dirty="0">
+                <a:solidFill>
+                  <a:srgbClr val="C7D2E3"/>
+                </a:solidFill>
+                <a:latin typeface="Arial" pitchFamily="34" charset="0"/>
+                <a:ea typeface="Arial" pitchFamily="34" charset="-122"/>
+                <a:cs typeface="Arial" pitchFamily="34" charset="-120"/>
+              </a:rPr>
+              <a:t>M2 · Etapa 2 · Regulação e negócio</a:t>
+            </a:r>
+            <a:endParaRPr lang="en-US" sz="1100" dirty="0"/>
+          </a:p>
+        </p:txBody>
+      </p:sp>
+      <p:sp>
+        <p:nvSpPr>
+          <p:cNvPr id="6" name="Text 4"/>
           <p:cNvSpPr/>
           <p:nvPr/>
         </p:nvSpPr>
@@ -10181,7 +10895,7 @@
       </p:sp>
       <p:pic>
         <p:nvPicPr>
-          <p:cNvPr id="5" name="Image 0" descr="/www/wwwroot/rexar/gdsolar/docs/curso/slides/assets/logo-gdsolar.png">    </p:cNvPr>
+          <p:cNvPr id="7" name="Image 0" descr="/www/wwwroot/rexar/gdsolar/docs/curso/slides/assets/logo-gdsolar.png">    </p:cNvPr>
           <p:cNvPicPr>
             <a:picLocks noChangeAspect="1"/>
           </p:cNvPicPr>
@@ -10205,7 +10919,7 @@
       </p:pic>
       <p:sp>
         <p:nvSpPr>
-          <p:cNvPr id="6" name="Text 3"/>
+          <p:cNvPr id="8" name="Text 5"/>
           <p:cNvSpPr/>
           <p:nvPr/>
         </p:nvSpPr>
@@ -10246,7 +10960,7 @@
       </p:sp>
       <p:sp>
         <p:nvSpPr>
-          <p:cNvPr id="7" name="Text 4"/>
+          <p:cNvPr id="9" name="Text 6"/>
           <p:cNvSpPr/>
           <p:nvPr/>
         </p:nvSpPr>
@@ -10287,7 +11001,7 @@
       </p:sp>
       <p:sp>
         <p:nvSpPr>
-          <p:cNvPr id="8" name="Text 5"/>
+          <p:cNvPr id="10" name="Text 7"/>
           <p:cNvSpPr/>
           <p:nvPr/>
         </p:nvSpPr>
@@ -10508,7 +11222,7 @@
         </p:blipFill>
         <p:spPr>
           <a:xfrm>
-            <a:off x="411480" y="6547104"/>
+            <a:off x="548640" y="6547104"/>
             <a:ext cx="274320" cy="274320"/>
           </a:xfrm>
           <a:prstGeom prst="rect">
@@ -10524,7 +11238,7 @@
         </p:nvSpPr>
         <p:spPr>
           <a:xfrm>
-            <a:off x="749808" y="6528816"/>
+            <a:off x="886968" y="6528816"/>
             <a:ext cx="6400800" cy="310896"/>
           </a:xfrm>
           <a:prstGeom prst="rect">
@@ -10564,7 +11278,7 @@
         <p:spPr>
           <a:xfrm>
             <a:off x="7132320" y="6528816"/>
-            <a:ext cx="4663440" cy="310896"/>
+            <a:ext cx="4023360" cy="310896"/>
           </a:xfrm>
           <a:prstGeom prst="rect">
             <a:avLst/>
@@ -10602,7 +11316,7 @@
         </p:nvSpPr>
         <p:spPr>
           <a:xfrm>
-            <a:off x="411480" y="384048"/>
+            <a:off x="548640" y="384048"/>
             <a:ext cx="82296" cy="658368"/>
           </a:xfrm>
           <a:prstGeom prst="rect">
@@ -10622,7 +11336,7 @@
         </p:nvSpPr>
         <p:spPr>
           <a:xfrm>
-            <a:off x="640080" y="292608"/>
+            <a:off x="777240" y="292608"/>
             <a:ext cx="10972800" cy="274320"/>
           </a:xfrm>
           <a:prstGeom prst="rect">
@@ -10661,8 +11375,8 @@
         </p:nvSpPr>
         <p:spPr>
           <a:xfrm>
-            <a:off x="640080" y="530352"/>
-            <a:ext cx="11155680" cy="566928"/>
+            <a:off x="777240" y="530352"/>
+            <a:ext cx="10881360" cy="566928"/>
           </a:xfrm>
           <a:prstGeom prst="rect">
             <a:avLst/>
@@ -10703,7 +11417,7 @@
         <p:spPr>
           <a:xfrm>
             <a:off x="548640" y="1325880"/>
-            <a:ext cx="11155680" cy="4937760"/>
+            <a:ext cx="5486400" cy="4937760"/>
           </a:xfrm>
           <a:prstGeom prst="rect">
             <a:avLst/>
@@ -10800,6 +11514,30 @@
             </a:r>
             <a:endParaRPr lang="en-US" sz="1800" dirty="0"/>
           </a:p>
+        </p:txBody>
+      </p:sp>
+      <p:sp>
+        <p:nvSpPr>
+          <p:cNvPr id="10" name="Text 7"/>
+          <p:cNvSpPr/>
+          <p:nvPr/>
+        </p:nvSpPr>
+        <p:spPr>
+          <a:xfrm>
+            <a:off x="6263640" y="1325880"/>
+            <a:ext cx="5486400" cy="4937760"/>
+          </a:xfrm>
+          <a:prstGeom prst="rect">
+            <a:avLst/>
+          </a:prstGeom>
+          <a:noFill/>
+          <a:ln/>
+        </p:spPr>
+        <p:txBody>
+          <a:bodyPr wrap="square" rtlCol="0" anchor="t">
+            <a:normAutofit/>
+          </a:bodyPr>
+          <a:lstStyle/>
           <a:p>
             <a:pPr marL="342900" indent="-342900">
               <a:spcAft>
@@ -10883,6 +11621,54 @@
               <a:t>2029+: regra definida pela ANEEL</a:t>
             </a:r>
             <a:endParaRPr lang="en-US" sz="1800" dirty="0"/>
+          </a:p>
+        </p:txBody>
+      </p:sp>
+      <p:sp>
+        <p:nvSpPr>
+          <p:cNvPr id="25" name="Slide Number Placeholder 0"/>
+          <p:cNvSpPr>
+            <a:spLocks noGrp="1"/>
+          </p:cNvSpPr>
+          <p:nvPr>
+            <p:ph type="sldNum" sz="quarter" idx="4294967295"/>
+          </p:nvPr>
+        </p:nvSpPr>
+        <p:spPr>
+          <a:xfrm>
+            <a:off x="11292840" y="6556248"/>
+            <a:ext cx="548640" cy="256032"/>
+          </a:xfrm>
+          <a:prstGeom prst="rect">
+            <a:avLst/>
+          </a:prstGeom>
+          <a:extLst>
+            <a:ext uri="{C572A759-6A51-4108-AA02-DFA0A04FC94B}">
+              <ma14:wrappingTextBoxFlag xmlns:ma14="http://schemas.microsoft.com/office/mac/drawingml/2011/main" val="0"/>
+            </a:ext>
+          </a:extLst>
+        </p:spPr>
+        <p:txBody>
+          <a:bodyPr/>
+          <a:lstStyle>
+            <a:lvl1pPr>
+              <a:defRPr sz="900">
+                <a:solidFill>
+                  <a:srgbClr val="1B3A6B"/>
+                </a:solidFill>
+                <a:latin typeface="Arial"/>
+                <a:ea typeface="Arial"/>
+                <a:cs typeface="Arial"/>
+              </a:defRPr>
+            </a:lvl1pPr>
+          </a:lstStyle>
+          <a:p>
+            <a:pPr algn="r"/>
+            <a:fld id="{F7021451-1387-4CA6-816F-3879F97B5CBC}" type="slidenum">
+              <a:rPr b="1" lang="en-US"/>
+              <a:t>20</a:t>
+            </a:fld>
+            <a:endParaRPr lang="en-US"/>
           </a:p>
         </p:txBody>
       </p:sp>
@@ -10959,7 +11745,7 @@
         </p:blipFill>
         <p:spPr>
           <a:xfrm>
-            <a:off x="411480" y="6547104"/>
+            <a:off x="548640" y="6547104"/>
             <a:ext cx="274320" cy="274320"/>
           </a:xfrm>
           <a:prstGeom prst="rect">
@@ -10975,7 +11761,7 @@
         </p:nvSpPr>
         <p:spPr>
           <a:xfrm>
-            <a:off x="749808" y="6528816"/>
+            <a:off x="886968" y="6528816"/>
             <a:ext cx="6400800" cy="310896"/>
           </a:xfrm>
           <a:prstGeom prst="rect">
@@ -11015,7 +11801,7 @@
         <p:spPr>
           <a:xfrm>
             <a:off x="7132320" y="6528816"/>
-            <a:ext cx="4663440" cy="310896"/>
+            <a:ext cx="4023360" cy="310896"/>
           </a:xfrm>
           <a:prstGeom prst="rect">
             <a:avLst/>
@@ -11053,7 +11839,7 @@
         </p:nvSpPr>
         <p:spPr>
           <a:xfrm>
-            <a:off x="411480" y="384048"/>
+            <a:off x="548640" y="384048"/>
             <a:ext cx="82296" cy="658368"/>
           </a:xfrm>
           <a:prstGeom prst="rect">
@@ -11073,7 +11859,7 @@
         </p:nvSpPr>
         <p:spPr>
           <a:xfrm>
-            <a:off x="640080" y="292608"/>
+            <a:off x="777240" y="292608"/>
             <a:ext cx="10972800" cy="274320"/>
           </a:xfrm>
           <a:prstGeom prst="rect">
@@ -11112,8 +11898,8 @@
         </p:nvSpPr>
         <p:spPr>
           <a:xfrm>
-            <a:off x="640080" y="530352"/>
-            <a:ext cx="11155680" cy="566928"/>
+            <a:off x="777240" y="530352"/>
+            <a:ext cx="10881360" cy="566928"/>
           </a:xfrm>
           <a:prstGeom prst="rect">
             <a:avLst/>
@@ -11153,8 +11939,8 @@
         </p:nvSpPr>
         <p:spPr>
           <a:xfrm>
-            <a:off x="411480" y="1325880"/>
-            <a:ext cx="5669280" cy="4937760"/>
+            <a:off x="548640" y="1325880"/>
+            <a:ext cx="5394960" cy="4937760"/>
           </a:xfrm>
           <a:prstGeom prst="roundRect">
             <a:avLst>
@@ -11175,8 +11961,8 @@
         </p:nvSpPr>
         <p:spPr>
           <a:xfrm>
-            <a:off x="777240" y="1554480"/>
-            <a:ext cx="4937760" cy="4480560"/>
+            <a:off x="914400" y="1554480"/>
+            <a:ext cx="4663440" cy="4480560"/>
           </a:xfrm>
           <a:prstGeom prst="rect">
             <a:avLst/>
@@ -11197,7 +11983,7 @@
               <a:buNone/>
             </a:pPr>
             <a:r>
-              <a:rPr lang="en-US" sz="2000" b="1" dirty="0">
+              <a:rPr lang="en-US" sz="2400" b="1" dirty="0">
                 <a:solidFill>
                   <a:srgbClr val="F7A23B"/>
                 </a:solidFill>
@@ -11207,7 +11993,7 @@
               </a:rPr>
               <a:t>Valor do crédito ≈ tarifa sem impostos − (% não compensado × Fio B)</a:t>
             </a:r>
-            <a:endParaRPr lang="en-US" sz="2000" dirty="0"/>
+            <a:endParaRPr lang="en-US" sz="2400" dirty="0"/>
           </a:p>
         </p:txBody>
       </p:sp>
@@ -11226,17 +12012,17 @@
           </p:nvPr>
         </p:nvGraphicFramePr>
         <p:xfrm>
-          <a:off x="6309360" y="1325880"/>
-          <a:ext cx="5486400" cy="914400"/>
+          <a:off x="6172200" y="1325880"/>
+          <a:ext cx="5468112" cy="914400"/>
         </p:xfrm>
         <a:graphic>
           <a:graphicData uri="http://schemas.openxmlformats.org/drawingml/2006/table">
             <a:tbl>
               <a:tblPr/>
               <a:tblGrid>
-                <a:gridCol w="1828800"/>
-                <a:gridCol w="1828800"/>
-                <a:gridCol w="1828800"/>
+                <a:gridCol w="1822704"/>
+                <a:gridCol w="1822704"/>
+                <a:gridCol w="1822704"/>
               </a:tblGrid>
               <a:tr h="0">
                 <a:tc>
@@ -12066,6 +12852,54 @@
           </a:graphicData>
         </a:graphic>
       </p:graphicFrame>
+      <p:sp>
+        <p:nvSpPr>
+          <p:cNvPr id="25" name="Slide Number Placeholder 0"/>
+          <p:cNvSpPr>
+            <a:spLocks noGrp="1"/>
+          </p:cNvSpPr>
+          <p:nvPr>
+            <p:ph type="sldNum" sz="quarter" idx="4294967295"/>
+          </p:nvPr>
+        </p:nvSpPr>
+        <p:spPr>
+          <a:xfrm>
+            <a:off x="11292840" y="6556248"/>
+            <a:ext cx="548640" cy="256032"/>
+          </a:xfrm>
+          <a:prstGeom prst="rect">
+            <a:avLst/>
+          </a:prstGeom>
+          <a:extLst>
+            <a:ext uri="{C572A759-6A51-4108-AA02-DFA0A04FC94B}">
+              <ma14:wrappingTextBoxFlag xmlns:ma14="http://schemas.microsoft.com/office/mac/drawingml/2011/main" val="0"/>
+            </a:ext>
+          </a:extLst>
+        </p:spPr>
+        <p:txBody>
+          <a:bodyPr/>
+          <a:lstStyle>
+            <a:lvl1pPr>
+              <a:defRPr sz="900">
+                <a:solidFill>
+                  <a:srgbClr val="1B3A6B"/>
+                </a:solidFill>
+                <a:latin typeface="Arial"/>
+                <a:ea typeface="Arial"/>
+                <a:cs typeface="Arial"/>
+              </a:defRPr>
+            </a:lvl1pPr>
+          </a:lstStyle>
+          <a:p>
+            <a:pPr algn="r"/>
+            <a:fld id="{F7021451-1387-4CA6-816F-3879F97B5CBC}" type="slidenum">
+              <a:rPr b="1" lang="en-US"/>
+              <a:t>21</a:t>
+            </a:fld>
+            <a:endParaRPr lang="en-US"/>
+          </a:p>
+        </p:txBody>
+      </p:sp>
     </p:spTree>
   </p:cSld>
   <p:clrMapOvr>
@@ -12139,7 +12973,7 @@
         </p:blipFill>
         <p:spPr>
           <a:xfrm>
-            <a:off x="411480" y="6547104"/>
+            <a:off x="548640" y="6547104"/>
             <a:ext cx="274320" cy="274320"/>
           </a:xfrm>
           <a:prstGeom prst="rect">
@@ -12155,7 +12989,7 @@
         </p:nvSpPr>
         <p:spPr>
           <a:xfrm>
-            <a:off x="749808" y="6528816"/>
+            <a:off x="886968" y="6528816"/>
             <a:ext cx="6400800" cy="310896"/>
           </a:xfrm>
           <a:prstGeom prst="rect">
@@ -12195,7 +13029,7 @@
         <p:spPr>
           <a:xfrm>
             <a:off x="7132320" y="6528816"/>
-            <a:ext cx="4663440" cy="310896"/>
+            <a:ext cx="4023360" cy="310896"/>
           </a:xfrm>
           <a:prstGeom prst="rect">
             <a:avLst/>
@@ -12233,7 +13067,7 @@
         </p:nvSpPr>
         <p:spPr>
           <a:xfrm>
-            <a:off x="411480" y="384048"/>
+            <a:off x="548640" y="384048"/>
             <a:ext cx="82296" cy="658368"/>
           </a:xfrm>
           <a:prstGeom prst="rect">
@@ -12253,7 +13087,7 @@
         </p:nvSpPr>
         <p:spPr>
           <a:xfrm>
-            <a:off x="640080" y="292608"/>
+            <a:off x="777240" y="292608"/>
             <a:ext cx="10972800" cy="274320"/>
           </a:xfrm>
           <a:prstGeom prst="rect">
@@ -12292,8 +13126,8 @@
         </p:nvSpPr>
         <p:spPr>
           <a:xfrm>
-            <a:off x="640080" y="530352"/>
-            <a:ext cx="11155680" cy="566928"/>
+            <a:off x="777240" y="530352"/>
+            <a:ext cx="10881360" cy="566928"/>
           </a:xfrm>
           <a:prstGeom prst="rect">
             <a:avLst/>
@@ -12333,8 +13167,8 @@
         </p:nvSpPr>
         <p:spPr>
           <a:xfrm>
-            <a:off x="411480" y="1325880"/>
-            <a:ext cx="5554980" cy="4937760"/>
+            <a:off x="548640" y="1325880"/>
+            <a:ext cx="5408676" cy="4937760"/>
           </a:xfrm>
           <a:prstGeom prst="roundRect">
             <a:avLst>
@@ -12367,8 +13201,8 @@
         </p:nvSpPr>
         <p:spPr>
           <a:xfrm>
-            <a:off x="411480" y="1325880"/>
-            <a:ext cx="5554980" cy="109728"/>
+            <a:off x="548640" y="1325880"/>
+            <a:ext cx="5408676" cy="109728"/>
           </a:xfrm>
           <a:prstGeom prst="rect">
             <a:avLst/>
@@ -12387,8 +13221,8 @@
         </p:nvSpPr>
         <p:spPr>
           <a:xfrm>
-            <a:off x="685800" y="1554480"/>
-            <a:ext cx="5006340" cy="685800"/>
+            <a:off x="822960" y="1554480"/>
+            <a:ext cx="4860036" cy="685800"/>
           </a:xfrm>
           <a:prstGeom prst="rect">
             <a:avLst/>
@@ -12428,8 +13262,8 @@
         </p:nvSpPr>
         <p:spPr>
           <a:xfrm>
-            <a:off x="685800" y="2286000"/>
-            <a:ext cx="5006340" cy="3749040"/>
+            <a:off x="822960" y="2286000"/>
+            <a:ext cx="4860036" cy="3749040"/>
           </a:xfrm>
           <a:prstGeom prst="rect">
             <a:avLst/>
@@ -12451,7 +13285,7 @@
               <a:buChar char="●"/>
             </a:pPr>
             <a:r>
-              <a:rPr lang="en-US" sz="1400" dirty="0">
+              <a:rPr lang="en-US" sz="1700" dirty="0">
                 <a:solidFill>
                   <a:srgbClr val="1F2937"/>
                 </a:solidFill>
@@ -12461,7 +13295,7 @@
               </a:rPr>
               <a:t>GD III: minigeração acima de 500 kW em autoconsumo remoto ou geração compartilhada em que um titular detém 25% ou mais dos créditos</a:t>
             </a:r>
-            <a:endParaRPr lang="en-US" sz="1400" dirty="0"/>
+            <a:endParaRPr lang="en-US" sz="1700" dirty="0"/>
           </a:p>
           <a:p>
             <a:pPr marL="342900" indent="-342900">
@@ -12472,7 +13306,7 @@
               <a:buChar char="●"/>
             </a:pPr>
             <a:r>
-              <a:rPr lang="en-US" sz="1400" dirty="0">
+              <a:rPr lang="en-US" sz="1700" dirty="0">
                 <a:solidFill>
                   <a:srgbClr val="1F2937"/>
                 </a:solidFill>
@@ -12482,7 +13316,7 @@
               </a:rPr>
               <a:t>paga 100% do Fio B + 40% do Fio A + encargos (TFSEE e P&amp;D) até 2028</a:t>
             </a:r>
-            <a:endParaRPr lang="en-US" sz="1400" dirty="0"/>
+            <a:endParaRPr lang="en-US" sz="1700" dirty="0"/>
           </a:p>
         </p:txBody>
       </p:sp>
@@ -12494,8 +13328,8 @@
         </p:nvSpPr>
         <p:spPr>
           <a:xfrm>
-            <a:off x="6240780" y="1325880"/>
-            <a:ext cx="5554980" cy="4937760"/>
+            <a:off x="6231636" y="1325880"/>
+            <a:ext cx="5408676" cy="4937760"/>
           </a:xfrm>
           <a:prstGeom prst="roundRect">
             <a:avLst>
@@ -12528,8 +13362,8 @@
         </p:nvSpPr>
         <p:spPr>
           <a:xfrm>
-            <a:off x="6240780" y="1325880"/>
-            <a:ext cx="5554980" cy="109728"/>
+            <a:off x="6231636" y="1325880"/>
+            <a:ext cx="5408676" cy="109728"/>
           </a:xfrm>
           <a:prstGeom prst="rect">
             <a:avLst/>
@@ -12548,8 +13382,8 @@
         </p:nvSpPr>
         <p:spPr>
           <a:xfrm>
-            <a:off x="6515100" y="1554480"/>
-            <a:ext cx="5006340" cy="685800"/>
+            <a:off x="6505956" y="1554480"/>
+            <a:ext cx="4860036" cy="685800"/>
           </a:xfrm>
           <a:prstGeom prst="rect">
             <a:avLst/>
@@ -12589,8 +13423,8 @@
         </p:nvSpPr>
         <p:spPr>
           <a:xfrm>
-            <a:off x="6515100" y="2286000"/>
-            <a:ext cx="5006340" cy="3749040"/>
+            <a:off x="6505956" y="2286000"/>
+            <a:ext cx="4860036" cy="3749040"/>
           </a:xfrm>
           <a:prstGeom prst="rect">
             <a:avLst/>
@@ -12707,6 +13541,54 @@
               <a:t>Confirme com a distribuidora</a:t>
             </a:r>
             <a:endParaRPr lang="en-US" sz="1700" dirty="0"/>
+          </a:p>
+        </p:txBody>
+      </p:sp>
+      <p:sp>
+        <p:nvSpPr>
+          <p:cNvPr id="25" name="Slide Number Placeholder 0"/>
+          <p:cNvSpPr>
+            <a:spLocks noGrp="1"/>
+          </p:cNvSpPr>
+          <p:nvPr>
+            <p:ph type="sldNum" sz="quarter" idx="4294967295"/>
+          </p:nvPr>
+        </p:nvSpPr>
+        <p:spPr>
+          <a:xfrm>
+            <a:off x="11292840" y="6556248"/>
+            <a:ext cx="548640" cy="256032"/>
+          </a:xfrm>
+          <a:prstGeom prst="rect">
+            <a:avLst/>
+          </a:prstGeom>
+          <a:extLst>
+            <a:ext uri="{C572A759-6A51-4108-AA02-DFA0A04FC94B}">
+              <ma14:wrappingTextBoxFlag xmlns:ma14="http://schemas.microsoft.com/office/mac/drawingml/2011/main" val="0"/>
+            </a:ext>
+          </a:extLst>
+        </p:spPr>
+        <p:txBody>
+          <a:bodyPr/>
+          <a:lstStyle>
+            <a:lvl1pPr>
+              <a:defRPr sz="900">
+                <a:solidFill>
+                  <a:srgbClr val="1B3A6B"/>
+                </a:solidFill>
+                <a:latin typeface="Arial"/>
+                <a:ea typeface="Arial"/>
+                <a:cs typeface="Arial"/>
+              </a:defRPr>
+            </a:lvl1pPr>
+          </a:lstStyle>
+          <a:p>
+            <a:pPr algn="r"/>
+            <a:fld id="{F7021451-1387-4CA6-816F-3879F97B5CBC}" type="slidenum">
+              <a:rPr b="1" lang="en-US"/>
+              <a:t>22</a:t>
+            </a:fld>
+            <a:endParaRPr lang="en-US"/>
           </a:p>
         </p:txBody>
       </p:sp>
@@ -12783,7 +13665,7 @@
         </p:blipFill>
         <p:spPr>
           <a:xfrm>
-            <a:off x="411480" y="6547104"/>
+            <a:off x="548640" y="6547104"/>
             <a:ext cx="274320" cy="274320"/>
           </a:xfrm>
           <a:prstGeom prst="rect">
@@ -12799,7 +13681,7 @@
         </p:nvSpPr>
         <p:spPr>
           <a:xfrm>
-            <a:off x="749808" y="6528816"/>
+            <a:off x="886968" y="6528816"/>
             <a:ext cx="6400800" cy="310896"/>
           </a:xfrm>
           <a:prstGeom prst="rect">
@@ -12839,7 +13721,7 @@
         <p:spPr>
           <a:xfrm>
             <a:off x="7132320" y="6528816"/>
-            <a:ext cx="4663440" cy="310896"/>
+            <a:ext cx="4023360" cy="310896"/>
           </a:xfrm>
           <a:prstGeom prst="rect">
             <a:avLst/>
@@ -12877,7 +13759,7 @@
         </p:nvSpPr>
         <p:spPr>
           <a:xfrm>
-            <a:off x="411480" y="384048"/>
+            <a:off x="548640" y="384048"/>
             <a:ext cx="82296" cy="658368"/>
           </a:xfrm>
           <a:prstGeom prst="rect">
@@ -12897,7 +13779,7 @@
         </p:nvSpPr>
         <p:spPr>
           <a:xfrm>
-            <a:off x="640080" y="292608"/>
+            <a:off x="777240" y="292608"/>
             <a:ext cx="10972800" cy="274320"/>
           </a:xfrm>
           <a:prstGeom prst="rect">
@@ -12936,8 +13818,8 @@
         </p:nvSpPr>
         <p:spPr>
           <a:xfrm>
-            <a:off x="640080" y="530352"/>
-            <a:ext cx="11155680" cy="566928"/>
+            <a:off x="777240" y="530352"/>
+            <a:ext cx="10881360" cy="566928"/>
           </a:xfrm>
           <a:prstGeom prst="rect">
             <a:avLst/>
@@ -12977,8 +13859,8 @@
         </p:nvSpPr>
         <p:spPr>
           <a:xfrm>
-            <a:off x="411480" y="1325880"/>
-            <a:ext cx="5577840" cy="2331720"/>
+            <a:off x="548640" y="1325880"/>
+            <a:ext cx="5431536" cy="2331720"/>
           </a:xfrm>
           <a:prstGeom prst="roundRect">
             <a:avLst>
@@ -13011,7 +13893,7 @@
         </p:nvSpPr>
         <p:spPr>
           <a:xfrm>
-            <a:off x="594360" y="1508760"/>
+            <a:off x="731520" y="1508760"/>
             <a:ext cx="457200" cy="457200"/>
           </a:xfrm>
           <a:prstGeom prst="ellipse">
@@ -13031,7 +13913,7 @@
         </p:nvSpPr>
         <p:spPr>
           <a:xfrm>
-            <a:off x="594360" y="1508760"/>
+            <a:off x="731520" y="1508760"/>
             <a:ext cx="457200" cy="457200"/>
           </a:xfrm>
           <a:prstGeom prst="rect">
@@ -13070,8 +13952,8 @@
         </p:nvSpPr>
         <p:spPr>
           <a:xfrm>
-            <a:off x="1188720" y="1435608"/>
-            <a:ext cx="4663440" cy="2112264"/>
+            <a:off x="1325880" y="1435608"/>
+            <a:ext cx="4517136" cy="2112264"/>
           </a:xfrm>
           <a:prstGeom prst="rect">
             <a:avLst/>
@@ -13111,8 +13993,8 @@
         </p:nvSpPr>
         <p:spPr>
           <a:xfrm>
-            <a:off x="6217920" y="1325880"/>
-            <a:ext cx="5577840" cy="2331720"/>
+            <a:off x="6208776" y="1325880"/>
+            <a:ext cx="5431536" cy="2331720"/>
           </a:xfrm>
           <a:prstGeom prst="roundRect">
             <a:avLst>
@@ -13145,7 +14027,7 @@
         </p:nvSpPr>
         <p:spPr>
           <a:xfrm>
-            <a:off x="6400800" y="1508760"/>
+            <a:off x="6391656" y="1508760"/>
             <a:ext cx="457200" cy="457200"/>
           </a:xfrm>
           <a:prstGeom prst="ellipse">
@@ -13165,7 +14047,7 @@
         </p:nvSpPr>
         <p:spPr>
           <a:xfrm>
-            <a:off x="6400800" y="1508760"/>
+            <a:off x="6391656" y="1508760"/>
             <a:ext cx="457200" cy="457200"/>
           </a:xfrm>
           <a:prstGeom prst="rect">
@@ -13204,8 +14086,8 @@
         </p:nvSpPr>
         <p:spPr>
           <a:xfrm>
-            <a:off x="6995160" y="1435608"/>
-            <a:ext cx="4663440" cy="2112264"/>
+            <a:off x="6986016" y="1435608"/>
+            <a:ext cx="4517136" cy="2112264"/>
           </a:xfrm>
           <a:prstGeom prst="rect">
             <a:avLst/>
@@ -13245,8 +14127,8 @@
         </p:nvSpPr>
         <p:spPr>
           <a:xfrm>
-            <a:off x="411480" y="3886200"/>
-            <a:ext cx="5577840" cy="2331720"/>
+            <a:off x="548640" y="3886200"/>
+            <a:ext cx="5431536" cy="2331720"/>
           </a:xfrm>
           <a:prstGeom prst="roundRect">
             <a:avLst>
@@ -13279,7 +14161,7 @@
         </p:nvSpPr>
         <p:spPr>
           <a:xfrm>
-            <a:off x="594360" y="4069080"/>
+            <a:off x="731520" y="4069080"/>
             <a:ext cx="457200" cy="457200"/>
           </a:xfrm>
           <a:prstGeom prst="ellipse">
@@ -13299,7 +14181,7 @@
         </p:nvSpPr>
         <p:spPr>
           <a:xfrm>
-            <a:off x="594360" y="4069080"/>
+            <a:off x="731520" y="4069080"/>
             <a:ext cx="457200" cy="457200"/>
           </a:xfrm>
           <a:prstGeom prst="rect">
@@ -13338,8 +14220,8 @@
         </p:nvSpPr>
         <p:spPr>
           <a:xfrm>
-            <a:off x="1188720" y="3995928"/>
-            <a:ext cx="4663440" cy="2112264"/>
+            <a:off x="1325880" y="3995928"/>
+            <a:ext cx="4517136" cy="2112264"/>
           </a:xfrm>
           <a:prstGeom prst="rect">
             <a:avLst/>
@@ -13379,8 +14261,8 @@
         </p:nvSpPr>
         <p:spPr>
           <a:xfrm>
-            <a:off x="6217920" y="3886200"/>
-            <a:ext cx="5577840" cy="2331720"/>
+            <a:off x="6208776" y="3886200"/>
+            <a:ext cx="5431536" cy="2331720"/>
           </a:xfrm>
           <a:prstGeom prst="roundRect">
             <a:avLst>
@@ -13413,7 +14295,7 @@
         </p:nvSpPr>
         <p:spPr>
           <a:xfrm>
-            <a:off x="6400800" y="4069080"/>
+            <a:off x="6391656" y="4069080"/>
             <a:ext cx="457200" cy="457200"/>
           </a:xfrm>
           <a:prstGeom prst="ellipse">
@@ -13433,7 +14315,7 @@
         </p:nvSpPr>
         <p:spPr>
           <a:xfrm>
-            <a:off x="6400800" y="4069080"/>
+            <a:off x="6391656" y="4069080"/>
             <a:ext cx="457200" cy="457200"/>
           </a:xfrm>
           <a:prstGeom prst="rect">
@@ -13472,8 +14354,8 @@
         </p:nvSpPr>
         <p:spPr>
           <a:xfrm>
-            <a:off x="6995160" y="3995928"/>
-            <a:ext cx="4663440" cy="2112264"/>
+            <a:off x="6986016" y="3995928"/>
+            <a:ext cx="4517136" cy="2112264"/>
           </a:xfrm>
           <a:prstGeom prst="rect">
             <a:avLst/>
@@ -13502,6 +14384,54 @@
               <a:t>Crédito vale cada vez menos → faça a conta com a transição</a:t>
             </a:r>
             <a:endParaRPr lang="en-US" sz="1800" dirty="0"/>
+          </a:p>
+        </p:txBody>
+      </p:sp>
+      <p:sp>
+        <p:nvSpPr>
+          <p:cNvPr id="25" name="Slide Number Placeholder 0"/>
+          <p:cNvSpPr>
+            <a:spLocks noGrp="1"/>
+          </p:cNvSpPr>
+          <p:nvPr>
+            <p:ph type="sldNum" sz="quarter" idx="4294967295"/>
+          </p:nvPr>
+        </p:nvSpPr>
+        <p:spPr>
+          <a:xfrm>
+            <a:off x="11292840" y="6556248"/>
+            <a:ext cx="548640" cy="256032"/>
+          </a:xfrm>
+          <a:prstGeom prst="rect">
+            <a:avLst/>
+          </a:prstGeom>
+          <a:extLst>
+            <a:ext uri="{C572A759-6A51-4108-AA02-DFA0A04FC94B}">
+              <ma14:wrappingTextBoxFlag xmlns:ma14="http://schemas.microsoft.com/office/mac/drawingml/2011/main" val="0"/>
+            </a:ext>
+          </a:extLst>
+        </p:spPr>
+        <p:txBody>
+          <a:bodyPr/>
+          <a:lstStyle>
+            <a:lvl1pPr>
+              <a:defRPr sz="900">
+                <a:solidFill>
+                  <a:srgbClr val="1B3A6B"/>
+                </a:solidFill>
+                <a:latin typeface="Arial"/>
+                <a:ea typeface="Arial"/>
+                <a:cs typeface="Arial"/>
+              </a:defRPr>
+            </a:lvl1pPr>
+          </a:lstStyle>
+          <a:p>
+            <a:pPr algn="r"/>
+            <a:fld id="{F7021451-1387-4CA6-816F-3879F97B5CBC}" type="slidenum">
+              <a:rPr b="1" lang="en-US"/>
+              <a:t>23</a:t>
+            </a:fld>
+            <a:endParaRPr lang="en-US"/>
           </a:p>
         </p:txBody>
       </p:sp>
@@ -13565,6 +14495,45 @@
         </p:nvSpPr>
         <p:spPr>
           <a:xfrm>
+            <a:off x="457200" y="548640"/>
+            <a:ext cx="3474720" cy="1737360"/>
+          </a:xfrm>
+          <a:prstGeom prst="rect">
+            <a:avLst/>
+          </a:prstGeom>
+          <a:noFill/>
+          <a:ln/>
+        </p:spPr>
+        <p:txBody>
+          <a:bodyPr wrap="square" rtlCol="0" anchor="ctr"/>
+          <a:lstStyle/>
+          <a:p>
+            <a:pPr indent="0" marL="0">
+              <a:buNone/>
+            </a:pPr>
+            <a:r>
+              <a:rPr lang="en-US" sz="11000" b="1" dirty="0">
+                <a:solidFill>
+                  <a:srgbClr val="11396F"/>
+                </a:solidFill>
+                <a:latin typeface="Arial" pitchFamily="34" charset="0"/>
+                <a:ea typeface="Arial" pitchFamily="34" charset="-122"/>
+                <a:cs typeface="Arial" pitchFamily="34" charset="-120"/>
+              </a:rPr>
+              <a:t>06</a:t>
+            </a:r>
+            <a:endParaRPr lang="en-US" sz="11000" dirty="0"/>
+          </a:p>
+        </p:txBody>
+      </p:sp>
+      <p:sp>
+        <p:nvSpPr>
+          <p:cNvPr id="4" name="Text 2"/>
+          <p:cNvSpPr/>
+          <p:nvPr/>
+        </p:nvSpPr>
+        <p:spPr>
+          <a:xfrm>
             <a:off x="548640" y="2194560"/>
             <a:ext cx="3291840" cy="548640"/>
           </a:xfrm>
@@ -13598,7 +14567,46 @@
       </p:sp>
       <p:sp>
         <p:nvSpPr>
-          <p:cNvPr id="4" name="Text 2"/>
+          <p:cNvPr id="5" name="Text 3"/>
+          <p:cNvSpPr/>
+          <p:nvPr/>
+        </p:nvSpPr>
+        <p:spPr>
+          <a:xfrm>
+            <a:off x="548640" y="3200400"/>
+            <a:ext cx="3383280" cy="457200"/>
+          </a:xfrm>
+          <a:prstGeom prst="rect">
+            <a:avLst/>
+          </a:prstGeom>
+          <a:noFill/>
+          <a:ln/>
+        </p:spPr>
+        <p:txBody>
+          <a:bodyPr wrap="square" rtlCol="0" anchor="ctr"/>
+          <a:lstStyle/>
+          <a:p>
+            <a:pPr indent="0" marL="0">
+              <a:buNone/>
+            </a:pPr>
+            <a:r>
+              <a:rPr lang="en-US" sz="1100" dirty="0">
+                <a:solidFill>
+                  <a:srgbClr val="C7D2E3"/>
+                </a:solidFill>
+                <a:latin typeface="Arial" pitchFamily="34" charset="0"/>
+                <a:ea typeface="Arial" pitchFamily="34" charset="-122"/>
+                <a:cs typeface="Arial" pitchFamily="34" charset="-120"/>
+              </a:rPr>
+              <a:t>M2 · Etapa 2 · Regulação e negócio</a:t>
+            </a:r>
+            <a:endParaRPr lang="en-US" sz="1100" dirty="0"/>
+          </a:p>
+        </p:txBody>
+      </p:sp>
+      <p:sp>
+        <p:nvSpPr>
+          <p:cNvPr id="6" name="Text 4"/>
           <p:cNvSpPr/>
           <p:nvPr/>
         </p:nvSpPr>
@@ -13637,7 +14645,7 @@
       </p:sp>
       <p:pic>
         <p:nvPicPr>
-          <p:cNvPr id="5" name="Image 0" descr="/www/wwwroot/rexar/gdsolar/docs/curso/slides/assets/logo-gdsolar.png">    </p:cNvPr>
+          <p:cNvPr id="7" name="Image 0" descr="/www/wwwroot/rexar/gdsolar/docs/curso/slides/assets/logo-gdsolar.png">    </p:cNvPr>
           <p:cNvPicPr>
             <a:picLocks noChangeAspect="1"/>
           </p:cNvPicPr>
@@ -13661,7 +14669,7 @@
       </p:pic>
       <p:sp>
         <p:nvSpPr>
-          <p:cNvPr id="6" name="Text 3"/>
+          <p:cNvPr id="8" name="Text 5"/>
           <p:cNvSpPr/>
           <p:nvPr/>
         </p:nvSpPr>
@@ -13702,7 +14710,7 @@
       </p:sp>
       <p:sp>
         <p:nvSpPr>
-          <p:cNvPr id="7" name="Text 4"/>
+          <p:cNvPr id="9" name="Text 6"/>
           <p:cNvSpPr/>
           <p:nvPr/>
         </p:nvSpPr>
@@ -13743,7 +14751,7 @@
       </p:sp>
       <p:sp>
         <p:nvSpPr>
-          <p:cNvPr id="8" name="Text 5"/>
+          <p:cNvPr id="10" name="Text 7"/>
           <p:cNvSpPr/>
           <p:nvPr/>
         </p:nvSpPr>
@@ -13922,7 +14930,7 @@
         </p:blipFill>
         <p:spPr>
           <a:xfrm>
-            <a:off x="411480" y="6547104"/>
+            <a:off x="548640" y="6547104"/>
             <a:ext cx="274320" cy="274320"/>
           </a:xfrm>
           <a:prstGeom prst="rect">
@@ -13938,7 +14946,7 @@
         </p:nvSpPr>
         <p:spPr>
           <a:xfrm>
-            <a:off x="749808" y="6528816"/>
+            <a:off x="886968" y="6528816"/>
             <a:ext cx="6400800" cy="310896"/>
           </a:xfrm>
           <a:prstGeom prst="rect">
@@ -13978,7 +14986,7 @@
         <p:spPr>
           <a:xfrm>
             <a:off x="7132320" y="6528816"/>
-            <a:ext cx="4663440" cy="310896"/>
+            <a:ext cx="4023360" cy="310896"/>
           </a:xfrm>
           <a:prstGeom prst="rect">
             <a:avLst/>
@@ -14016,7 +15024,7 @@
         </p:nvSpPr>
         <p:spPr>
           <a:xfrm>
-            <a:off x="411480" y="384048"/>
+            <a:off x="548640" y="384048"/>
             <a:ext cx="82296" cy="658368"/>
           </a:xfrm>
           <a:prstGeom prst="rect">
@@ -14036,7 +15044,7 @@
         </p:nvSpPr>
         <p:spPr>
           <a:xfrm>
-            <a:off x="640080" y="292608"/>
+            <a:off x="777240" y="292608"/>
             <a:ext cx="10972800" cy="274320"/>
           </a:xfrm>
           <a:prstGeom prst="rect">
@@ -14075,8 +15083,8 @@
         </p:nvSpPr>
         <p:spPr>
           <a:xfrm>
-            <a:off x="640080" y="530352"/>
-            <a:ext cx="11155680" cy="566928"/>
+            <a:off x="777240" y="530352"/>
+            <a:ext cx="10881360" cy="566928"/>
           </a:xfrm>
           <a:prstGeom prst="rect">
             <a:avLst/>
@@ -14116,12 +15124,12 @@
         </p:nvSpPr>
         <p:spPr>
           <a:xfrm>
-            <a:off x="411480" y="1325880"/>
-            <a:ext cx="3642360" cy="4892040"/>
+            <a:off x="548640" y="1325880"/>
+            <a:ext cx="3544824" cy="4892040"/>
           </a:xfrm>
           <a:prstGeom prst="roundRect">
             <a:avLst>
-              <a:gd name="adj" fmla="val 2008"/>
+              <a:gd name="adj" fmla="val 2064"/>
             </a:avLst>
           </a:prstGeom>
           <a:solidFill>
@@ -14150,7 +15158,7 @@
         </p:nvSpPr>
         <p:spPr>
           <a:xfrm>
-            <a:off x="594360" y="1508760"/>
+            <a:off x="731520" y="1508760"/>
             <a:ext cx="457200" cy="457200"/>
           </a:xfrm>
           <a:prstGeom prst="ellipse">
@@ -14170,7 +15178,7 @@
         </p:nvSpPr>
         <p:spPr>
           <a:xfrm>
-            <a:off x="594360" y="1508760"/>
+            <a:off x="731520" y="1508760"/>
             <a:ext cx="457200" cy="457200"/>
           </a:xfrm>
           <a:prstGeom prst="rect">
@@ -14209,8 +15217,8 @@
         </p:nvSpPr>
         <p:spPr>
           <a:xfrm>
-            <a:off x="1188720" y="1435608"/>
-            <a:ext cx="2727960" cy="4672584"/>
+            <a:off x="1325880" y="1435608"/>
+            <a:ext cx="2630424" cy="4672584"/>
           </a:xfrm>
           <a:prstGeom prst="rect">
             <a:avLst/>
@@ -14250,12 +15258,12 @@
         </p:nvSpPr>
         <p:spPr>
           <a:xfrm>
-            <a:off x="4282440" y="1325880"/>
-            <a:ext cx="3642360" cy="4892040"/>
+            <a:off x="4322064" y="1325880"/>
+            <a:ext cx="3544824" cy="4892040"/>
           </a:xfrm>
           <a:prstGeom prst="roundRect">
             <a:avLst>
-              <a:gd name="adj" fmla="val 2008"/>
+              <a:gd name="adj" fmla="val 2064"/>
             </a:avLst>
           </a:prstGeom>
           <a:solidFill>
@@ -14284,7 +15292,7 @@
         </p:nvSpPr>
         <p:spPr>
           <a:xfrm>
-            <a:off x="4465320" y="1508760"/>
+            <a:off x="4504944" y="1508760"/>
             <a:ext cx="457200" cy="457200"/>
           </a:xfrm>
           <a:prstGeom prst="ellipse">
@@ -14304,7 +15312,7 @@
         </p:nvSpPr>
         <p:spPr>
           <a:xfrm>
-            <a:off x="4465320" y="1508760"/>
+            <a:off x="4504944" y="1508760"/>
             <a:ext cx="457200" cy="457200"/>
           </a:xfrm>
           <a:prstGeom prst="rect">
@@ -14343,8 +15351,8 @@
         </p:nvSpPr>
         <p:spPr>
           <a:xfrm>
-            <a:off x="5059680" y="1435608"/>
-            <a:ext cx="2727960" cy="4672584"/>
+            <a:off x="5099304" y="1435608"/>
+            <a:ext cx="2630424" cy="4672584"/>
           </a:xfrm>
           <a:prstGeom prst="rect">
             <a:avLst/>
@@ -14384,12 +15392,12 @@
         </p:nvSpPr>
         <p:spPr>
           <a:xfrm>
-            <a:off x="8153400" y="1325880"/>
-            <a:ext cx="3642360" cy="4892040"/>
+            <a:off x="8095488" y="1325880"/>
+            <a:ext cx="3544824" cy="4892040"/>
           </a:xfrm>
           <a:prstGeom prst="roundRect">
             <a:avLst>
-              <a:gd name="adj" fmla="val 2008"/>
+              <a:gd name="adj" fmla="val 2064"/>
             </a:avLst>
           </a:prstGeom>
           <a:solidFill>
@@ -14418,7 +15426,7 @@
         </p:nvSpPr>
         <p:spPr>
           <a:xfrm>
-            <a:off x="8336280" y="1508760"/>
+            <a:off x="8278368" y="1508760"/>
             <a:ext cx="457200" cy="457200"/>
           </a:xfrm>
           <a:prstGeom prst="ellipse">
@@ -14438,7 +15446,7 @@
         </p:nvSpPr>
         <p:spPr>
           <a:xfrm>
-            <a:off x="8336280" y="1508760"/>
+            <a:off x="8278368" y="1508760"/>
             <a:ext cx="457200" cy="457200"/>
           </a:xfrm>
           <a:prstGeom prst="rect">
@@ -14477,8 +15485,8 @@
         </p:nvSpPr>
         <p:spPr>
           <a:xfrm>
-            <a:off x="8930640" y="1435608"/>
-            <a:ext cx="2727960" cy="4672584"/>
+            <a:off x="8872728" y="1435608"/>
+            <a:ext cx="2630424" cy="4672584"/>
           </a:xfrm>
           <a:prstGeom prst="rect">
             <a:avLst/>
@@ -14507,6 +15515,54 @@
               <a:t>Trifásico 100 kWh — o cliente do grupo B paga, no mínimo, o equivalente a isso</a:t>
             </a:r>
             <a:endParaRPr lang="en-US" sz="1800" dirty="0"/>
+          </a:p>
+        </p:txBody>
+      </p:sp>
+      <p:sp>
+        <p:nvSpPr>
+          <p:cNvPr id="25" name="Slide Number Placeholder 0"/>
+          <p:cNvSpPr>
+            <a:spLocks noGrp="1"/>
+          </p:cNvSpPr>
+          <p:nvPr>
+            <p:ph type="sldNum" sz="quarter" idx="4294967295"/>
+          </p:nvPr>
+        </p:nvSpPr>
+        <p:spPr>
+          <a:xfrm>
+            <a:off x="11292840" y="6556248"/>
+            <a:ext cx="548640" cy="256032"/>
+          </a:xfrm>
+          <a:prstGeom prst="rect">
+            <a:avLst/>
+          </a:prstGeom>
+          <a:extLst>
+            <a:ext uri="{C572A759-6A51-4108-AA02-DFA0A04FC94B}">
+              <ma14:wrappingTextBoxFlag xmlns:ma14="http://schemas.microsoft.com/office/mac/drawingml/2011/main" val="0"/>
+            </a:ext>
+          </a:extLst>
+        </p:spPr>
+        <p:txBody>
+          <a:bodyPr/>
+          <a:lstStyle>
+            <a:lvl1pPr>
+              <a:defRPr sz="900">
+                <a:solidFill>
+                  <a:srgbClr val="1B3A6B"/>
+                </a:solidFill>
+                <a:latin typeface="Arial"/>
+                <a:ea typeface="Arial"/>
+                <a:cs typeface="Arial"/>
+              </a:defRPr>
+            </a:lvl1pPr>
+          </a:lstStyle>
+          <a:p>
+            <a:pPr algn="r"/>
+            <a:fld id="{F7021451-1387-4CA6-816F-3879F97B5CBC}" type="slidenum">
+              <a:rPr b="1" lang="en-US"/>
+              <a:t>25</a:t>
+            </a:fld>
+            <a:endParaRPr lang="en-US"/>
           </a:p>
         </p:txBody>
       </p:sp>
@@ -14583,7 +15639,7 @@
         </p:blipFill>
         <p:spPr>
           <a:xfrm>
-            <a:off x="411480" y="6547104"/>
+            <a:off x="548640" y="6547104"/>
             <a:ext cx="274320" cy="274320"/>
           </a:xfrm>
           <a:prstGeom prst="rect">
@@ -14599,7 +15655,7 @@
         </p:nvSpPr>
         <p:spPr>
           <a:xfrm>
-            <a:off x="749808" y="6528816"/>
+            <a:off x="886968" y="6528816"/>
             <a:ext cx="6400800" cy="310896"/>
           </a:xfrm>
           <a:prstGeom prst="rect">
@@ -14639,7 +15695,7 @@
         <p:spPr>
           <a:xfrm>
             <a:off x="7132320" y="6528816"/>
-            <a:ext cx="4663440" cy="310896"/>
+            <a:ext cx="4023360" cy="310896"/>
           </a:xfrm>
           <a:prstGeom prst="rect">
             <a:avLst/>
@@ -14677,7 +15733,7 @@
         </p:nvSpPr>
         <p:spPr>
           <a:xfrm>
-            <a:off x="411480" y="384048"/>
+            <a:off x="548640" y="384048"/>
             <a:ext cx="82296" cy="658368"/>
           </a:xfrm>
           <a:prstGeom prst="rect">
@@ -14697,7 +15753,7 @@
         </p:nvSpPr>
         <p:spPr>
           <a:xfrm>
-            <a:off x="640080" y="292608"/>
+            <a:off x="777240" y="292608"/>
             <a:ext cx="10972800" cy="274320"/>
           </a:xfrm>
           <a:prstGeom prst="rect">
@@ -14736,8 +15792,8 @@
         </p:nvSpPr>
         <p:spPr>
           <a:xfrm>
-            <a:off x="640080" y="530352"/>
-            <a:ext cx="11155680" cy="566928"/>
+            <a:off x="777240" y="530352"/>
+            <a:ext cx="10881360" cy="566928"/>
           </a:xfrm>
           <a:prstGeom prst="rect">
             <a:avLst/>
@@ -14777,8 +15833,8 @@
         </p:nvSpPr>
         <p:spPr>
           <a:xfrm>
-            <a:off x="411480" y="1325880"/>
-            <a:ext cx="11384280" cy="4937760"/>
+            <a:off x="548640" y="1325880"/>
+            <a:ext cx="11091672" cy="4937760"/>
           </a:xfrm>
           <a:prstGeom prst="roundRect">
             <a:avLst>
@@ -14799,8 +15855,8 @@
         </p:nvSpPr>
         <p:spPr>
           <a:xfrm>
-            <a:off x="777240" y="1554480"/>
-            <a:ext cx="10652760" cy="4480560"/>
+            <a:off x="914400" y="1554480"/>
+            <a:ext cx="10360152" cy="4480560"/>
           </a:xfrm>
           <a:prstGeom prst="rect">
             <a:avLst/>
@@ -14821,7 +15877,7 @@
               <a:buNone/>
             </a:pPr>
             <a:r>
-              <a:rPr lang="en-US" sz="1800" b="1" dirty="0">
+              <a:rPr lang="en-US" sz="2400" b="1" dirty="0">
                 <a:solidFill>
                   <a:srgbClr val="FFFFFF"/>
                 </a:solidFill>
@@ -14831,7 +15887,7 @@
               </a:rPr>
               <a:t>Cota ideal (kWh/mês) = Consumo médio de 12 meses − Custo de disponibilidade</a:t>
             </a:r>
-            <a:endParaRPr lang="en-US" sz="1800" dirty="0"/>
+            <a:endParaRPr lang="en-US" sz="2400" dirty="0"/>
           </a:p>
           <a:p>
             <a:pPr indent="0" marL="0">
@@ -14841,7 +15897,7 @@
               <a:buNone/>
             </a:pPr>
             <a:r>
-              <a:rPr lang="en-US" sz="1800" dirty="0">
+              <a:rPr lang="en-US" sz="2400" dirty="0">
                 <a:solidFill>
                   <a:srgbClr val="FFFFFF"/>
                 </a:solidFill>
@@ -14851,7 +15907,7 @@
               </a:rPr>
               <a:t>Padaria (trifásica): 2.500 − 100 = 2.400 kWh</a:t>
             </a:r>
-            <a:endParaRPr lang="en-US" sz="1800" dirty="0"/>
+            <a:endParaRPr lang="en-US" sz="2400" dirty="0"/>
           </a:p>
           <a:p>
             <a:pPr indent="0" marL="0">
@@ -14861,7 +15917,7 @@
               <a:buNone/>
             </a:pPr>
             <a:r>
-              <a:rPr lang="en-US" sz="1800" b="1" dirty="0">
+              <a:rPr lang="en-US" sz="2400" b="1" dirty="0">
                 <a:solidFill>
                   <a:srgbClr val="F7A23B"/>
                 </a:solidFill>
@@ -14871,7 +15927,55 @@
               </a:rPr>
               <a:t>Residência (bifásica): 450 − 50 = 400 kWh</a:t>
             </a:r>
-            <a:endParaRPr lang="en-US" sz="1800" dirty="0"/>
+            <a:endParaRPr lang="en-US" sz="2400" dirty="0"/>
+          </a:p>
+        </p:txBody>
+      </p:sp>
+      <p:sp>
+        <p:nvSpPr>
+          <p:cNvPr id="25" name="Slide Number Placeholder 0"/>
+          <p:cNvSpPr>
+            <a:spLocks noGrp="1"/>
+          </p:cNvSpPr>
+          <p:nvPr>
+            <p:ph type="sldNum" sz="quarter" idx="4294967295"/>
+          </p:nvPr>
+        </p:nvSpPr>
+        <p:spPr>
+          <a:xfrm>
+            <a:off x="11292840" y="6556248"/>
+            <a:ext cx="548640" cy="256032"/>
+          </a:xfrm>
+          <a:prstGeom prst="rect">
+            <a:avLst/>
+          </a:prstGeom>
+          <a:extLst>
+            <a:ext uri="{C572A759-6A51-4108-AA02-DFA0A04FC94B}">
+              <ma14:wrappingTextBoxFlag xmlns:ma14="http://schemas.microsoft.com/office/mac/drawingml/2011/main" val="0"/>
+            </a:ext>
+          </a:extLst>
+        </p:spPr>
+        <p:txBody>
+          <a:bodyPr/>
+          <a:lstStyle>
+            <a:lvl1pPr>
+              <a:defRPr sz="900">
+                <a:solidFill>
+                  <a:srgbClr val="1B3A6B"/>
+                </a:solidFill>
+                <a:latin typeface="Arial"/>
+                <a:ea typeface="Arial"/>
+                <a:cs typeface="Arial"/>
+              </a:defRPr>
+            </a:lvl1pPr>
+          </a:lstStyle>
+          <a:p>
+            <a:pPr algn="r"/>
+            <a:fld id="{F7021451-1387-4CA6-816F-3879F97B5CBC}" type="slidenum">
+              <a:rPr b="1" lang="en-US"/>
+              <a:t>26</a:t>
+            </a:fld>
+            <a:endParaRPr lang="en-US"/>
           </a:p>
         </p:txBody>
       </p:sp>
@@ -14948,7 +16052,7 @@
         </p:blipFill>
         <p:spPr>
           <a:xfrm>
-            <a:off x="411480" y="6547104"/>
+            <a:off x="548640" y="6547104"/>
             <a:ext cx="274320" cy="274320"/>
           </a:xfrm>
           <a:prstGeom prst="rect">
@@ -14964,7 +16068,7 @@
         </p:nvSpPr>
         <p:spPr>
           <a:xfrm>
-            <a:off x="749808" y="6528816"/>
+            <a:off x="886968" y="6528816"/>
             <a:ext cx="6400800" cy="310896"/>
           </a:xfrm>
           <a:prstGeom prst="rect">
@@ -15004,7 +16108,7 @@
         <p:spPr>
           <a:xfrm>
             <a:off x="7132320" y="6528816"/>
-            <a:ext cx="4663440" cy="310896"/>
+            <a:ext cx="4023360" cy="310896"/>
           </a:xfrm>
           <a:prstGeom prst="rect">
             <a:avLst/>
@@ -15042,7 +16146,7 @@
         </p:nvSpPr>
         <p:spPr>
           <a:xfrm>
-            <a:off x="411480" y="384048"/>
+            <a:off x="548640" y="384048"/>
             <a:ext cx="82296" cy="658368"/>
           </a:xfrm>
           <a:prstGeom prst="rect">
@@ -15062,7 +16166,7 @@
         </p:nvSpPr>
         <p:spPr>
           <a:xfrm>
-            <a:off x="640080" y="292608"/>
+            <a:off x="777240" y="292608"/>
             <a:ext cx="10972800" cy="274320"/>
           </a:xfrm>
           <a:prstGeom prst="rect">
@@ -15101,8 +16205,8 @@
         </p:nvSpPr>
         <p:spPr>
           <a:xfrm>
-            <a:off x="640080" y="530352"/>
-            <a:ext cx="11155680" cy="566928"/>
+            <a:off x="777240" y="530352"/>
+            <a:ext cx="10881360" cy="566928"/>
           </a:xfrm>
           <a:prstGeom prst="rect">
             <a:avLst/>
@@ -15142,12 +16246,12 @@
         </p:nvSpPr>
         <p:spPr>
           <a:xfrm>
-            <a:off x="411480" y="1325880"/>
-            <a:ext cx="3642360" cy="4892040"/>
+            <a:off x="548640" y="1325880"/>
+            <a:ext cx="3544824" cy="4892040"/>
           </a:xfrm>
           <a:prstGeom prst="roundRect">
             <a:avLst>
-              <a:gd name="adj" fmla="val 2008"/>
+              <a:gd name="adj" fmla="val 2064"/>
             </a:avLst>
           </a:prstGeom>
           <a:solidFill>
@@ -15176,7 +16280,7 @@
         </p:nvSpPr>
         <p:spPr>
           <a:xfrm>
-            <a:off x="594360" y="1508760"/>
+            <a:off x="731520" y="1508760"/>
             <a:ext cx="457200" cy="457200"/>
           </a:xfrm>
           <a:prstGeom prst="ellipse">
@@ -15196,7 +16300,7 @@
         </p:nvSpPr>
         <p:spPr>
           <a:xfrm>
-            <a:off x="594360" y="1508760"/>
+            <a:off x="731520" y="1508760"/>
             <a:ext cx="457200" cy="457200"/>
           </a:xfrm>
           <a:prstGeom prst="rect">
@@ -15235,8 +16339,8 @@
         </p:nvSpPr>
         <p:spPr>
           <a:xfrm>
-            <a:off x="1188720" y="1435608"/>
-            <a:ext cx="2727960" cy="4672584"/>
+            <a:off x="1325880" y="1435608"/>
+            <a:ext cx="2630424" cy="4672584"/>
           </a:xfrm>
           <a:prstGeom prst="rect">
             <a:avLst/>
@@ -15276,12 +16380,12 @@
         </p:nvSpPr>
         <p:spPr>
           <a:xfrm>
-            <a:off x="4282440" y="1325880"/>
-            <a:ext cx="3642360" cy="4892040"/>
+            <a:off x="4322064" y="1325880"/>
+            <a:ext cx="3544824" cy="4892040"/>
           </a:xfrm>
           <a:prstGeom prst="roundRect">
             <a:avLst>
-              <a:gd name="adj" fmla="val 2008"/>
+              <a:gd name="adj" fmla="val 2064"/>
             </a:avLst>
           </a:prstGeom>
           <a:solidFill>
@@ -15310,7 +16414,7 @@
         </p:nvSpPr>
         <p:spPr>
           <a:xfrm>
-            <a:off x="4465320" y="1508760"/>
+            <a:off x="4504944" y="1508760"/>
             <a:ext cx="457200" cy="457200"/>
           </a:xfrm>
           <a:prstGeom prst="ellipse">
@@ -15330,7 +16434,7 @@
         </p:nvSpPr>
         <p:spPr>
           <a:xfrm>
-            <a:off x="4465320" y="1508760"/>
+            <a:off x="4504944" y="1508760"/>
             <a:ext cx="457200" cy="457200"/>
           </a:xfrm>
           <a:prstGeom prst="rect">
@@ -15369,8 +16473,8 @@
         </p:nvSpPr>
         <p:spPr>
           <a:xfrm>
-            <a:off x="5059680" y="1435608"/>
-            <a:ext cx="2727960" cy="4672584"/>
+            <a:off x="5099304" y="1435608"/>
+            <a:ext cx="2630424" cy="4672584"/>
           </a:xfrm>
           <a:prstGeom prst="rect">
             <a:avLst/>
@@ -15410,12 +16514,12 @@
         </p:nvSpPr>
         <p:spPr>
           <a:xfrm>
-            <a:off x="8153400" y="1325880"/>
-            <a:ext cx="3642360" cy="4892040"/>
+            <a:off x="8095488" y="1325880"/>
+            <a:ext cx="3544824" cy="4892040"/>
           </a:xfrm>
           <a:prstGeom prst="roundRect">
             <a:avLst>
-              <a:gd name="adj" fmla="val 2008"/>
+              <a:gd name="adj" fmla="val 2064"/>
             </a:avLst>
           </a:prstGeom>
           <a:solidFill>
@@ -15444,7 +16548,7 @@
         </p:nvSpPr>
         <p:spPr>
           <a:xfrm>
-            <a:off x="8336280" y="1508760"/>
+            <a:off x="8278368" y="1508760"/>
             <a:ext cx="457200" cy="457200"/>
           </a:xfrm>
           <a:prstGeom prst="ellipse">
@@ -15464,7 +16568,7 @@
         </p:nvSpPr>
         <p:spPr>
           <a:xfrm>
-            <a:off x="8336280" y="1508760"/>
+            <a:off x="8278368" y="1508760"/>
             <a:ext cx="457200" cy="457200"/>
           </a:xfrm>
           <a:prstGeom prst="rect">
@@ -15503,8 +16607,8 @@
         </p:nvSpPr>
         <p:spPr>
           <a:xfrm>
-            <a:off x="8930640" y="1435608"/>
-            <a:ext cx="2727960" cy="4672584"/>
+            <a:off x="8872728" y="1435608"/>
+            <a:ext cx="2630424" cy="4672584"/>
           </a:xfrm>
           <a:prstGeom prst="rect">
             <a:avLst/>
@@ -15533,6 +16637,54 @@
               <a:t>- Mudanças previstas (ampliação, mudança, eficiência)</a:t>
             </a:r>
             <a:endParaRPr lang="en-US" sz="1800" dirty="0"/>
+          </a:p>
+        </p:txBody>
+      </p:sp>
+      <p:sp>
+        <p:nvSpPr>
+          <p:cNvPr id="25" name="Slide Number Placeholder 0"/>
+          <p:cNvSpPr>
+            <a:spLocks noGrp="1"/>
+          </p:cNvSpPr>
+          <p:nvPr>
+            <p:ph type="sldNum" sz="quarter" idx="4294967295"/>
+          </p:nvPr>
+        </p:nvSpPr>
+        <p:spPr>
+          <a:xfrm>
+            <a:off x="11292840" y="6556248"/>
+            <a:ext cx="548640" cy="256032"/>
+          </a:xfrm>
+          <a:prstGeom prst="rect">
+            <a:avLst/>
+          </a:prstGeom>
+          <a:extLst>
+            <a:ext uri="{C572A759-6A51-4108-AA02-DFA0A04FC94B}">
+              <ma14:wrappingTextBoxFlag xmlns:ma14="http://schemas.microsoft.com/office/mac/drawingml/2011/main" val="0"/>
+            </a:ext>
+          </a:extLst>
+        </p:spPr>
+        <p:txBody>
+          <a:bodyPr/>
+          <a:lstStyle>
+            <a:lvl1pPr>
+              <a:defRPr sz="900">
+                <a:solidFill>
+                  <a:srgbClr val="1B3A6B"/>
+                </a:solidFill>
+                <a:latin typeface="Arial"/>
+                <a:ea typeface="Arial"/>
+                <a:cs typeface="Arial"/>
+              </a:defRPr>
+            </a:lvl1pPr>
+          </a:lstStyle>
+          <a:p>
+            <a:pPr algn="r"/>
+            <a:fld id="{F7021451-1387-4CA6-816F-3879F97B5CBC}" type="slidenum">
+              <a:rPr b="1" lang="en-US"/>
+              <a:t>27</a:t>
+            </a:fld>
+            <a:endParaRPr lang="en-US"/>
           </a:p>
         </p:txBody>
       </p:sp>
@@ -15609,7 +16761,7 @@
         </p:blipFill>
         <p:spPr>
           <a:xfrm>
-            <a:off x="411480" y="6547104"/>
+            <a:off x="548640" y="6547104"/>
             <a:ext cx="274320" cy="274320"/>
           </a:xfrm>
           <a:prstGeom prst="rect">
@@ -15625,7 +16777,7 @@
         </p:nvSpPr>
         <p:spPr>
           <a:xfrm>
-            <a:off x="749808" y="6528816"/>
+            <a:off x="886968" y="6528816"/>
             <a:ext cx="6400800" cy="310896"/>
           </a:xfrm>
           <a:prstGeom prst="rect">
@@ -15665,7 +16817,7 @@
         <p:spPr>
           <a:xfrm>
             <a:off x="7132320" y="6528816"/>
-            <a:ext cx="4663440" cy="310896"/>
+            <a:ext cx="4023360" cy="310896"/>
           </a:xfrm>
           <a:prstGeom prst="rect">
             <a:avLst/>
@@ -15703,7 +16855,7 @@
         </p:nvSpPr>
         <p:spPr>
           <a:xfrm>
-            <a:off x="411480" y="384048"/>
+            <a:off x="548640" y="384048"/>
             <a:ext cx="82296" cy="658368"/>
           </a:xfrm>
           <a:prstGeom prst="rect">
@@ -15723,7 +16875,7 @@
         </p:nvSpPr>
         <p:spPr>
           <a:xfrm>
-            <a:off x="640080" y="292608"/>
+            <a:off x="777240" y="292608"/>
             <a:ext cx="10972800" cy="274320"/>
           </a:xfrm>
           <a:prstGeom prst="rect">
@@ -15762,8 +16914,8 @@
         </p:nvSpPr>
         <p:spPr>
           <a:xfrm>
-            <a:off x="640080" y="530352"/>
-            <a:ext cx="11155680" cy="566928"/>
+            <a:off x="777240" y="530352"/>
+            <a:ext cx="10881360" cy="566928"/>
           </a:xfrm>
           <a:prstGeom prst="rect">
             <a:avLst/>
@@ -15803,8 +16955,8 @@
         </p:nvSpPr>
         <p:spPr>
           <a:xfrm>
-            <a:off x="411480" y="1325880"/>
-            <a:ext cx="11384280" cy="4937760"/>
+            <a:off x="548640" y="1325880"/>
+            <a:ext cx="11091672" cy="4937760"/>
           </a:xfrm>
           <a:prstGeom prst="roundRect">
             <a:avLst>
@@ -15825,8 +16977,8 @@
         </p:nvSpPr>
         <p:spPr>
           <a:xfrm>
-            <a:off x="777240" y="1554480"/>
-            <a:ext cx="10652760" cy="4480560"/>
+            <a:off x="914400" y="1554480"/>
+            <a:ext cx="10360152" cy="4480560"/>
           </a:xfrm>
           <a:prstGeom prst="rect">
             <a:avLst/>
@@ -15847,7 +16999,7 @@
               <a:buNone/>
             </a:pPr>
             <a:r>
-              <a:rPr lang="en-US" sz="2000" b="1" dirty="0">
+              <a:rPr lang="en-US" sz="2400" b="1" dirty="0">
                 <a:solidFill>
                   <a:srgbClr val="FFFFFF"/>
                 </a:solidFill>
@@ -15857,7 +17009,7 @@
               </a:rPr>
               <a:t>% de rateio = Cota do cliente ÷ Geração média da usina</a:t>
             </a:r>
-            <a:endParaRPr lang="en-US" sz="2000" dirty="0"/>
+            <a:endParaRPr lang="en-US" sz="2400" dirty="0"/>
           </a:p>
           <a:p>
             <a:pPr indent="0" marL="0">
@@ -15867,7 +17019,7 @@
               <a:buNone/>
             </a:pPr>
             <a:r>
-              <a:rPr lang="en-US" sz="2000" b="1" dirty="0">
+              <a:rPr lang="en-US" sz="2400" b="1" dirty="0">
                 <a:solidFill>
                   <a:srgbClr val="F7A23B"/>
                 </a:solidFill>
@@ -15877,7 +17029,55 @@
               </a:rPr>
               <a:t>Padaria: 2.400 ÷ 60.000 = 4,0% · Residência: 400 ÷ 60.000 = 0,67%</a:t>
             </a:r>
-            <a:endParaRPr lang="en-US" sz="2000" dirty="0"/>
+            <a:endParaRPr lang="en-US" sz="2400" dirty="0"/>
+          </a:p>
+        </p:txBody>
+      </p:sp>
+      <p:sp>
+        <p:nvSpPr>
+          <p:cNvPr id="25" name="Slide Number Placeholder 0"/>
+          <p:cNvSpPr>
+            <a:spLocks noGrp="1"/>
+          </p:cNvSpPr>
+          <p:nvPr>
+            <p:ph type="sldNum" sz="quarter" idx="4294967295"/>
+          </p:nvPr>
+        </p:nvSpPr>
+        <p:spPr>
+          <a:xfrm>
+            <a:off x="11292840" y="6556248"/>
+            <a:ext cx="548640" cy="256032"/>
+          </a:xfrm>
+          <a:prstGeom prst="rect">
+            <a:avLst/>
+          </a:prstGeom>
+          <a:extLst>
+            <a:ext uri="{C572A759-6A51-4108-AA02-DFA0A04FC94B}">
+              <ma14:wrappingTextBoxFlag xmlns:ma14="http://schemas.microsoft.com/office/mac/drawingml/2011/main" val="0"/>
+            </a:ext>
+          </a:extLst>
+        </p:spPr>
+        <p:txBody>
+          <a:bodyPr/>
+          <a:lstStyle>
+            <a:lvl1pPr>
+              <a:defRPr sz="900">
+                <a:solidFill>
+                  <a:srgbClr val="1B3A6B"/>
+                </a:solidFill>
+                <a:latin typeface="Arial"/>
+                <a:ea typeface="Arial"/>
+                <a:cs typeface="Arial"/>
+              </a:defRPr>
+            </a:lvl1pPr>
+          </a:lstStyle>
+          <a:p>
+            <a:pPr algn="r"/>
+            <a:fld id="{F7021451-1387-4CA6-816F-3879F97B5CBC}" type="slidenum">
+              <a:rPr b="1" lang="en-US"/>
+              <a:t>28</a:t>
+            </a:fld>
+            <a:endParaRPr lang="en-US"/>
           </a:p>
         </p:txBody>
       </p:sp>
@@ -15954,7 +17154,7 @@
         </p:blipFill>
         <p:spPr>
           <a:xfrm>
-            <a:off x="411480" y="6547104"/>
+            <a:off x="548640" y="6547104"/>
             <a:ext cx="274320" cy="274320"/>
           </a:xfrm>
           <a:prstGeom prst="rect">
@@ -15970,7 +17170,7 @@
         </p:nvSpPr>
         <p:spPr>
           <a:xfrm>
-            <a:off x="749808" y="6528816"/>
+            <a:off x="886968" y="6528816"/>
             <a:ext cx="6400800" cy="310896"/>
           </a:xfrm>
           <a:prstGeom prst="rect">
@@ -16010,7 +17210,7 @@
         <p:spPr>
           <a:xfrm>
             <a:off x="7132320" y="6528816"/>
-            <a:ext cx="4663440" cy="310896"/>
+            <a:ext cx="4023360" cy="310896"/>
           </a:xfrm>
           <a:prstGeom prst="rect">
             <a:avLst/>
@@ -16048,7 +17248,7 @@
         </p:nvSpPr>
         <p:spPr>
           <a:xfrm>
-            <a:off x="411480" y="384048"/>
+            <a:off x="548640" y="384048"/>
             <a:ext cx="82296" cy="658368"/>
           </a:xfrm>
           <a:prstGeom prst="rect">
@@ -16068,7 +17268,7 @@
         </p:nvSpPr>
         <p:spPr>
           <a:xfrm>
-            <a:off x="640080" y="292608"/>
+            <a:off x="777240" y="292608"/>
             <a:ext cx="10972800" cy="274320"/>
           </a:xfrm>
           <a:prstGeom prst="rect">
@@ -16107,8 +17307,8 @@
         </p:nvSpPr>
         <p:spPr>
           <a:xfrm>
-            <a:off x="640080" y="530352"/>
-            <a:ext cx="11155680" cy="566928"/>
+            <a:off x="777240" y="530352"/>
+            <a:ext cx="10881360" cy="566928"/>
           </a:xfrm>
           <a:prstGeom prst="rect">
             <a:avLst/>
@@ -16148,12 +17348,12 @@
         </p:nvSpPr>
         <p:spPr>
           <a:xfrm>
-            <a:off x="411480" y="1325880"/>
-            <a:ext cx="3642360" cy="4892040"/>
+            <a:off x="548640" y="1325880"/>
+            <a:ext cx="3544824" cy="4892040"/>
           </a:xfrm>
           <a:prstGeom prst="roundRect">
             <a:avLst>
-              <a:gd name="adj" fmla="val 2008"/>
+              <a:gd name="adj" fmla="val 2064"/>
             </a:avLst>
           </a:prstGeom>
           <a:solidFill>
@@ -16182,7 +17382,7 @@
         </p:nvSpPr>
         <p:spPr>
           <a:xfrm>
-            <a:off x="594360" y="1508760"/>
+            <a:off x="731520" y="1508760"/>
             <a:ext cx="457200" cy="457200"/>
           </a:xfrm>
           <a:prstGeom prst="ellipse">
@@ -16202,7 +17402,7 @@
         </p:nvSpPr>
         <p:spPr>
           <a:xfrm>
-            <a:off x="594360" y="1508760"/>
+            <a:off x="731520" y="1508760"/>
             <a:ext cx="457200" cy="457200"/>
           </a:xfrm>
           <a:prstGeom prst="rect">
@@ -16241,8 +17441,8 @@
         </p:nvSpPr>
         <p:spPr>
           <a:xfrm>
-            <a:off x="1188720" y="1435608"/>
-            <a:ext cx="2727960" cy="4672584"/>
+            <a:off x="1325880" y="1435608"/>
+            <a:ext cx="2630424" cy="4672584"/>
           </a:xfrm>
           <a:prstGeom prst="rect">
             <a:avLst/>
@@ -16282,12 +17482,12 @@
         </p:nvSpPr>
         <p:spPr>
           <a:xfrm>
-            <a:off x="4282440" y="1325880"/>
-            <a:ext cx="3642360" cy="4892040"/>
+            <a:off x="4322064" y="1325880"/>
+            <a:ext cx="3544824" cy="4892040"/>
           </a:xfrm>
           <a:prstGeom prst="roundRect">
             <a:avLst>
-              <a:gd name="adj" fmla="val 2008"/>
+              <a:gd name="adj" fmla="val 2064"/>
             </a:avLst>
           </a:prstGeom>
           <a:solidFill>
@@ -16316,7 +17516,7 @@
         </p:nvSpPr>
         <p:spPr>
           <a:xfrm>
-            <a:off x="4465320" y="1508760"/>
+            <a:off x="4504944" y="1508760"/>
             <a:ext cx="457200" cy="457200"/>
           </a:xfrm>
           <a:prstGeom prst="ellipse">
@@ -16336,7 +17536,7 @@
         </p:nvSpPr>
         <p:spPr>
           <a:xfrm>
-            <a:off x="4465320" y="1508760"/>
+            <a:off x="4504944" y="1508760"/>
             <a:ext cx="457200" cy="457200"/>
           </a:xfrm>
           <a:prstGeom prst="rect">
@@ -16375,8 +17575,8 @@
         </p:nvSpPr>
         <p:spPr>
           <a:xfrm>
-            <a:off x="5059680" y="1435608"/>
-            <a:ext cx="2727960" cy="4672584"/>
+            <a:off x="5099304" y="1435608"/>
+            <a:ext cx="2630424" cy="4672584"/>
           </a:xfrm>
           <a:prstGeom prst="rect">
             <a:avLst/>
@@ -16416,12 +17616,12 @@
         </p:nvSpPr>
         <p:spPr>
           <a:xfrm>
-            <a:off x="8153400" y="1325880"/>
-            <a:ext cx="3642360" cy="4892040"/>
+            <a:off x="8095488" y="1325880"/>
+            <a:ext cx="3544824" cy="4892040"/>
           </a:xfrm>
           <a:prstGeom prst="roundRect">
             <a:avLst>
-              <a:gd name="adj" fmla="val 2008"/>
+              <a:gd name="adj" fmla="val 2064"/>
             </a:avLst>
           </a:prstGeom>
           <a:solidFill>
@@ -16450,7 +17650,7 @@
         </p:nvSpPr>
         <p:spPr>
           <a:xfrm>
-            <a:off x="8336280" y="1508760"/>
+            <a:off x="8278368" y="1508760"/>
             <a:ext cx="457200" cy="457200"/>
           </a:xfrm>
           <a:prstGeom prst="ellipse">
@@ -16470,7 +17670,7 @@
         </p:nvSpPr>
         <p:spPr>
           <a:xfrm>
-            <a:off x="8336280" y="1508760"/>
+            <a:off x="8278368" y="1508760"/>
             <a:ext cx="457200" cy="457200"/>
           </a:xfrm>
           <a:prstGeom prst="rect">
@@ -16509,8 +17709,8 @@
         </p:nvSpPr>
         <p:spPr>
           <a:xfrm>
-            <a:off x="8930640" y="1435608"/>
-            <a:ext cx="2727960" cy="4672584"/>
+            <a:off x="8872728" y="1435608"/>
+            <a:ext cx="2630424" cy="4672584"/>
           </a:xfrm>
           <a:prstGeom prst="rect">
             <a:avLst/>
@@ -16539,6 +17739,54 @@
               <a:t>% = cota ÷ geração média da usina</a:t>
             </a:r>
             <a:endParaRPr lang="en-US" sz="1800" dirty="0"/>
+          </a:p>
+        </p:txBody>
+      </p:sp>
+      <p:sp>
+        <p:nvSpPr>
+          <p:cNvPr id="25" name="Slide Number Placeholder 0"/>
+          <p:cNvSpPr>
+            <a:spLocks noGrp="1"/>
+          </p:cNvSpPr>
+          <p:nvPr>
+            <p:ph type="sldNum" sz="quarter" idx="4294967295"/>
+          </p:nvPr>
+        </p:nvSpPr>
+        <p:spPr>
+          <a:xfrm>
+            <a:off x="11292840" y="6556248"/>
+            <a:ext cx="548640" cy="256032"/>
+          </a:xfrm>
+          <a:prstGeom prst="rect">
+            <a:avLst/>
+          </a:prstGeom>
+          <a:extLst>
+            <a:ext uri="{C572A759-6A51-4108-AA02-DFA0A04FC94B}">
+              <ma14:wrappingTextBoxFlag xmlns:ma14="http://schemas.microsoft.com/office/mac/drawingml/2011/main" val="0"/>
+            </a:ext>
+          </a:extLst>
+        </p:spPr>
+        <p:txBody>
+          <a:bodyPr/>
+          <a:lstStyle>
+            <a:lvl1pPr>
+              <a:defRPr sz="900">
+                <a:solidFill>
+                  <a:srgbClr val="1B3A6B"/>
+                </a:solidFill>
+                <a:latin typeface="Arial"/>
+                <a:ea typeface="Arial"/>
+                <a:cs typeface="Arial"/>
+              </a:defRPr>
+            </a:lvl1pPr>
+          </a:lstStyle>
+          <a:p>
+            <a:pPr algn="r"/>
+            <a:fld id="{F7021451-1387-4CA6-816F-3879F97B5CBC}" type="slidenum">
+              <a:rPr b="1" lang="en-US"/>
+              <a:t>29</a:t>
+            </a:fld>
+            <a:endParaRPr lang="en-US"/>
           </a:p>
         </p:txBody>
       </p:sp>
@@ -16615,7 +17863,7 @@
         </p:blipFill>
         <p:spPr>
           <a:xfrm>
-            <a:off x="411480" y="6547104"/>
+            <a:off x="548640" y="6547104"/>
             <a:ext cx="274320" cy="274320"/>
           </a:xfrm>
           <a:prstGeom prst="rect">
@@ -16631,7 +17879,7 @@
         </p:nvSpPr>
         <p:spPr>
           <a:xfrm>
-            <a:off x="749808" y="6528816"/>
+            <a:off x="886968" y="6528816"/>
             <a:ext cx="6400800" cy="310896"/>
           </a:xfrm>
           <a:prstGeom prst="rect">
@@ -16671,7 +17919,7 @@
         <p:spPr>
           <a:xfrm>
             <a:off x="7132320" y="6528816"/>
-            <a:ext cx="4663440" cy="310896"/>
+            <a:ext cx="4023360" cy="310896"/>
           </a:xfrm>
           <a:prstGeom prst="rect">
             <a:avLst/>
@@ -16709,7 +17957,7 @@
         </p:nvSpPr>
         <p:spPr>
           <a:xfrm>
-            <a:off x="411480" y="384048"/>
+            <a:off x="548640" y="384048"/>
             <a:ext cx="82296" cy="658368"/>
           </a:xfrm>
           <a:prstGeom prst="rect">
@@ -16729,7 +17977,7 @@
         </p:nvSpPr>
         <p:spPr>
           <a:xfrm>
-            <a:off x="640080" y="292608"/>
+            <a:off x="777240" y="292608"/>
             <a:ext cx="10972800" cy="274320"/>
           </a:xfrm>
           <a:prstGeom prst="rect">
@@ -16768,8 +18016,8 @@
         </p:nvSpPr>
         <p:spPr>
           <a:xfrm>
-            <a:off x="640080" y="530352"/>
-            <a:ext cx="11155680" cy="566928"/>
+            <a:off x="777240" y="530352"/>
+            <a:ext cx="10881360" cy="566928"/>
           </a:xfrm>
           <a:prstGeom prst="rect">
             <a:avLst/>
@@ -16809,12 +18057,12 @@
         </p:nvSpPr>
         <p:spPr>
           <a:xfrm>
-            <a:off x="411480" y="1325880"/>
-            <a:ext cx="3611880" cy="4937760"/>
+            <a:off x="548640" y="1325880"/>
+            <a:ext cx="3514344" cy="4937760"/>
           </a:xfrm>
           <a:prstGeom prst="roundRect">
             <a:avLst>
-              <a:gd name="adj" fmla="val 2025"/>
+              <a:gd name="adj" fmla="val 2082"/>
             </a:avLst>
           </a:prstGeom>
           <a:solidFill>
@@ -16843,8 +18091,8 @@
         </p:nvSpPr>
         <p:spPr>
           <a:xfrm>
-            <a:off x="411480" y="1325880"/>
-            <a:ext cx="3611880" cy="109728"/>
+            <a:off x="548640" y="1325880"/>
+            <a:ext cx="3514344" cy="109728"/>
           </a:xfrm>
           <a:prstGeom prst="rect">
             <a:avLst/>
@@ -16863,8 +18111,8 @@
         </p:nvSpPr>
         <p:spPr>
           <a:xfrm>
-            <a:off x="685800" y="1554480"/>
-            <a:ext cx="3063240" cy="685800"/>
+            <a:off x="822960" y="1554480"/>
+            <a:ext cx="2965704" cy="685800"/>
           </a:xfrm>
           <a:prstGeom prst="rect">
             <a:avLst/>
@@ -16904,8 +18152,8 @@
         </p:nvSpPr>
         <p:spPr>
           <a:xfrm>
-            <a:off x="685800" y="2286000"/>
-            <a:ext cx="3063240" cy="3749040"/>
+            <a:off x="822960" y="2286000"/>
+            <a:ext cx="2965704" cy="3749040"/>
           </a:xfrm>
           <a:prstGeom prst="rect">
             <a:avLst/>
@@ -16923,7 +18171,7 @@
               <a:buNone/>
             </a:pPr>
             <a:r>
-              <a:rPr lang="en-US" sz="1800" dirty="0">
+              <a:rPr lang="en-US" sz="2200" dirty="0">
                 <a:solidFill>
                   <a:srgbClr val="1F2937"/>
                 </a:solidFill>
@@ -16933,7 +18181,7 @@
               </a:rPr>
               <a:t>Geração distribuída (MMGD): micro e minigeração conectadas à rede de distribuição, com compensação de energia</a:t>
             </a:r>
-            <a:endParaRPr lang="en-US" sz="1800" dirty="0"/>
+            <a:endParaRPr lang="en-US" sz="2200" dirty="0"/>
           </a:p>
         </p:txBody>
       </p:sp>
@@ -16945,12 +18193,12 @@
         </p:nvSpPr>
         <p:spPr>
           <a:xfrm>
-            <a:off x="4297680" y="1325880"/>
-            <a:ext cx="3611880" cy="4937760"/>
+            <a:off x="4337304" y="1325880"/>
+            <a:ext cx="3514344" cy="4937760"/>
           </a:xfrm>
           <a:prstGeom prst="roundRect">
             <a:avLst>
-              <a:gd name="adj" fmla="val 2025"/>
+              <a:gd name="adj" fmla="val 2082"/>
             </a:avLst>
           </a:prstGeom>
           <a:solidFill>
@@ -16979,8 +18227,8 @@
         </p:nvSpPr>
         <p:spPr>
           <a:xfrm>
-            <a:off x="4297680" y="1325880"/>
-            <a:ext cx="3611880" cy="109728"/>
+            <a:off x="4337304" y="1325880"/>
+            <a:ext cx="3514344" cy="109728"/>
           </a:xfrm>
           <a:prstGeom prst="rect">
             <a:avLst/>
@@ -16999,8 +18247,8 @@
         </p:nvSpPr>
         <p:spPr>
           <a:xfrm>
-            <a:off x="4572000" y="1554480"/>
-            <a:ext cx="3063240" cy="685800"/>
+            <a:off x="4611624" y="1554480"/>
+            <a:ext cx="2965704" cy="685800"/>
           </a:xfrm>
           <a:prstGeom prst="rect">
             <a:avLst/>
@@ -17040,8 +18288,8 @@
         </p:nvSpPr>
         <p:spPr>
           <a:xfrm>
-            <a:off x="4572000" y="2286000"/>
-            <a:ext cx="3063240" cy="3749040"/>
+            <a:off x="4611624" y="2286000"/>
+            <a:ext cx="2965704" cy="3749040"/>
           </a:xfrm>
           <a:prstGeom prst="rect">
             <a:avLst/>
@@ -17059,7 +18307,7 @@
               <a:buNone/>
             </a:pPr>
             <a:r>
-              <a:rPr lang="en-US" sz="2000" dirty="0">
+              <a:rPr lang="en-US" sz="2200" dirty="0">
                 <a:solidFill>
                   <a:srgbClr val="1F2937"/>
                 </a:solidFill>
@@ -17069,7 +18317,7 @@
               </a:rPr>
               <a:t>2012 — REN 482: nasce o sistema de compensação</a:t>
             </a:r>
-            <a:endParaRPr lang="en-US" sz="2000" dirty="0"/>
+            <a:endParaRPr lang="en-US" sz="2200" dirty="0"/>
           </a:p>
         </p:txBody>
       </p:sp>
@@ -17081,12 +18329,12 @@
         </p:nvSpPr>
         <p:spPr>
           <a:xfrm>
-            <a:off x="8183880" y="1325880"/>
-            <a:ext cx="3611880" cy="4937760"/>
+            <a:off x="8125968" y="1325880"/>
+            <a:ext cx="3514344" cy="4937760"/>
           </a:xfrm>
           <a:prstGeom prst="roundRect">
             <a:avLst>
-              <a:gd name="adj" fmla="val 2025"/>
+              <a:gd name="adj" fmla="val 2082"/>
             </a:avLst>
           </a:prstGeom>
           <a:solidFill>
@@ -17115,8 +18363,8 @@
         </p:nvSpPr>
         <p:spPr>
           <a:xfrm>
-            <a:off x="8183880" y="1325880"/>
-            <a:ext cx="3611880" cy="109728"/>
+            <a:off x="8125968" y="1325880"/>
+            <a:ext cx="3514344" cy="109728"/>
           </a:xfrm>
           <a:prstGeom prst="rect">
             <a:avLst/>
@@ -17135,8 +18383,8 @@
         </p:nvSpPr>
         <p:spPr>
           <a:xfrm>
-            <a:off x="8458200" y="1554480"/>
-            <a:ext cx="3063240" cy="685800"/>
+            <a:off x="8400288" y="1554480"/>
+            <a:ext cx="2965704" cy="685800"/>
           </a:xfrm>
           <a:prstGeom prst="rect">
             <a:avLst/>
@@ -17176,8 +18424,8 @@
         </p:nvSpPr>
         <p:spPr>
           <a:xfrm>
-            <a:off x="8458200" y="2286000"/>
-            <a:ext cx="3063240" cy="3749040"/>
+            <a:off x="8400288" y="2286000"/>
+            <a:ext cx="2965704" cy="3749040"/>
           </a:xfrm>
           <a:prstGeom prst="rect">
             <a:avLst/>
@@ -17199,7 +18447,7 @@
               <a:buChar char="●"/>
             </a:pPr>
             <a:r>
-              <a:rPr lang="en-US" sz="1600" dirty="0">
+              <a:rPr lang="en-US" sz="1700" dirty="0">
                 <a:solidFill>
                   <a:srgbClr val="1F2937"/>
                 </a:solidFill>
@@ -17209,7 +18457,7 @@
               </a:rPr>
               <a:t>2015 — REN 687: autoconsumo remoto</a:t>
             </a:r>
-            <a:endParaRPr lang="en-US" sz="1600" dirty="0"/>
+            <a:endParaRPr lang="en-US" sz="1700" dirty="0"/>
           </a:p>
           <a:p>
             <a:pPr marL="342900" indent="-342900">
@@ -17220,7 +18468,7 @@
               <a:buChar char="●"/>
             </a:pPr>
             <a:r>
-              <a:rPr lang="en-US" sz="1600" dirty="0">
+              <a:rPr lang="en-US" sz="1700" dirty="0">
                 <a:solidFill>
                   <a:srgbClr val="1F2937"/>
                 </a:solidFill>
@@ -17230,7 +18478,7 @@
               </a:rPr>
               <a:t>geração compartilhada</a:t>
             </a:r>
-            <a:endParaRPr lang="en-US" sz="1600" dirty="0"/>
+            <a:endParaRPr lang="en-US" sz="1700" dirty="0"/>
           </a:p>
           <a:p>
             <a:pPr marL="342900" indent="-342900">
@@ -17241,7 +18489,7 @@
               <a:buChar char="●"/>
             </a:pPr>
             <a:r>
-              <a:rPr lang="en-US" sz="1600" dirty="0">
+              <a:rPr lang="en-US" sz="1700" dirty="0">
                 <a:solidFill>
                   <a:srgbClr val="1F2937"/>
                 </a:solidFill>
@@ -17251,7 +18499,7 @@
               </a:rPr>
               <a:t>condomínios</a:t>
             </a:r>
-            <a:endParaRPr lang="en-US" sz="1600" dirty="0"/>
+            <a:endParaRPr lang="en-US" sz="1700" dirty="0"/>
           </a:p>
           <a:p>
             <a:pPr marL="342900" indent="-342900">
@@ -17262,7 +18510,7 @@
               <a:buChar char="●"/>
             </a:pPr>
             <a:r>
-              <a:rPr lang="en-US" sz="1600" dirty="0">
+              <a:rPr lang="en-US" sz="1700" dirty="0">
                 <a:solidFill>
                   <a:srgbClr val="1F2937"/>
                 </a:solidFill>
@@ -17272,7 +18520,55 @@
               </a:rPr>
               <a:t>créditos por 60 meses</a:t>
             </a:r>
-            <a:endParaRPr lang="en-US" sz="1600" dirty="0"/>
+            <a:endParaRPr lang="en-US" sz="1700" dirty="0"/>
+          </a:p>
+        </p:txBody>
+      </p:sp>
+      <p:sp>
+        <p:nvSpPr>
+          <p:cNvPr id="25" name="Slide Number Placeholder 0"/>
+          <p:cNvSpPr>
+            <a:spLocks noGrp="1"/>
+          </p:cNvSpPr>
+          <p:nvPr>
+            <p:ph type="sldNum" sz="quarter" idx="4294967295"/>
+          </p:nvPr>
+        </p:nvSpPr>
+        <p:spPr>
+          <a:xfrm>
+            <a:off x="11292840" y="6556248"/>
+            <a:ext cx="548640" cy="256032"/>
+          </a:xfrm>
+          <a:prstGeom prst="rect">
+            <a:avLst/>
+          </a:prstGeom>
+          <a:extLst>
+            <a:ext uri="{C572A759-6A51-4108-AA02-DFA0A04FC94B}">
+              <ma14:wrappingTextBoxFlag xmlns:ma14="http://schemas.microsoft.com/office/mac/drawingml/2011/main" val="0"/>
+            </a:ext>
+          </a:extLst>
+        </p:spPr>
+        <p:txBody>
+          <a:bodyPr/>
+          <a:lstStyle>
+            <a:lvl1pPr>
+              <a:defRPr sz="900">
+                <a:solidFill>
+                  <a:srgbClr val="1B3A6B"/>
+                </a:solidFill>
+                <a:latin typeface="Arial"/>
+                <a:ea typeface="Arial"/>
+                <a:cs typeface="Arial"/>
+              </a:defRPr>
+            </a:lvl1pPr>
+          </a:lstStyle>
+          <a:p>
+            <a:pPr algn="r"/>
+            <a:fld id="{F7021451-1387-4CA6-816F-3879F97B5CBC}" type="slidenum">
+              <a:rPr b="1" lang="en-US"/>
+              <a:t>3</a:t>
+            </a:fld>
+            <a:endParaRPr lang="en-US"/>
           </a:p>
         </p:txBody>
       </p:sp>
@@ -17336,6 +18632,45 @@
         </p:nvSpPr>
         <p:spPr>
           <a:xfrm>
+            <a:off x="457200" y="548640"/>
+            <a:ext cx="3474720" cy="1737360"/>
+          </a:xfrm>
+          <a:prstGeom prst="rect">
+            <a:avLst/>
+          </a:prstGeom>
+          <a:noFill/>
+          <a:ln/>
+        </p:spPr>
+        <p:txBody>
+          <a:bodyPr wrap="square" rtlCol="0" anchor="ctr"/>
+          <a:lstStyle/>
+          <a:p>
+            <a:pPr indent="0" marL="0">
+              <a:buNone/>
+            </a:pPr>
+            <a:r>
+              <a:rPr lang="en-US" sz="11000" b="1" dirty="0">
+                <a:solidFill>
+                  <a:srgbClr val="11396F"/>
+                </a:solidFill>
+                <a:latin typeface="Arial" pitchFamily="34" charset="0"/>
+                <a:ea typeface="Arial" pitchFamily="34" charset="-122"/>
+                <a:cs typeface="Arial" pitchFamily="34" charset="-120"/>
+              </a:rPr>
+              <a:t>07</a:t>
+            </a:r>
+            <a:endParaRPr lang="en-US" sz="11000" dirty="0"/>
+          </a:p>
+        </p:txBody>
+      </p:sp>
+      <p:sp>
+        <p:nvSpPr>
+          <p:cNvPr id="4" name="Text 2"/>
+          <p:cNvSpPr/>
+          <p:nvPr/>
+        </p:nvSpPr>
+        <p:spPr>
+          <a:xfrm>
             <a:off x="548640" y="2194560"/>
             <a:ext cx="3291840" cy="548640"/>
           </a:xfrm>
@@ -17369,7 +18704,46 @@
       </p:sp>
       <p:sp>
         <p:nvSpPr>
-          <p:cNvPr id="4" name="Text 2"/>
+          <p:cNvPr id="5" name="Text 3"/>
+          <p:cNvSpPr/>
+          <p:nvPr/>
+        </p:nvSpPr>
+        <p:spPr>
+          <a:xfrm>
+            <a:off x="548640" y="3200400"/>
+            <a:ext cx="3383280" cy="457200"/>
+          </a:xfrm>
+          <a:prstGeom prst="rect">
+            <a:avLst/>
+          </a:prstGeom>
+          <a:noFill/>
+          <a:ln/>
+        </p:spPr>
+        <p:txBody>
+          <a:bodyPr wrap="square" rtlCol="0" anchor="ctr"/>
+          <a:lstStyle/>
+          <a:p>
+            <a:pPr indent="0" marL="0">
+              <a:buNone/>
+            </a:pPr>
+            <a:r>
+              <a:rPr lang="en-US" sz="1100" dirty="0">
+                <a:solidFill>
+                  <a:srgbClr val="C7D2E3"/>
+                </a:solidFill>
+                <a:latin typeface="Arial" pitchFamily="34" charset="0"/>
+                <a:ea typeface="Arial" pitchFamily="34" charset="-122"/>
+                <a:cs typeface="Arial" pitchFamily="34" charset="-120"/>
+              </a:rPr>
+              <a:t>M2 · Etapa 2 · Regulação e negócio</a:t>
+            </a:r>
+            <a:endParaRPr lang="en-US" sz="1100" dirty="0"/>
+          </a:p>
+        </p:txBody>
+      </p:sp>
+      <p:sp>
+        <p:nvSpPr>
+          <p:cNvPr id="6" name="Text 4"/>
           <p:cNvSpPr/>
           <p:nvPr/>
         </p:nvSpPr>
@@ -17408,7 +18782,7 @@
       </p:sp>
       <p:pic>
         <p:nvPicPr>
-          <p:cNvPr id="5" name="Image 0" descr="/www/wwwroot/rexar/gdsolar/docs/curso/slides/assets/logo-gdsolar.png">    </p:cNvPr>
+          <p:cNvPr id="7" name="Image 0" descr="/www/wwwroot/rexar/gdsolar/docs/curso/slides/assets/logo-gdsolar.png">    </p:cNvPr>
           <p:cNvPicPr>
             <a:picLocks noChangeAspect="1"/>
           </p:cNvPicPr>
@@ -17432,7 +18806,7 @@
       </p:pic>
       <p:sp>
         <p:nvSpPr>
-          <p:cNvPr id="6" name="Text 3"/>
+          <p:cNvPr id="8" name="Text 5"/>
           <p:cNvSpPr/>
           <p:nvPr/>
         </p:nvSpPr>
@@ -17473,7 +18847,7 @@
       </p:sp>
       <p:sp>
         <p:nvSpPr>
-          <p:cNvPr id="7" name="Text 4"/>
+          <p:cNvPr id="9" name="Text 6"/>
           <p:cNvSpPr/>
           <p:nvPr/>
         </p:nvSpPr>
@@ -17514,7 +18888,7 @@
       </p:sp>
       <p:sp>
         <p:nvSpPr>
-          <p:cNvPr id="8" name="Text 5"/>
+          <p:cNvPr id="10" name="Text 7"/>
           <p:cNvSpPr/>
           <p:nvPr/>
         </p:nvSpPr>
@@ -17630,7 +19004,7 @@
         </p:blipFill>
         <p:spPr>
           <a:xfrm>
-            <a:off x="411480" y="6547104"/>
+            <a:off x="548640" y="6547104"/>
             <a:ext cx="274320" cy="274320"/>
           </a:xfrm>
           <a:prstGeom prst="rect">
@@ -17646,7 +19020,7 @@
         </p:nvSpPr>
         <p:spPr>
           <a:xfrm>
-            <a:off x="749808" y="6528816"/>
+            <a:off x="886968" y="6528816"/>
             <a:ext cx="6400800" cy="310896"/>
           </a:xfrm>
           <a:prstGeom prst="rect">
@@ -17686,7 +19060,7 @@
         <p:spPr>
           <a:xfrm>
             <a:off x="7132320" y="6528816"/>
-            <a:ext cx="4663440" cy="310896"/>
+            <a:ext cx="4023360" cy="310896"/>
           </a:xfrm>
           <a:prstGeom prst="rect">
             <a:avLst/>
@@ -17724,7 +19098,7 @@
         </p:nvSpPr>
         <p:spPr>
           <a:xfrm>
-            <a:off x="411480" y="384048"/>
+            <a:off x="548640" y="384048"/>
             <a:ext cx="82296" cy="658368"/>
           </a:xfrm>
           <a:prstGeom prst="rect">
@@ -17744,7 +19118,7 @@
         </p:nvSpPr>
         <p:spPr>
           <a:xfrm>
-            <a:off x="640080" y="292608"/>
+            <a:off x="777240" y="292608"/>
             <a:ext cx="10972800" cy="274320"/>
           </a:xfrm>
           <a:prstGeom prst="rect">
@@ -17783,8 +19157,8 @@
         </p:nvSpPr>
         <p:spPr>
           <a:xfrm>
-            <a:off x="640080" y="530352"/>
-            <a:ext cx="11155680" cy="566928"/>
+            <a:off x="777240" y="530352"/>
+            <a:ext cx="10881360" cy="566928"/>
           </a:xfrm>
           <a:prstGeom prst="rect">
             <a:avLst/>
@@ -18138,6 +19512,54 @@
               <a:t>Cadastre a distribuidora da sua empresa</a:t>
             </a:r>
             <a:endParaRPr lang="en-US" sz="1500" dirty="0"/>
+          </a:p>
+        </p:txBody>
+      </p:sp>
+      <p:sp>
+        <p:nvSpPr>
+          <p:cNvPr id="25" name="Slide Number Placeholder 0"/>
+          <p:cNvSpPr>
+            <a:spLocks noGrp="1"/>
+          </p:cNvSpPr>
+          <p:nvPr>
+            <p:ph type="sldNum" sz="quarter" idx="4294967295"/>
+          </p:nvPr>
+        </p:nvSpPr>
+        <p:spPr>
+          <a:xfrm>
+            <a:off x="11292840" y="6556248"/>
+            <a:ext cx="548640" cy="256032"/>
+          </a:xfrm>
+          <a:prstGeom prst="rect">
+            <a:avLst/>
+          </a:prstGeom>
+          <a:extLst>
+            <a:ext uri="{C572A759-6A51-4108-AA02-DFA0A04FC94B}">
+              <ma14:wrappingTextBoxFlag xmlns:ma14="http://schemas.microsoft.com/office/mac/drawingml/2011/main" val="0"/>
+            </a:ext>
+          </a:extLst>
+        </p:spPr>
+        <p:txBody>
+          <a:bodyPr/>
+          <a:lstStyle>
+            <a:lvl1pPr>
+              <a:defRPr sz="900">
+                <a:solidFill>
+                  <a:srgbClr val="1B3A6B"/>
+                </a:solidFill>
+                <a:latin typeface="Arial"/>
+                <a:ea typeface="Arial"/>
+                <a:cs typeface="Arial"/>
+              </a:defRPr>
+            </a:lvl1pPr>
+          </a:lstStyle>
+          <a:p>
+            <a:pPr algn="r"/>
+            <a:fld id="{F7021451-1387-4CA6-816F-3879F97B5CBC}" type="slidenum">
+              <a:rPr b="1" lang="en-US"/>
+              <a:t>31</a:t>
+            </a:fld>
+            <a:endParaRPr lang="en-US"/>
           </a:p>
         </p:txBody>
       </p:sp>
@@ -18214,7 +19636,7 @@
         </p:blipFill>
         <p:spPr>
           <a:xfrm>
-            <a:off x="411480" y="6547104"/>
+            <a:off x="548640" y="6547104"/>
             <a:ext cx="274320" cy="274320"/>
           </a:xfrm>
           <a:prstGeom prst="rect">
@@ -18230,7 +19652,7 @@
         </p:nvSpPr>
         <p:spPr>
           <a:xfrm>
-            <a:off x="749808" y="6528816"/>
+            <a:off x="886968" y="6528816"/>
             <a:ext cx="6400800" cy="310896"/>
           </a:xfrm>
           <a:prstGeom prst="rect">
@@ -18270,7 +19692,7 @@
         <p:spPr>
           <a:xfrm>
             <a:off x="7132320" y="6528816"/>
-            <a:ext cx="4663440" cy="310896"/>
+            <a:ext cx="4023360" cy="310896"/>
           </a:xfrm>
           <a:prstGeom prst="rect">
             <a:avLst/>
@@ -18308,7 +19730,7 @@
         </p:nvSpPr>
         <p:spPr>
           <a:xfrm>
-            <a:off x="411480" y="384048"/>
+            <a:off x="548640" y="384048"/>
             <a:ext cx="82296" cy="658368"/>
           </a:xfrm>
           <a:prstGeom prst="rect">
@@ -18328,7 +19750,7 @@
         </p:nvSpPr>
         <p:spPr>
           <a:xfrm>
-            <a:off x="640080" y="292608"/>
+            <a:off x="777240" y="292608"/>
             <a:ext cx="10972800" cy="274320"/>
           </a:xfrm>
           <a:prstGeom prst="rect">
@@ -18367,8 +19789,8 @@
         </p:nvSpPr>
         <p:spPr>
           <a:xfrm>
-            <a:off x="640080" y="530352"/>
-            <a:ext cx="11155680" cy="566928"/>
+            <a:off x="777240" y="530352"/>
+            <a:ext cx="10881360" cy="566928"/>
           </a:xfrm>
           <a:prstGeom prst="rect">
             <a:avLst/>
@@ -18408,8 +19830,8 @@
         </p:nvSpPr>
         <p:spPr>
           <a:xfrm>
-            <a:off x="411480" y="1325880"/>
-            <a:ext cx="5577840" cy="411480"/>
+            <a:off x="548640" y="1325880"/>
+            <a:ext cx="5394960" cy="411480"/>
           </a:xfrm>
           <a:prstGeom prst="rect">
             <a:avLst/>
@@ -18447,8 +19869,8 @@
         </p:nvSpPr>
         <p:spPr>
           <a:xfrm>
-            <a:off x="411480" y="1783080"/>
-            <a:ext cx="5577840" cy="4480560"/>
+            <a:off x="548640" y="1783080"/>
+            <a:ext cx="5394960" cy="4480560"/>
           </a:xfrm>
           <a:prstGeom prst="rect">
             <a:avLst/>
@@ -18531,8 +19953,8 @@
         </p:nvSpPr>
         <p:spPr>
           <a:xfrm>
-            <a:off x="6309360" y="1325880"/>
-            <a:ext cx="5486400" cy="4937760"/>
+            <a:off x="6172200" y="1325880"/>
+            <a:ext cx="5468112" cy="4937760"/>
           </a:xfrm>
           <a:prstGeom prst="roundRect">
             <a:avLst>
@@ -18553,8 +19975,8 @@
         </p:nvSpPr>
         <p:spPr>
           <a:xfrm>
-            <a:off x="6629400" y="1554480"/>
-            <a:ext cx="4846320" cy="4480560"/>
+            <a:off x="6492240" y="1554480"/>
+            <a:ext cx="4828032" cy="4480560"/>
           </a:xfrm>
           <a:prstGeom prst="rect">
             <a:avLst/>
@@ -18598,6 +20020,54 @@
               <a:t>Ficha regulatória da minha empresa: modalidade escolhida (e por quê), distribuidora, faixa de potência das usinas pretendidas (micro/mini; abaixo ou acima de 500 kW), enquadramento esperado (GD II/GD III), valor do crédito estimado para 2026, 2027 e 2028 na distribuidora da região (pela calculadora).</a:t>
             </a:r>
             <a:endParaRPr lang="en-US" sz="1300" dirty="0"/>
+          </a:p>
+        </p:txBody>
+      </p:sp>
+      <p:sp>
+        <p:nvSpPr>
+          <p:cNvPr id="25" name="Slide Number Placeholder 0"/>
+          <p:cNvSpPr>
+            <a:spLocks noGrp="1"/>
+          </p:cNvSpPr>
+          <p:nvPr>
+            <p:ph type="sldNum" sz="quarter" idx="4294967295"/>
+          </p:nvPr>
+        </p:nvSpPr>
+        <p:spPr>
+          <a:xfrm>
+            <a:off x="11292840" y="6556248"/>
+            <a:ext cx="548640" cy="256032"/>
+          </a:xfrm>
+          <a:prstGeom prst="rect">
+            <a:avLst/>
+          </a:prstGeom>
+          <a:extLst>
+            <a:ext uri="{C572A759-6A51-4108-AA02-DFA0A04FC94B}">
+              <ma14:wrappingTextBoxFlag xmlns:ma14="http://schemas.microsoft.com/office/mac/drawingml/2011/main" val="0"/>
+            </a:ext>
+          </a:extLst>
+        </p:spPr>
+        <p:txBody>
+          <a:bodyPr/>
+          <a:lstStyle>
+            <a:lvl1pPr>
+              <a:defRPr sz="900">
+                <a:solidFill>
+                  <a:srgbClr val="1B3A6B"/>
+                </a:solidFill>
+                <a:latin typeface="Arial"/>
+                <a:ea typeface="Arial"/>
+                <a:cs typeface="Arial"/>
+              </a:defRPr>
+            </a:lvl1pPr>
+          </a:lstStyle>
+          <a:p>
+            <a:pPr algn="r"/>
+            <a:fld id="{F7021451-1387-4CA6-816F-3879F97B5CBC}" type="slidenum">
+              <a:rPr b="1" lang="en-US"/>
+              <a:t>32</a:t>
+            </a:fld>
+            <a:endParaRPr lang="en-US"/>
           </a:p>
         </p:txBody>
       </p:sp>
@@ -18674,7 +20144,7 @@
         </p:blipFill>
         <p:spPr>
           <a:xfrm>
-            <a:off x="411480" y="6547104"/>
+            <a:off x="548640" y="6547104"/>
             <a:ext cx="274320" cy="274320"/>
           </a:xfrm>
           <a:prstGeom prst="rect">
@@ -18690,7 +20160,7 @@
         </p:nvSpPr>
         <p:spPr>
           <a:xfrm>
-            <a:off x="749808" y="6528816"/>
+            <a:off x="886968" y="6528816"/>
             <a:ext cx="6400800" cy="310896"/>
           </a:xfrm>
           <a:prstGeom prst="rect">
@@ -18730,7 +20200,7 @@
         <p:spPr>
           <a:xfrm>
             <a:off x="7132320" y="6528816"/>
-            <a:ext cx="4663440" cy="310896"/>
+            <a:ext cx="4023360" cy="310896"/>
           </a:xfrm>
           <a:prstGeom prst="rect">
             <a:avLst/>
@@ -18768,7 +20238,7 @@
         </p:nvSpPr>
         <p:spPr>
           <a:xfrm>
-            <a:off x="411480" y="384048"/>
+            <a:off x="548640" y="384048"/>
             <a:ext cx="82296" cy="658368"/>
           </a:xfrm>
           <a:prstGeom prst="rect">
@@ -18788,7 +20258,7 @@
         </p:nvSpPr>
         <p:spPr>
           <a:xfrm>
-            <a:off x="640080" y="292608"/>
+            <a:off x="777240" y="292608"/>
             <a:ext cx="10972800" cy="274320"/>
           </a:xfrm>
           <a:prstGeom prst="rect">
@@ -18827,8 +20297,8 @@
         </p:nvSpPr>
         <p:spPr>
           <a:xfrm>
-            <a:off x="640080" y="530352"/>
-            <a:ext cx="11155680" cy="566928"/>
+            <a:off x="777240" y="530352"/>
+            <a:ext cx="10881360" cy="566928"/>
           </a:xfrm>
           <a:prstGeom prst="rect">
             <a:avLst/>
@@ -18868,12 +20338,12 @@
         </p:nvSpPr>
         <p:spPr>
           <a:xfrm>
-            <a:off x="411480" y="1325880"/>
-            <a:ext cx="3611880" cy="4937760"/>
+            <a:off x="548640" y="1325880"/>
+            <a:ext cx="3514344" cy="4937760"/>
           </a:xfrm>
           <a:prstGeom prst="roundRect">
             <a:avLst>
-              <a:gd name="adj" fmla="val 2025"/>
+              <a:gd name="adj" fmla="val 2082"/>
             </a:avLst>
           </a:prstGeom>
           <a:solidFill>
@@ -18902,8 +20372,8 @@
         </p:nvSpPr>
         <p:spPr>
           <a:xfrm>
-            <a:off x="411480" y="1325880"/>
-            <a:ext cx="3611880" cy="109728"/>
+            <a:off x="548640" y="1325880"/>
+            <a:ext cx="3514344" cy="109728"/>
           </a:xfrm>
           <a:prstGeom prst="rect">
             <a:avLst/>
@@ -18922,8 +20392,8 @@
         </p:nvSpPr>
         <p:spPr>
           <a:xfrm>
-            <a:off x="685800" y="1554480"/>
-            <a:ext cx="3063240" cy="685800"/>
+            <a:off x="822960" y="1554480"/>
+            <a:ext cx="2965704" cy="685800"/>
           </a:xfrm>
           <a:prstGeom prst="rect">
             <a:avLst/>
@@ -18963,8 +20433,8 @@
         </p:nvSpPr>
         <p:spPr>
           <a:xfrm>
-            <a:off x="685800" y="2286000"/>
-            <a:ext cx="3063240" cy="3749040"/>
+            <a:off x="822960" y="2286000"/>
+            <a:ext cx="2965704" cy="3749040"/>
           </a:xfrm>
           <a:prstGeom prst="rect">
             <a:avLst/>
@@ -18986,7 +20456,7 @@
               <a:buChar char="●"/>
             </a:pPr>
             <a:r>
-              <a:rPr lang="en-US" sz="1600" dirty="0">
+              <a:rPr lang="en-US" sz="1700" dirty="0">
                 <a:solidFill>
                   <a:srgbClr val="1F2937"/>
                 </a:solidFill>
@@ -18996,7 +20466,7 @@
               </a:rPr>
               <a:t>2022 — Lei 14.300: marco legal</a:t>
             </a:r>
-            <a:endParaRPr lang="en-US" sz="1600" dirty="0"/>
+            <a:endParaRPr lang="en-US" sz="1700" dirty="0"/>
           </a:p>
           <a:p>
             <a:pPr marL="342900" indent="-342900">
@@ -19007,7 +20477,7 @@
               <a:buChar char="●"/>
             </a:pPr>
             <a:r>
-              <a:rPr lang="en-US" sz="1600" dirty="0">
+              <a:rPr lang="en-US" sz="1700" dirty="0">
                 <a:solidFill>
                   <a:srgbClr val="1F2937"/>
                 </a:solidFill>
@@ -19017,7 +20487,7 @@
               </a:rPr>
               <a:t>regras em lei (não só resolução)</a:t>
             </a:r>
-            <a:endParaRPr lang="en-US" sz="1600" dirty="0"/>
+            <a:endParaRPr lang="en-US" sz="1700" dirty="0"/>
           </a:p>
           <a:p>
             <a:pPr marL="342900" indent="-342900">
@@ -19028,7 +20498,7 @@
               <a:buChar char="●"/>
             </a:pPr>
             <a:r>
-              <a:rPr lang="en-US" sz="1600" dirty="0">
+              <a:rPr lang="en-US" sz="1700" dirty="0">
                 <a:solidFill>
                   <a:srgbClr val="1F2937"/>
                 </a:solidFill>
@@ -19038,7 +20508,7 @@
               </a:rPr>
               <a:t>transição do Fio B</a:t>
             </a:r>
-            <a:endParaRPr lang="en-US" sz="1600" dirty="0"/>
+            <a:endParaRPr lang="en-US" sz="1700" dirty="0"/>
           </a:p>
           <a:p>
             <a:pPr marL="342900" indent="-342900">
@@ -19049,7 +20519,7 @@
               <a:buChar char="●"/>
             </a:pPr>
             <a:r>
-              <a:rPr lang="en-US" sz="1600" dirty="0">
+              <a:rPr lang="en-US" sz="1700" dirty="0">
                 <a:solidFill>
                   <a:srgbClr val="1F2937"/>
                 </a:solidFill>
@@ -19059,7 +20529,7 @@
               </a:rPr>
               <a:t>direito adquirido até 2045</a:t>
             </a:r>
-            <a:endParaRPr lang="en-US" sz="1600" dirty="0"/>
+            <a:endParaRPr lang="en-US" sz="1700" dirty="0"/>
           </a:p>
         </p:txBody>
       </p:sp>
@@ -19071,12 +20541,12 @@
         </p:nvSpPr>
         <p:spPr>
           <a:xfrm>
-            <a:off x="4297680" y="1325880"/>
-            <a:ext cx="3611880" cy="4937760"/>
+            <a:off x="4337304" y="1325880"/>
+            <a:ext cx="3514344" cy="4937760"/>
           </a:xfrm>
           <a:prstGeom prst="roundRect">
             <a:avLst>
-              <a:gd name="adj" fmla="val 2025"/>
+              <a:gd name="adj" fmla="val 2082"/>
             </a:avLst>
           </a:prstGeom>
           <a:solidFill>
@@ -19105,8 +20575,8 @@
         </p:nvSpPr>
         <p:spPr>
           <a:xfrm>
-            <a:off x="4297680" y="1325880"/>
-            <a:ext cx="3611880" cy="109728"/>
+            <a:off x="4337304" y="1325880"/>
+            <a:ext cx="3514344" cy="109728"/>
           </a:xfrm>
           <a:prstGeom prst="rect">
             <a:avLst/>
@@ -19125,8 +20595,8 @@
         </p:nvSpPr>
         <p:spPr>
           <a:xfrm>
-            <a:off x="4572000" y="1554480"/>
-            <a:ext cx="3063240" cy="685800"/>
+            <a:off x="4611624" y="1554480"/>
+            <a:ext cx="2965704" cy="685800"/>
           </a:xfrm>
           <a:prstGeom prst="rect">
             <a:avLst/>
@@ -19166,8 +20636,8 @@
         </p:nvSpPr>
         <p:spPr>
           <a:xfrm>
-            <a:off x="4572000" y="2286000"/>
-            <a:ext cx="3063240" cy="3749040"/>
+            <a:off x="4611624" y="2286000"/>
+            <a:ext cx="2965704" cy="3749040"/>
           </a:xfrm>
           <a:prstGeom prst="rect">
             <a:avLst/>
@@ -19232,12 +20702,12 @@
         </p:nvSpPr>
         <p:spPr>
           <a:xfrm>
-            <a:off x="8183880" y="1325880"/>
-            <a:ext cx="3611880" cy="4937760"/>
+            <a:off x="8125968" y="1325880"/>
+            <a:ext cx="3514344" cy="4937760"/>
           </a:xfrm>
           <a:prstGeom prst="roundRect">
             <a:avLst>
-              <a:gd name="adj" fmla="val 2025"/>
+              <a:gd name="adj" fmla="val 2082"/>
             </a:avLst>
           </a:prstGeom>
           <a:solidFill>
@@ -19266,8 +20736,8 @@
         </p:nvSpPr>
         <p:spPr>
           <a:xfrm>
-            <a:off x="8183880" y="1325880"/>
-            <a:ext cx="3611880" cy="109728"/>
+            <a:off x="8125968" y="1325880"/>
+            <a:ext cx="3514344" cy="109728"/>
           </a:xfrm>
           <a:prstGeom prst="rect">
             <a:avLst/>
@@ -19286,8 +20756,8 @@
         </p:nvSpPr>
         <p:spPr>
           <a:xfrm>
-            <a:off x="8458200" y="1554480"/>
-            <a:ext cx="3063240" cy="685800"/>
+            <a:off x="8400288" y="1554480"/>
+            <a:ext cx="2965704" cy="685800"/>
           </a:xfrm>
           <a:prstGeom prst="rect">
             <a:avLst/>
@@ -19327,8 +20797,8 @@
         </p:nvSpPr>
         <p:spPr>
           <a:xfrm>
-            <a:off x="8458200" y="2286000"/>
-            <a:ext cx="3063240" cy="3749040"/>
+            <a:off x="8400288" y="2286000"/>
+            <a:ext cx="2965704" cy="3749040"/>
           </a:xfrm>
           <a:prstGeom prst="rect">
             <a:avLst/>
@@ -19350,7 +20820,7 @@
               <a:buChar char="●"/>
             </a:pPr>
             <a:r>
-              <a:rPr lang="en-US" sz="1600" dirty="0">
+              <a:rPr lang="en-US" sz="1700" dirty="0">
                 <a:solidFill>
                   <a:srgbClr val="1F2937"/>
                 </a:solidFill>
@@ -19360,7 +20830,7 @@
               </a:rPr>
               <a:t>Mercado de dezenas de gigawatts</a:t>
             </a:r>
-            <a:endParaRPr lang="en-US" sz="1600" dirty="0"/>
+            <a:endParaRPr lang="en-US" sz="1700" dirty="0"/>
           </a:p>
           <a:p>
             <a:pPr marL="342900" indent="-342900">
@@ -19371,7 +20841,7 @@
               <a:buChar char="●"/>
             </a:pPr>
             <a:r>
-              <a:rPr lang="en-US" sz="1600" dirty="0">
+              <a:rPr lang="en-US" sz="1700" dirty="0">
                 <a:solidFill>
                   <a:srgbClr val="1F2937"/>
                 </a:solidFill>
@@ -19381,7 +20851,7 @@
               </a:rPr>
               <a:t>Regras mudam: acompanhe</a:t>
             </a:r>
-            <a:endParaRPr lang="en-US" sz="1600" dirty="0"/>
+            <a:endParaRPr lang="en-US" sz="1700" dirty="0"/>
           </a:p>
           <a:p>
             <a:pPr marL="342900" indent="-342900">
@@ -19392,7 +20862,7 @@
               <a:buChar char="●"/>
             </a:pPr>
             <a:r>
-              <a:rPr lang="en-US" sz="1600" dirty="0">
+              <a:rPr lang="en-US" sz="1700" dirty="0">
                 <a:solidFill>
                   <a:srgbClr val="1F2937"/>
                 </a:solidFill>
@@ -19402,7 +20872,55 @@
               </a:rPr>
               <a:t>Este curso é atualizado a cada semestre</a:t>
             </a:r>
-            <a:endParaRPr lang="en-US" sz="1600" dirty="0"/>
+            <a:endParaRPr lang="en-US" sz="1700" dirty="0"/>
+          </a:p>
+        </p:txBody>
+      </p:sp>
+      <p:sp>
+        <p:nvSpPr>
+          <p:cNvPr id="25" name="Slide Number Placeholder 0"/>
+          <p:cNvSpPr>
+            <a:spLocks noGrp="1"/>
+          </p:cNvSpPr>
+          <p:nvPr>
+            <p:ph type="sldNum" sz="quarter" idx="4294967295"/>
+          </p:nvPr>
+        </p:nvSpPr>
+        <p:spPr>
+          <a:xfrm>
+            <a:off x="11292840" y="6556248"/>
+            <a:ext cx="548640" cy="256032"/>
+          </a:xfrm>
+          <a:prstGeom prst="rect">
+            <a:avLst/>
+          </a:prstGeom>
+          <a:extLst>
+            <a:ext uri="{C572A759-6A51-4108-AA02-DFA0A04FC94B}">
+              <ma14:wrappingTextBoxFlag xmlns:ma14="http://schemas.microsoft.com/office/mac/drawingml/2011/main" val="0"/>
+            </a:ext>
+          </a:extLst>
+        </p:spPr>
+        <p:txBody>
+          <a:bodyPr/>
+          <a:lstStyle>
+            <a:lvl1pPr>
+              <a:defRPr sz="900">
+                <a:solidFill>
+                  <a:srgbClr val="1B3A6B"/>
+                </a:solidFill>
+                <a:latin typeface="Arial"/>
+                <a:ea typeface="Arial"/>
+                <a:cs typeface="Arial"/>
+              </a:defRPr>
+            </a:lvl1pPr>
+          </a:lstStyle>
+          <a:p>
+            <a:pPr algn="r"/>
+            <a:fld id="{F7021451-1387-4CA6-816F-3879F97B5CBC}" type="slidenum">
+              <a:rPr b="1" lang="en-US"/>
+              <a:t>4</a:t>
+            </a:fld>
+            <a:endParaRPr lang="en-US"/>
           </a:p>
         </p:txBody>
       </p:sp>
@@ -19466,6 +20984,45 @@
         </p:nvSpPr>
         <p:spPr>
           <a:xfrm>
+            <a:off x="457200" y="548640"/>
+            <a:ext cx="3474720" cy="1737360"/>
+          </a:xfrm>
+          <a:prstGeom prst="rect">
+            <a:avLst/>
+          </a:prstGeom>
+          <a:noFill/>
+          <a:ln/>
+        </p:spPr>
+        <p:txBody>
+          <a:bodyPr wrap="square" rtlCol="0" anchor="ctr"/>
+          <a:lstStyle/>
+          <a:p>
+            <a:pPr indent="0" marL="0">
+              <a:buNone/>
+            </a:pPr>
+            <a:r>
+              <a:rPr lang="en-US" sz="11000" b="1" dirty="0">
+                <a:solidFill>
+                  <a:srgbClr val="11396F"/>
+                </a:solidFill>
+                <a:latin typeface="Arial" pitchFamily="34" charset="0"/>
+                <a:ea typeface="Arial" pitchFamily="34" charset="-122"/>
+                <a:cs typeface="Arial" pitchFamily="34" charset="-120"/>
+              </a:rPr>
+              <a:t>02</a:t>
+            </a:r>
+            <a:endParaRPr lang="en-US" sz="11000" dirty="0"/>
+          </a:p>
+        </p:txBody>
+      </p:sp>
+      <p:sp>
+        <p:nvSpPr>
+          <p:cNvPr id="4" name="Text 2"/>
+          <p:cNvSpPr/>
+          <p:nvPr/>
+        </p:nvSpPr>
+        <p:spPr>
+          <a:xfrm>
             <a:off x="548640" y="2194560"/>
             <a:ext cx="3291840" cy="548640"/>
           </a:xfrm>
@@ -19499,7 +21056,46 @@
       </p:sp>
       <p:sp>
         <p:nvSpPr>
-          <p:cNvPr id="4" name="Text 2"/>
+          <p:cNvPr id="5" name="Text 3"/>
+          <p:cNvSpPr/>
+          <p:nvPr/>
+        </p:nvSpPr>
+        <p:spPr>
+          <a:xfrm>
+            <a:off x="548640" y="3200400"/>
+            <a:ext cx="3383280" cy="457200"/>
+          </a:xfrm>
+          <a:prstGeom prst="rect">
+            <a:avLst/>
+          </a:prstGeom>
+          <a:noFill/>
+          <a:ln/>
+        </p:spPr>
+        <p:txBody>
+          <a:bodyPr wrap="square" rtlCol="0" anchor="ctr"/>
+          <a:lstStyle/>
+          <a:p>
+            <a:pPr indent="0" marL="0">
+              <a:buNone/>
+            </a:pPr>
+            <a:r>
+              <a:rPr lang="en-US" sz="1100" dirty="0">
+                <a:solidFill>
+                  <a:srgbClr val="C7D2E3"/>
+                </a:solidFill>
+                <a:latin typeface="Arial" pitchFamily="34" charset="0"/>
+                <a:ea typeface="Arial" pitchFamily="34" charset="-122"/>
+                <a:cs typeface="Arial" pitchFamily="34" charset="-120"/>
+              </a:rPr>
+              <a:t>M2 · Etapa 2 · Regulação e negócio</a:t>
+            </a:r>
+            <a:endParaRPr lang="en-US" sz="1100" dirty="0"/>
+          </a:p>
+        </p:txBody>
+      </p:sp>
+      <p:sp>
+        <p:nvSpPr>
+          <p:cNvPr id="6" name="Text 4"/>
           <p:cNvSpPr/>
           <p:nvPr/>
         </p:nvSpPr>
@@ -19538,7 +21134,7 @@
       </p:sp>
       <p:pic>
         <p:nvPicPr>
-          <p:cNvPr id="5" name="Image 0" descr="/www/wwwroot/rexar/gdsolar/docs/curso/slides/assets/logo-gdsolar.png">    </p:cNvPr>
+          <p:cNvPr id="7" name="Image 0" descr="/www/wwwroot/rexar/gdsolar/docs/curso/slides/assets/logo-gdsolar.png">    </p:cNvPr>
           <p:cNvPicPr>
             <a:picLocks noChangeAspect="1"/>
           </p:cNvPicPr>
@@ -19562,7 +21158,7 @@
       </p:pic>
       <p:sp>
         <p:nvSpPr>
-          <p:cNvPr id="6" name="Text 3"/>
+          <p:cNvPr id="8" name="Text 5"/>
           <p:cNvSpPr/>
           <p:nvPr/>
         </p:nvSpPr>
@@ -19603,7 +21199,7 @@
       </p:sp>
       <p:sp>
         <p:nvSpPr>
-          <p:cNvPr id="7" name="Text 4"/>
+          <p:cNvPr id="9" name="Text 6"/>
           <p:cNvSpPr/>
           <p:nvPr/>
         </p:nvSpPr>
@@ -19644,7 +21240,7 @@
       </p:sp>
       <p:sp>
         <p:nvSpPr>
-          <p:cNvPr id="8" name="Text 5"/>
+          <p:cNvPr id="10" name="Text 7"/>
           <p:cNvSpPr/>
           <p:nvPr/>
         </p:nvSpPr>
@@ -19844,7 +21440,7 @@
         </p:blipFill>
         <p:spPr>
           <a:xfrm>
-            <a:off x="411480" y="6547104"/>
+            <a:off x="548640" y="6547104"/>
             <a:ext cx="274320" cy="274320"/>
           </a:xfrm>
           <a:prstGeom prst="rect">
@@ -19860,7 +21456,7 @@
         </p:nvSpPr>
         <p:spPr>
           <a:xfrm>
-            <a:off x="749808" y="6528816"/>
+            <a:off x="886968" y="6528816"/>
             <a:ext cx="6400800" cy="310896"/>
           </a:xfrm>
           <a:prstGeom prst="rect">
@@ -19900,7 +21496,7 @@
         <p:spPr>
           <a:xfrm>
             <a:off x="7132320" y="6528816"/>
-            <a:ext cx="4663440" cy="310896"/>
+            <a:ext cx="4023360" cy="310896"/>
           </a:xfrm>
           <a:prstGeom prst="rect">
             <a:avLst/>
@@ -19938,7 +21534,7 @@
         </p:nvSpPr>
         <p:spPr>
           <a:xfrm>
-            <a:off x="411480" y="384048"/>
+            <a:off x="548640" y="384048"/>
             <a:ext cx="82296" cy="658368"/>
           </a:xfrm>
           <a:prstGeom prst="rect">
@@ -19958,7 +21554,7 @@
         </p:nvSpPr>
         <p:spPr>
           <a:xfrm>
-            <a:off x="640080" y="292608"/>
+            <a:off x="777240" y="292608"/>
             <a:ext cx="10972800" cy="274320"/>
           </a:xfrm>
           <a:prstGeom prst="rect">
@@ -19997,8 +21593,8 @@
         </p:nvSpPr>
         <p:spPr>
           <a:xfrm>
-            <a:off x="640080" y="530352"/>
-            <a:ext cx="11155680" cy="566928"/>
+            <a:off x="777240" y="530352"/>
+            <a:ext cx="10881360" cy="566928"/>
           </a:xfrm>
           <a:prstGeom prst="rect">
             <a:avLst/>
@@ -20038,12 +21634,12 @@
         </p:nvSpPr>
         <p:spPr>
           <a:xfrm>
-            <a:off x="411480" y="1325880"/>
-            <a:ext cx="3611880" cy="4937760"/>
+            <a:off x="548640" y="1325880"/>
+            <a:ext cx="3514344" cy="4937760"/>
           </a:xfrm>
           <a:prstGeom prst="roundRect">
             <a:avLst>
-              <a:gd name="adj" fmla="val 2025"/>
+              <a:gd name="adj" fmla="val 2082"/>
             </a:avLst>
           </a:prstGeom>
           <a:solidFill>
@@ -20072,8 +21668,8 @@
         </p:nvSpPr>
         <p:spPr>
           <a:xfrm>
-            <a:off x="411480" y="1325880"/>
-            <a:ext cx="3611880" cy="109728"/>
+            <a:off x="548640" y="1325880"/>
+            <a:ext cx="3514344" cy="109728"/>
           </a:xfrm>
           <a:prstGeom prst="rect">
             <a:avLst/>
@@ -20092,8 +21688,8 @@
         </p:nvSpPr>
         <p:spPr>
           <a:xfrm>
-            <a:off x="685800" y="1554480"/>
-            <a:ext cx="3063240" cy="685800"/>
+            <a:off x="822960" y="1554480"/>
+            <a:ext cx="2965704" cy="685800"/>
           </a:xfrm>
           <a:prstGeom prst="rect">
             <a:avLst/>
@@ -20133,8 +21729,8 @@
         </p:nvSpPr>
         <p:spPr>
           <a:xfrm>
-            <a:off x="685800" y="2286000"/>
-            <a:ext cx="3063240" cy="3749040"/>
+            <a:off x="822960" y="2286000"/>
+            <a:ext cx="2965704" cy="3749040"/>
           </a:xfrm>
           <a:prstGeom prst="rect">
             <a:avLst/>
@@ -20152,7 +21748,7 @@
               <a:buNone/>
             </a:pPr>
             <a:r>
-              <a:rPr lang="en-US" sz="2000" dirty="0">
+              <a:rPr lang="en-US" sz="2200" dirty="0">
                 <a:solidFill>
                   <a:srgbClr val="1F2937"/>
                 </a:solidFill>
@@ -20162,7 +21758,7 @@
               </a:rPr>
               <a:t>Microgeração: até 75 kW</a:t>
             </a:r>
-            <a:endParaRPr lang="en-US" sz="2000" dirty="0"/>
+            <a:endParaRPr lang="en-US" sz="2200" dirty="0"/>
           </a:p>
         </p:txBody>
       </p:sp>
@@ -20174,12 +21770,12 @@
         </p:nvSpPr>
         <p:spPr>
           <a:xfrm>
-            <a:off x="4297680" y="1325880"/>
-            <a:ext cx="3611880" cy="4937760"/>
+            <a:off x="4337304" y="1325880"/>
+            <a:ext cx="3514344" cy="4937760"/>
           </a:xfrm>
           <a:prstGeom prst="roundRect">
             <a:avLst>
-              <a:gd name="adj" fmla="val 2025"/>
+              <a:gd name="adj" fmla="val 2082"/>
             </a:avLst>
           </a:prstGeom>
           <a:solidFill>
@@ -20208,8 +21804,8 @@
         </p:nvSpPr>
         <p:spPr>
           <a:xfrm>
-            <a:off x="4297680" y="1325880"/>
-            <a:ext cx="3611880" cy="109728"/>
+            <a:off x="4337304" y="1325880"/>
+            <a:ext cx="3514344" cy="109728"/>
           </a:xfrm>
           <a:prstGeom prst="rect">
             <a:avLst/>
@@ -20228,8 +21824,8 @@
         </p:nvSpPr>
         <p:spPr>
           <a:xfrm>
-            <a:off x="4572000" y="1554480"/>
-            <a:ext cx="3063240" cy="685800"/>
+            <a:off x="4611624" y="1554480"/>
+            <a:ext cx="2965704" cy="685800"/>
           </a:xfrm>
           <a:prstGeom prst="rect">
             <a:avLst/>
@@ -20269,8 +21865,8 @@
         </p:nvSpPr>
         <p:spPr>
           <a:xfrm>
-            <a:off x="4572000" y="2286000"/>
-            <a:ext cx="3063240" cy="3749040"/>
+            <a:off x="4611624" y="2286000"/>
+            <a:ext cx="2965704" cy="3749040"/>
           </a:xfrm>
           <a:prstGeom prst="rect">
             <a:avLst/>
@@ -20292,7 +21888,7 @@
               <a:buChar char="●"/>
             </a:pPr>
             <a:r>
-              <a:rPr lang="en-US" sz="1600" dirty="0">
+              <a:rPr lang="en-US" sz="1700" dirty="0">
                 <a:solidFill>
                   <a:srgbClr val="1F2937"/>
                 </a:solidFill>
@@ -20302,7 +21898,7 @@
               </a:rPr>
               <a:t>Minigeração: acima de 75 kW até 5 MW (fontes despacháveis)</a:t>
             </a:r>
-            <a:endParaRPr lang="en-US" sz="1600" dirty="0"/>
+            <a:endParaRPr lang="en-US" sz="1700" dirty="0"/>
           </a:p>
           <a:p>
             <a:pPr marL="342900" indent="-342900">
@@ -20313,7 +21909,7 @@
               <a:buChar char="●"/>
             </a:pPr>
             <a:r>
-              <a:rPr lang="en-US" sz="1600" dirty="0">
+              <a:rPr lang="en-US" sz="1700" dirty="0">
                 <a:solidFill>
                   <a:srgbClr val="1F2937"/>
                 </a:solidFill>
@@ -20323,7 +21919,7 @@
               </a:rPr>
               <a:t>até 3 MW para fontes não despacháveis, como a solar</a:t>
             </a:r>
-            <a:endParaRPr lang="en-US" sz="1600" dirty="0"/>
+            <a:endParaRPr lang="en-US" sz="1700" dirty="0"/>
           </a:p>
         </p:txBody>
       </p:sp>
@@ -20335,12 +21931,12 @@
         </p:nvSpPr>
         <p:spPr>
           <a:xfrm>
-            <a:off x="8183880" y="1325880"/>
-            <a:ext cx="3611880" cy="4937760"/>
+            <a:off x="8125968" y="1325880"/>
+            <a:ext cx="3514344" cy="4937760"/>
           </a:xfrm>
           <a:prstGeom prst="roundRect">
             <a:avLst>
-              <a:gd name="adj" fmla="val 2025"/>
+              <a:gd name="adj" fmla="val 2082"/>
             </a:avLst>
           </a:prstGeom>
           <a:solidFill>
@@ -20369,8 +21965,8 @@
         </p:nvSpPr>
         <p:spPr>
           <a:xfrm>
-            <a:off x="8183880" y="1325880"/>
-            <a:ext cx="3611880" cy="109728"/>
+            <a:off x="8125968" y="1325880"/>
+            <a:ext cx="3514344" cy="109728"/>
           </a:xfrm>
           <a:prstGeom prst="rect">
             <a:avLst/>
@@ -20389,8 +21985,8 @@
         </p:nvSpPr>
         <p:spPr>
           <a:xfrm>
-            <a:off x="8458200" y="1554480"/>
-            <a:ext cx="3063240" cy="685800"/>
+            <a:off x="8400288" y="1554480"/>
+            <a:ext cx="2965704" cy="685800"/>
           </a:xfrm>
           <a:prstGeom prst="rect">
             <a:avLst/>
@@ -20430,8 +22026,8 @@
         </p:nvSpPr>
         <p:spPr>
           <a:xfrm>
-            <a:off x="8458200" y="2286000"/>
-            <a:ext cx="3063240" cy="3749040"/>
+            <a:off x="8400288" y="2286000"/>
+            <a:ext cx="2965704" cy="3749040"/>
           </a:xfrm>
           <a:prstGeom prst="rect">
             <a:avLst/>
@@ -20453,7 +22049,7 @@
               <a:buChar char="●"/>
             </a:pPr>
             <a:r>
-              <a:rPr lang="en-US" sz="1400" dirty="0">
+              <a:rPr lang="en-US" sz="1700" dirty="0">
                 <a:solidFill>
                   <a:srgbClr val="1F2937"/>
                 </a:solidFill>
@@ -20463,7 +22059,7 @@
               </a:rPr>
               <a:t>- Pedido de acesso e parecer da distribuidora</a:t>
             </a:r>
-            <a:endParaRPr lang="en-US" sz="1400" dirty="0"/>
+            <a:endParaRPr lang="en-US" sz="1700" dirty="0"/>
           </a:p>
           <a:p>
             <a:pPr marL="342900" indent="-342900">
@@ -20474,7 +22070,7 @@
               <a:buChar char="●"/>
             </a:pPr>
             <a:r>
-              <a:rPr lang="en-US" sz="1400" dirty="0">
+              <a:rPr lang="en-US" sz="1700" dirty="0">
                 <a:solidFill>
                   <a:srgbClr val="1F2937"/>
                 </a:solidFill>
@@ -20484,7 +22080,7 @@
               </a:rPr>
               <a:t>- Projeto e obras de conexão</a:t>
             </a:r>
-            <a:endParaRPr lang="en-US" sz="1400" dirty="0"/>
+            <a:endParaRPr lang="en-US" sz="1700" dirty="0"/>
           </a:p>
           <a:p>
             <a:pPr marL="342900" indent="-342900">
@@ -20495,7 +22091,7 @@
               <a:buChar char="●"/>
             </a:pPr>
             <a:r>
-              <a:rPr lang="en-US" sz="1400" dirty="0">
+              <a:rPr lang="en-US" sz="1700" dirty="0">
                 <a:solidFill>
                   <a:srgbClr val="1F2937"/>
                 </a:solidFill>
@@ -20505,7 +22101,7 @@
               </a:rPr>
               <a:t>- Garantia de fiel cumprimento (&gt; 500 kW)</a:t>
             </a:r>
-            <a:endParaRPr lang="en-US" sz="1400" dirty="0"/>
+            <a:endParaRPr lang="en-US" sz="1700" dirty="0"/>
           </a:p>
           <a:p>
             <a:pPr marL="342900" indent="-342900">
@@ -20516,7 +22112,7 @@
               <a:buChar char="●"/>
             </a:pPr>
             <a:r>
-              <a:rPr lang="en-US" sz="1400" dirty="0">
+              <a:rPr lang="en-US" sz="1700" dirty="0">
                 <a:solidFill>
                   <a:srgbClr val="1F2937"/>
                 </a:solidFill>
@@ -20526,7 +22122,55 @@
               </a:rPr>
               <a:t>- Prazos para conectar</a:t>
             </a:r>
-            <a:endParaRPr lang="en-US" sz="1400" dirty="0"/>
+            <a:endParaRPr lang="en-US" sz="1700" dirty="0"/>
+          </a:p>
+        </p:txBody>
+      </p:sp>
+      <p:sp>
+        <p:nvSpPr>
+          <p:cNvPr id="25" name="Slide Number Placeholder 0"/>
+          <p:cNvSpPr>
+            <a:spLocks noGrp="1"/>
+          </p:cNvSpPr>
+          <p:nvPr>
+            <p:ph type="sldNum" sz="quarter" idx="4294967295"/>
+          </p:nvPr>
+        </p:nvSpPr>
+        <p:spPr>
+          <a:xfrm>
+            <a:off x="11292840" y="6556248"/>
+            <a:ext cx="548640" cy="256032"/>
+          </a:xfrm>
+          <a:prstGeom prst="rect">
+            <a:avLst/>
+          </a:prstGeom>
+          <a:extLst>
+            <a:ext uri="{C572A759-6A51-4108-AA02-DFA0A04FC94B}">
+              <ma14:wrappingTextBoxFlag xmlns:ma14="http://schemas.microsoft.com/office/mac/drawingml/2011/main" val="0"/>
+            </a:ext>
+          </a:extLst>
+        </p:spPr>
+        <p:txBody>
+          <a:bodyPr/>
+          <a:lstStyle>
+            <a:lvl1pPr>
+              <a:defRPr sz="900">
+                <a:solidFill>
+                  <a:srgbClr val="1B3A6B"/>
+                </a:solidFill>
+                <a:latin typeface="Arial"/>
+                <a:ea typeface="Arial"/>
+                <a:cs typeface="Arial"/>
+              </a:defRPr>
+            </a:lvl1pPr>
+          </a:lstStyle>
+          <a:p>
+            <a:pPr algn="r"/>
+            <a:fld id="{F7021451-1387-4CA6-816F-3879F97B5CBC}" type="slidenum">
+              <a:rPr b="1" lang="en-US"/>
+              <a:t>6</a:t>
+            </a:fld>
+            <a:endParaRPr lang="en-US"/>
           </a:p>
         </p:txBody>
       </p:sp>
@@ -20603,7 +22247,7 @@
         </p:blipFill>
         <p:spPr>
           <a:xfrm>
-            <a:off x="411480" y="6547104"/>
+            <a:off x="548640" y="6547104"/>
             <a:ext cx="274320" cy="274320"/>
           </a:xfrm>
           <a:prstGeom prst="rect">
@@ -20619,7 +22263,7 @@
         </p:nvSpPr>
         <p:spPr>
           <a:xfrm>
-            <a:off x="749808" y="6528816"/>
+            <a:off x="886968" y="6528816"/>
             <a:ext cx="6400800" cy="310896"/>
           </a:xfrm>
           <a:prstGeom prst="rect">
@@ -20659,7 +22303,7 @@
         <p:spPr>
           <a:xfrm>
             <a:off x="7132320" y="6528816"/>
-            <a:ext cx="4663440" cy="310896"/>
+            <a:ext cx="4023360" cy="310896"/>
           </a:xfrm>
           <a:prstGeom prst="rect">
             <a:avLst/>
@@ -20697,7 +22341,7 @@
         </p:nvSpPr>
         <p:spPr>
           <a:xfrm>
-            <a:off x="411480" y="384048"/>
+            <a:off x="548640" y="384048"/>
             <a:ext cx="82296" cy="658368"/>
           </a:xfrm>
           <a:prstGeom prst="rect">
@@ -20717,7 +22361,7 @@
         </p:nvSpPr>
         <p:spPr>
           <a:xfrm>
-            <a:off x="640080" y="292608"/>
+            <a:off x="777240" y="292608"/>
             <a:ext cx="10972800" cy="274320"/>
           </a:xfrm>
           <a:prstGeom prst="rect">
@@ -20756,8 +22400,8 @@
         </p:nvSpPr>
         <p:spPr>
           <a:xfrm>
-            <a:off x="640080" y="530352"/>
-            <a:ext cx="11155680" cy="566928"/>
+            <a:off x="777240" y="530352"/>
+            <a:ext cx="10881360" cy="566928"/>
           </a:xfrm>
           <a:prstGeom prst="rect">
             <a:avLst/>
@@ -20797,8 +22441,8 @@
         </p:nvSpPr>
         <p:spPr>
           <a:xfrm>
-            <a:off x="411480" y="1325880"/>
-            <a:ext cx="5554980" cy="4937760"/>
+            <a:off x="548640" y="1325880"/>
+            <a:ext cx="5408676" cy="4937760"/>
           </a:xfrm>
           <a:prstGeom prst="roundRect">
             <a:avLst>
@@ -20831,8 +22475,8 @@
         </p:nvSpPr>
         <p:spPr>
           <a:xfrm>
-            <a:off x="411480" y="1325880"/>
-            <a:ext cx="5554980" cy="109728"/>
+            <a:off x="548640" y="1325880"/>
+            <a:ext cx="5408676" cy="109728"/>
           </a:xfrm>
           <a:prstGeom prst="rect">
             <a:avLst/>
@@ -20851,8 +22495,8 @@
         </p:nvSpPr>
         <p:spPr>
           <a:xfrm>
-            <a:off x="685800" y="1554480"/>
-            <a:ext cx="5006340" cy="685800"/>
+            <a:off x="822960" y="1554480"/>
+            <a:ext cx="4860036" cy="685800"/>
           </a:xfrm>
           <a:prstGeom prst="rect">
             <a:avLst/>
@@ -20892,8 +22536,8 @@
         </p:nvSpPr>
         <p:spPr>
           <a:xfrm>
-            <a:off x="685800" y="2286000"/>
-            <a:ext cx="5006340" cy="3749040"/>
+            <a:off x="822960" y="2286000"/>
+            <a:ext cx="4860036" cy="3749040"/>
           </a:xfrm>
           <a:prstGeom prst="rect">
             <a:avLst/>
@@ -20911,7 +22555,7 @@
               <a:buNone/>
             </a:pPr>
             <a:r>
-              <a:rPr lang="en-US" sz="1800" dirty="0">
+              <a:rPr lang="en-US" sz="2200" dirty="0">
                 <a:solidFill>
                   <a:srgbClr val="1F2937"/>
                 </a:solidFill>
@@ -20921,7 +22565,7 @@
               </a:rPr>
               <a:t>Proibido dividir uma central geradora para caber nos limites ou nas regras mais favoráveis</a:t>
             </a:r>
-            <a:endParaRPr lang="en-US" sz="1800" dirty="0"/>
+            <a:endParaRPr lang="en-US" sz="2200" dirty="0"/>
           </a:p>
         </p:txBody>
       </p:sp>
@@ -20933,8 +22577,8 @@
         </p:nvSpPr>
         <p:spPr>
           <a:xfrm>
-            <a:off x="6240780" y="1325880"/>
-            <a:ext cx="5554980" cy="4937760"/>
+            <a:off x="6231636" y="1325880"/>
+            <a:ext cx="5408676" cy="4937760"/>
           </a:xfrm>
           <a:prstGeom prst="roundRect">
             <a:avLst>
@@ -20967,8 +22611,8 @@
         </p:nvSpPr>
         <p:spPr>
           <a:xfrm>
-            <a:off x="6240780" y="1325880"/>
-            <a:ext cx="5554980" cy="109728"/>
+            <a:off x="6231636" y="1325880"/>
+            <a:ext cx="5408676" cy="109728"/>
           </a:xfrm>
           <a:prstGeom prst="rect">
             <a:avLst/>
@@ -20987,8 +22631,8 @@
         </p:nvSpPr>
         <p:spPr>
           <a:xfrm>
-            <a:off x="6515100" y="1554480"/>
-            <a:ext cx="5006340" cy="685800"/>
+            <a:off x="6505956" y="1554480"/>
+            <a:ext cx="4860036" cy="685800"/>
           </a:xfrm>
           <a:prstGeom prst="rect">
             <a:avLst/>
@@ -21028,8 +22672,8 @@
         </p:nvSpPr>
         <p:spPr>
           <a:xfrm>
-            <a:off x="6515100" y="2286000"/>
-            <a:ext cx="5006340" cy="3749040"/>
+            <a:off x="6505956" y="2286000"/>
+            <a:ext cx="4860036" cy="3749040"/>
           </a:xfrm>
           <a:prstGeom prst="rect">
             <a:avLst/>
@@ -21051,7 +22695,7 @@
               <a:buChar char="●"/>
             </a:pPr>
             <a:r>
-              <a:rPr lang="en-US" sz="1600" dirty="0">
+              <a:rPr lang="en-US" sz="1700" dirty="0">
                 <a:solidFill>
                   <a:srgbClr val="1F2937"/>
                 </a:solidFill>
@@ -21061,7 +22705,7 @@
               </a:rPr>
               <a:t>Até 500 kW: menos exigências e sem enquadramento GD III</a:t>
             </a:r>
-            <a:endParaRPr lang="en-US" sz="1600" dirty="0"/>
+            <a:endParaRPr lang="en-US" sz="1700" dirty="0"/>
           </a:p>
           <a:p>
             <a:pPr marL="342900" indent="-342900">
@@ -21072,7 +22716,7 @@
               <a:buChar char="●"/>
             </a:pPr>
             <a:r>
-              <a:rPr lang="en-US" sz="1600" dirty="0">
+              <a:rPr lang="en-US" sz="1700" dirty="0">
                 <a:solidFill>
                   <a:srgbClr val="1F2937"/>
                 </a:solidFill>
@@ -21082,7 +22726,55 @@
               </a:rPr>
               <a:t>Acima de 500 kW: escala, mas atenção às regras do Fio B (aula 5)</a:t>
             </a:r>
-            <a:endParaRPr lang="en-US" sz="1600" dirty="0"/>
+            <a:endParaRPr lang="en-US" sz="1700" dirty="0"/>
+          </a:p>
+        </p:txBody>
+      </p:sp>
+      <p:sp>
+        <p:nvSpPr>
+          <p:cNvPr id="25" name="Slide Number Placeholder 0"/>
+          <p:cNvSpPr>
+            <a:spLocks noGrp="1"/>
+          </p:cNvSpPr>
+          <p:nvPr>
+            <p:ph type="sldNum" sz="quarter" idx="4294967295"/>
+          </p:nvPr>
+        </p:nvSpPr>
+        <p:spPr>
+          <a:xfrm>
+            <a:off x="11292840" y="6556248"/>
+            <a:ext cx="548640" cy="256032"/>
+          </a:xfrm>
+          <a:prstGeom prst="rect">
+            <a:avLst/>
+          </a:prstGeom>
+          <a:extLst>
+            <a:ext uri="{C572A759-6A51-4108-AA02-DFA0A04FC94B}">
+              <ma14:wrappingTextBoxFlag xmlns:ma14="http://schemas.microsoft.com/office/mac/drawingml/2011/main" val="0"/>
+            </a:ext>
+          </a:extLst>
+        </p:spPr>
+        <p:txBody>
+          <a:bodyPr/>
+          <a:lstStyle>
+            <a:lvl1pPr>
+              <a:defRPr sz="900">
+                <a:solidFill>
+                  <a:srgbClr val="1B3A6B"/>
+                </a:solidFill>
+                <a:latin typeface="Arial"/>
+                <a:ea typeface="Arial"/>
+                <a:cs typeface="Arial"/>
+              </a:defRPr>
+            </a:lvl1pPr>
+          </a:lstStyle>
+          <a:p>
+            <a:pPr algn="r"/>
+            <a:fld id="{F7021451-1387-4CA6-816F-3879F97B5CBC}" type="slidenum">
+              <a:rPr b="1" lang="en-US"/>
+              <a:t>7</a:t>
+            </a:fld>
+            <a:endParaRPr lang="en-US"/>
           </a:p>
         </p:txBody>
       </p:sp>
@@ -21146,6 +22838,45 @@
         </p:nvSpPr>
         <p:spPr>
           <a:xfrm>
+            <a:off x="457200" y="548640"/>
+            <a:ext cx="3474720" cy="1737360"/>
+          </a:xfrm>
+          <a:prstGeom prst="rect">
+            <a:avLst/>
+          </a:prstGeom>
+          <a:noFill/>
+          <a:ln/>
+        </p:spPr>
+        <p:txBody>
+          <a:bodyPr wrap="square" rtlCol="0" anchor="ctr"/>
+          <a:lstStyle/>
+          <a:p>
+            <a:pPr indent="0" marL="0">
+              <a:buNone/>
+            </a:pPr>
+            <a:r>
+              <a:rPr lang="en-US" sz="11000" b="1" dirty="0">
+                <a:solidFill>
+                  <a:srgbClr val="11396F"/>
+                </a:solidFill>
+                <a:latin typeface="Arial" pitchFamily="34" charset="0"/>
+                <a:ea typeface="Arial" pitchFamily="34" charset="-122"/>
+                <a:cs typeface="Arial" pitchFamily="34" charset="-120"/>
+              </a:rPr>
+              <a:t>03</a:t>
+            </a:r>
+            <a:endParaRPr lang="en-US" sz="11000" dirty="0"/>
+          </a:p>
+        </p:txBody>
+      </p:sp>
+      <p:sp>
+        <p:nvSpPr>
+          <p:cNvPr id="4" name="Text 2"/>
+          <p:cNvSpPr/>
+          <p:nvPr/>
+        </p:nvSpPr>
+        <p:spPr>
+          <a:xfrm>
             <a:off x="548640" y="2194560"/>
             <a:ext cx="3291840" cy="548640"/>
           </a:xfrm>
@@ -21179,7 +22910,46 @@
       </p:sp>
       <p:sp>
         <p:nvSpPr>
-          <p:cNvPr id="4" name="Text 2"/>
+          <p:cNvPr id="5" name="Text 3"/>
+          <p:cNvSpPr/>
+          <p:nvPr/>
+        </p:nvSpPr>
+        <p:spPr>
+          <a:xfrm>
+            <a:off x="548640" y="3200400"/>
+            <a:ext cx="3383280" cy="457200"/>
+          </a:xfrm>
+          <a:prstGeom prst="rect">
+            <a:avLst/>
+          </a:prstGeom>
+          <a:noFill/>
+          <a:ln/>
+        </p:spPr>
+        <p:txBody>
+          <a:bodyPr wrap="square" rtlCol="0" anchor="ctr"/>
+          <a:lstStyle/>
+          <a:p>
+            <a:pPr indent="0" marL="0">
+              <a:buNone/>
+            </a:pPr>
+            <a:r>
+              <a:rPr lang="en-US" sz="1100" dirty="0">
+                <a:solidFill>
+                  <a:srgbClr val="C7D2E3"/>
+                </a:solidFill>
+                <a:latin typeface="Arial" pitchFamily="34" charset="0"/>
+                <a:ea typeface="Arial" pitchFamily="34" charset="-122"/>
+                <a:cs typeface="Arial" pitchFamily="34" charset="-120"/>
+              </a:rPr>
+              <a:t>M2 · Etapa 2 · Regulação e negócio</a:t>
+            </a:r>
+            <a:endParaRPr lang="en-US" sz="1100" dirty="0"/>
+          </a:p>
+        </p:txBody>
+      </p:sp>
+      <p:sp>
+        <p:nvSpPr>
+          <p:cNvPr id="6" name="Text 4"/>
           <p:cNvSpPr/>
           <p:nvPr/>
         </p:nvSpPr>
@@ -21218,7 +22988,7 @@
       </p:sp>
       <p:pic>
         <p:nvPicPr>
-          <p:cNvPr id="5" name="Image 0" descr="/www/wwwroot/rexar/gdsolar/docs/curso/slides/assets/logo-gdsolar.png">    </p:cNvPr>
+          <p:cNvPr id="7" name="Image 0" descr="/www/wwwroot/rexar/gdsolar/docs/curso/slides/assets/logo-gdsolar.png">    </p:cNvPr>
           <p:cNvPicPr>
             <a:picLocks noChangeAspect="1"/>
           </p:cNvPicPr>
@@ -21242,7 +23012,7 @@
       </p:pic>
       <p:sp>
         <p:nvSpPr>
-          <p:cNvPr id="6" name="Text 3"/>
+          <p:cNvPr id="8" name="Text 5"/>
           <p:cNvSpPr/>
           <p:nvPr/>
         </p:nvSpPr>
@@ -21283,7 +23053,7 @@
       </p:sp>
       <p:sp>
         <p:nvSpPr>
-          <p:cNvPr id="7" name="Text 4"/>
+          <p:cNvPr id="9" name="Text 6"/>
           <p:cNvSpPr/>
           <p:nvPr/>
         </p:nvSpPr>
@@ -21324,7 +23094,7 @@
       </p:sp>
       <p:sp>
         <p:nvSpPr>
-          <p:cNvPr id="8" name="Text 5"/>
+          <p:cNvPr id="10" name="Text 7"/>
           <p:cNvSpPr/>
           <p:nvPr/>
         </p:nvSpPr>
@@ -21524,7 +23294,7 @@
         </p:blipFill>
         <p:spPr>
           <a:xfrm>
-            <a:off x="411480" y="6547104"/>
+            <a:off x="548640" y="6547104"/>
             <a:ext cx="274320" cy="274320"/>
           </a:xfrm>
           <a:prstGeom prst="rect">
@@ -21540,7 +23310,7 @@
         </p:nvSpPr>
         <p:spPr>
           <a:xfrm>
-            <a:off x="749808" y="6528816"/>
+            <a:off x="886968" y="6528816"/>
             <a:ext cx="6400800" cy="310896"/>
           </a:xfrm>
           <a:prstGeom prst="rect">
@@ -21580,7 +23350,7 @@
         <p:spPr>
           <a:xfrm>
             <a:off x="7132320" y="6528816"/>
-            <a:ext cx="4663440" cy="310896"/>
+            <a:ext cx="4023360" cy="310896"/>
           </a:xfrm>
           <a:prstGeom prst="rect">
             <a:avLst/>
@@ -21618,7 +23388,7 @@
         </p:nvSpPr>
         <p:spPr>
           <a:xfrm>
-            <a:off x="411480" y="384048"/>
+            <a:off x="548640" y="384048"/>
             <a:ext cx="82296" cy="658368"/>
           </a:xfrm>
           <a:prstGeom prst="rect">
@@ -21638,7 +23408,7 @@
         </p:nvSpPr>
         <p:spPr>
           <a:xfrm>
-            <a:off x="640080" y="292608"/>
+            <a:off x="777240" y="292608"/>
             <a:ext cx="10972800" cy="274320"/>
           </a:xfrm>
           <a:prstGeom prst="rect">
@@ -21677,8 +23447,8 @@
         </p:nvSpPr>
         <p:spPr>
           <a:xfrm>
-            <a:off x="640080" y="530352"/>
-            <a:ext cx="11155680" cy="566928"/>
+            <a:off x="777240" y="530352"/>
+            <a:ext cx="10881360" cy="566928"/>
           </a:xfrm>
           <a:prstGeom prst="rect">
             <a:avLst/>
@@ -21718,12 +23488,12 @@
         </p:nvSpPr>
         <p:spPr>
           <a:xfrm>
-            <a:off x="411480" y="1325880"/>
-            <a:ext cx="3611880" cy="4937760"/>
+            <a:off x="548640" y="1325880"/>
+            <a:ext cx="3514344" cy="4937760"/>
           </a:xfrm>
           <a:prstGeom prst="roundRect">
             <a:avLst>
-              <a:gd name="adj" fmla="val 2025"/>
+              <a:gd name="adj" fmla="val 2082"/>
             </a:avLst>
           </a:prstGeom>
           <a:solidFill>
@@ -21752,8 +23522,8 @@
         </p:nvSpPr>
         <p:spPr>
           <a:xfrm>
-            <a:off x="411480" y="1325880"/>
-            <a:ext cx="3611880" cy="109728"/>
+            <a:off x="548640" y="1325880"/>
+            <a:ext cx="3514344" cy="109728"/>
           </a:xfrm>
           <a:prstGeom prst="rect">
             <a:avLst/>
@@ -21772,8 +23542,8 @@
         </p:nvSpPr>
         <p:spPr>
           <a:xfrm>
-            <a:off x="685800" y="1554480"/>
-            <a:ext cx="3063240" cy="685800"/>
+            <a:off x="822960" y="1554480"/>
+            <a:ext cx="2965704" cy="685800"/>
           </a:xfrm>
           <a:prstGeom prst="rect">
             <a:avLst/>
@@ -21813,8 +23583,8 @@
         </p:nvSpPr>
         <p:spPr>
           <a:xfrm>
-            <a:off x="685800" y="2286000"/>
-            <a:ext cx="3063240" cy="3749040"/>
+            <a:off x="822960" y="2286000"/>
+            <a:ext cx="2965704" cy="3749040"/>
           </a:xfrm>
           <a:prstGeom prst="rect">
             <a:avLst/>
@@ -21832,7 +23602,7 @@
               <a:buNone/>
             </a:pPr>
             <a:r>
-              <a:rPr lang="en-US" sz="2000" dirty="0">
+              <a:rPr lang="en-US" sz="2200" dirty="0">
                 <a:solidFill>
                   <a:srgbClr val="1F2937"/>
                 </a:solidFill>
@@ -21842,7 +23612,7 @@
               </a:rPr>
               <a:t>Autoconsumo local: gera e consome no mesmo local</a:t>
             </a:r>
-            <a:endParaRPr lang="en-US" sz="2000" dirty="0"/>
+            <a:endParaRPr lang="en-US" sz="2200" dirty="0"/>
           </a:p>
         </p:txBody>
       </p:sp>
@@ -21854,12 +23624,12 @@
         </p:nvSpPr>
         <p:spPr>
           <a:xfrm>
-            <a:off x="4297680" y="1325880"/>
-            <a:ext cx="3611880" cy="4937760"/>
+            <a:off x="4337304" y="1325880"/>
+            <a:ext cx="3514344" cy="4937760"/>
           </a:xfrm>
           <a:prstGeom prst="roundRect">
             <a:avLst>
-              <a:gd name="adj" fmla="val 2025"/>
+              <a:gd name="adj" fmla="val 2082"/>
             </a:avLst>
           </a:prstGeom>
           <a:solidFill>
@@ -21888,8 +23658,8 @@
         </p:nvSpPr>
         <p:spPr>
           <a:xfrm>
-            <a:off x="4297680" y="1325880"/>
-            <a:ext cx="3611880" cy="109728"/>
+            <a:off x="4337304" y="1325880"/>
+            <a:ext cx="3514344" cy="109728"/>
           </a:xfrm>
           <a:prstGeom prst="rect">
             <a:avLst/>
@@ -21908,8 +23678,8 @@
         </p:nvSpPr>
         <p:spPr>
           <a:xfrm>
-            <a:off x="4572000" y="1554480"/>
-            <a:ext cx="3063240" cy="685800"/>
+            <a:off x="4611624" y="1554480"/>
+            <a:ext cx="2965704" cy="685800"/>
           </a:xfrm>
           <a:prstGeom prst="rect">
             <a:avLst/>
@@ -21949,8 +23719,8 @@
         </p:nvSpPr>
         <p:spPr>
           <a:xfrm>
-            <a:off x="4572000" y="2286000"/>
-            <a:ext cx="3063240" cy="3749040"/>
+            <a:off x="4611624" y="2286000"/>
+            <a:ext cx="2965704" cy="3749040"/>
           </a:xfrm>
           <a:prstGeom prst="rect">
             <a:avLst/>
@@ -21968,7 +23738,7 @@
               <a:buNone/>
             </a:pPr>
             <a:r>
-              <a:rPr lang="en-US" sz="1600" dirty="0">
+              <a:rPr lang="en-US" sz="2200" dirty="0">
                 <a:solidFill>
                   <a:srgbClr val="1F2937"/>
                 </a:solidFill>
@@ -21978,7 +23748,7 @@
               </a:rPr>
               <a:t>Autoconsumo remoto: usina em outro local, créditos para unidades do mesmo titular (mesmo CPF ou CNPJ, matriz e filiais), na mesma distribuidora</a:t>
             </a:r>
-            <a:endParaRPr lang="en-US" sz="1600" dirty="0"/>
+            <a:endParaRPr lang="en-US" sz="2200" dirty="0"/>
           </a:p>
         </p:txBody>
       </p:sp>
@@ -21990,12 +23760,12 @@
         </p:nvSpPr>
         <p:spPr>
           <a:xfrm>
-            <a:off x="8183880" y="1325880"/>
-            <a:ext cx="3611880" cy="4937760"/>
+            <a:off x="8125968" y="1325880"/>
+            <a:ext cx="3514344" cy="4937760"/>
           </a:xfrm>
           <a:prstGeom prst="roundRect">
             <a:avLst>
-              <a:gd name="adj" fmla="val 2025"/>
+              <a:gd name="adj" fmla="val 2082"/>
             </a:avLst>
           </a:prstGeom>
           <a:solidFill>
@@ -22024,8 +23794,8 @@
         </p:nvSpPr>
         <p:spPr>
           <a:xfrm>
-            <a:off x="8183880" y="1325880"/>
-            <a:ext cx="3611880" cy="109728"/>
+            <a:off x="8125968" y="1325880"/>
+            <a:ext cx="3514344" cy="109728"/>
           </a:xfrm>
           <a:prstGeom prst="rect">
             <a:avLst/>
@@ -22044,8 +23814,8 @@
         </p:nvSpPr>
         <p:spPr>
           <a:xfrm>
-            <a:off x="8458200" y="1554480"/>
-            <a:ext cx="3063240" cy="685800"/>
+            <a:off x="8400288" y="1554480"/>
+            <a:ext cx="2965704" cy="685800"/>
           </a:xfrm>
           <a:prstGeom prst="rect">
             <a:avLst/>
@@ -22085,8 +23855,8 @@
         </p:nvSpPr>
         <p:spPr>
           <a:xfrm>
-            <a:off x="8458200" y="2286000"/>
-            <a:ext cx="3063240" cy="3749040"/>
+            <a:off x="8400288" y="2286000"/>
+            <a:ext cx="2965704" cy="3749040"/>
           </a:xfrm>
           <a:prstGeom prst="rect">
             <a:avLst/>
@@ -22104,7 +23874,7 @@
               <a:buNone/>
             </a:pPr>
             <a:r>
-              <a:rPr lang="en-US" sz="1600" dirty="0">
+              <a:rPr lang="en-US" sz="2200" dirty="0">
                 <a:solidFill>
                   <a:srgbClr val="1F2937"/>
                 </a:solidFill>
@@ -22114,7 +23884,55 @@
               </a:rPr>
               <a:t>Geração compartilhada: consumidores diferentes reunidos em consórcio, cooperativa, condomínio civil ou associação civil, na mesma distribuidora</a:t>
             </a:r>
-            <a:endParaRPr lang="en-US" sz="1600" dirty="0"/>
+            <a:endParaRPr lang="en-US" sz="2200" dirty="0"/>
+          </a:p>
+        </p:txBody>
+      </p:sp>
+      <p:sp>
+        <p:nvSpPr>
+          <p:cNvPr id="25" name="Slide Number Placeholder 0"/>
+          <p:cNvSpPr>
+            <a:spLocks noGrp="1"/>
+          </p:cNvSpPr>
+          <p:nvPr>
+            <p:ph type="sldNum" sz="quarter" idx="4294967295"/>
+          </p:nvPr>
+        </p:nvSpPr>
+        <p:spPr>
+          <a:xfrm>
+            <a:off x="11292840" y="6556248"/>
+            <a:ext cx="548640" cy="256032"/>
+          </a:xfrm>
+          <a:prstGeom prst="rect">
+            <a:avLst/>
+          </a:prstGeom>
+          <a:extLst>
+            <a:ext uri="{C572A759-6A51-4108-AA02-DFA0A04FC94B}">
+              <ma14:wrappingTextBoxFlag xmlns:ma14="http://schemas.microsoft.com/office/mac/drawingml/2011/main" val="0"/>
+            </a:ext>
+          </a:extLst>
+        </p:spPr>
+        <p:txBody>
+          <a:bodyPr/>
+          <a:lstStyle>
+            <a:lvl1pPr>
+              <a:defRPr sz="900">
+                <a:solidFill>
+                  <a:srgbClr val="1B3A6B"/>
+                </a:solidFill>
+                <a:latin typeface="Arial"/>
+                <a:ea typeface="Arial"/>
+                <a:cs typeface="Arial"/>
+              </a:defRPr>
+            </a:lvl1pPr>
+          </a:lstStyle>
+          <a:p>
+            <a:pPr algn="r"/>
+            <a:fld id="{F7021451-1387-4CA6-816F-3879F97B5CBC}" type="slidenum">
+              <a:rPr b="1" lang="en-US"/>
+              <a:t>9</a:t>
+            </a:fld>
+            <a:endParaRPr lang="en-US"/>
           </a:p>
         </p:txBody>
       </p:sp>

--- a/docs/curso/slides/m02-marco-legal.pptx
+++ b/docs/curso/slides/m02-marco-legal.pptx
@@ -4526,7 +4526,7 @@
                 <a:ea typeface="Arial" pitchFamily="34" charset="-122"/>
                 <a:cs typeface="Arial" pitchFamily="34" charset="-120"/>
               </a:rPr>
-              <a:t>7. concessionária, tarifa GD e a calculadora de Fio B</a:t>
+              <a:t>7. Concessionária, tarifa GD e a calculadora de Fio B</a:t>
             </a:r>
             <a:endParaRPr lang="en-US" sz="1200" dirty="0"/>
           </a:p>
@@ -4953,12 +4953,12 @@
         </p:nvSpPr>
         <p:spPr>
           <a:xfrm>
-            <a:off x="548640" y="1325880"/>
-            <a:ext cx="11091672" cy="3977640"/>
+            <a:off x="1463040" y="1600200"/>
+            <a:ext cx="9262872" cy="3429000"/>
           </a:xfrm>
           <a:prstGeom prst="roundRect">
             <a:avLst>
-              <a:gd name="adj" fmla="val 1839"/>
+              <a:gd name="adj" fmla="val 3200"/>
             </a:avLst>
           </a:prstGeom>
           <a:solidFill>
@@ -4971,9 +4971,9 @@
             <a:prstDash val="solid"/>
           </a:ln>
           <a:effectLst>
-            <a:outerShdw sx="100000" sy="100000" kx="0" ky="0" algn="bl" rotWithShape="0" blurRad="38100" dist="12700" dir="5400000">
+            <a:outerShdw sx="100000" sy="100000" kx="0" ky="0" algn="bl" rotWithShape="0" blurRad="50800" dist="12700" dir="5400000">
               <a:srgbClr val="000000">
-                <a:alpha val="8000"/>
+                <a:alpha val="10000"/>
               </a:srgbClr>
             </a:outerShdw>
           </a:effectLst>
@@ -4987,14 +4987,14 @@
         </p:nvSpPr>
         <p:spPr>
           <a:xfrm>
-            <a:off x="731520" y="1508760"/>
-            <a:ext cx="457200" cy="457200"/>
-          </a:xfrm>
-          <a:prstGeom prst="ellipse">
+            <a:off x="1463040" y="1600200"/>
+            <a:ext cx="128016" cy="3429000"/>
+          </a:xfrm>
+          <a:prstGeom prst="rect">
             <a:avLst/>
           </a:prstGeom>
           <a:solidFill>
-            <a:srgbClr val="1B3A6B"/>
+            <a:srgbClr val="F7A23B"/>
           </a:solidFill>
           <a:ln/>
         </p:spPr>
@@ -5007,8 +5007,8 @@
         </p:nvSpPr>
         <p:spPr>
           <a:xfrm>
-            <a:off x="731520" y="1508760"/>
-            <a:ext cx="457200" cy="457200"/>
+            <a:off x="2011680" y="1783080"/>
+            <a:ext cx="8412480" cy="3063240"/>
           </a:xfrm>
           <a:prstGeom prst="rect">
             <a:avLst/>
@@ -5024,50 +5024,9 @@
               <a:buNone/>
             </a:pPr>
             <a:r>
-              <a:rPr lang="en-US" sz="1400" b="1" dirty="0">
-                <a:solidFill>
-                  <a:srgbClr val="FFFFFF"/>
-                </a:solidFill>
-                <a:latin typeface="Arial" pitchFamily="34" charset="0"/>
-                <a:ea typeface="Arial" pitchFamily="34" charset="-122"/>
-                <a:cs typeface="Arial" pitchFamily="34" charset="-120"/>
-              </a:rPr>
-              <a:t>1</a:t>
-            </a:r>
-            <a:endParaRPr lang="en-US" sz="1400" dirty="0"/>
-          </a:p>
-        </p:txBody>
-      </p:sp>
-      <p:sp>
-        <p:nvSpPr>
-          <p:cNvPr id="12" name="Text 9"/>
-          <p:cNvSpPr/>
-          <p:nvPr/>
-        </p:nvSpPr>
-        <p:spPr>
-          <a:xfrm>
-            <a:off x="1325880" y="1435608"/>
-            <a:ext cx="10177272" cy="3758184"/>
-          </a:xfrm>
-          <a:prstGeom prst="rect">
-            <a:avLst/>
-          </a:prstGeom>
-          <a:noFill/>
-          <a:ln/>
-        </p:spPr>
-        <p:txBody>
-          <a:bodyPr wrap="square" rtlCol="0" anchor="ctr">
-            <a:normAutofit/>
-          </a:bodyPr>
-          <a:lstStyle/>
-          <a:p>
-            <a:pPr indent="0" marL="0">
-              <a:buNone/>
-            </a:pPr>
-            <a:r>
-              <a:rPr lang="en-US" sz="1800" dirty="0">
-                <a:solidFill>
-                  <a:srgbClr val="1F2937"/>
+              <a:rPr lang="en-US" sz="3200" b="1" dirty="0">
+                <a:solidFill>
+                  <a:srgbClr val="1B3A6B"/>
                 </a:solidFill>
                 <a:latin typeface="Arial" pitchFamily="34" charset="0"/>
                 <a:ea typeface="Arial" pitchFamily="34" charset="-122"/>
@@ -5075,13 +5034,13 @@
               </a:rPr>
               <a:t>EMUC — empreendimento com múltiplas unidades consumidoras: condomínios, mesma propriedade, áreas contíguas</a:t>
             </a:r>
-            <a:endParaRPr lang="en-US" sz="1800" dirty="0"/>
-          </a:p>
-        </p:txBody>
-      </p:sp>
-      <p:sp>
-        <p:nvSpPr>
-          <p:cNvPr id="13" name="Shape 10"/>
+            <a:endParaRPr lang="en-US" sz="3200" dirty="0"/>
+          </a:p>
+        </p:txBody>
+      </p:sp>
+      <p:sp>
+        <p:nvSpPr>
+          <p:cNvPr id="12" name="Shape 9"/>
           <p:cNvSpPr/>
           <p:nvPr/>
         </p:nvSpPr>
@@ -5108,7 +5067,7 @@
       </p:sp>
       <p:sp>
         <p:nvSpPr>
-          <p:cNvPr id="14" name="Shape 11"/>
+          <p:cNvPr id="13" name="Shape 10"/>
           <p:cNvSpPr/>
           <p:nvPr/>
         </p:nvSpPr>
@@ -5128,7 +5087,7 @@
       </p:sp>
       <p:sp>
         <p:nvSpPr>
-          <p:cNvPr id="15" name="Text 12"/>
+          <p:cNvPr id="14" name="Text 11"/>
           <p:cNvSpPr/>
           <p:nvPr/>
         </p:nvSpPr>
@@ -7455,7 +7414,7 @@
             <a:r>
               <a:rPr lang="en-US" sz="11000" b="1" dirty="0">
                 <a:solidFill>
-                  <a:srgbClr val="11396F"/>
+                  <a:srgbClr val="F7A23B"/>
                 </a:solidFill>
                 <a:latin typeface="Arial" pitchFamily="34" charset="0"/>
                 <a:ea typeface="Arial" pitchFamily="34" charset="-122"/>
@@ -7578,7 +7537,7 @@
                 <a:ea typeface="Arial" pitchFamily="34" charset="-122"/>
                 <a:cs typeface="Arial" pitchFamily="34" charset="-120"/>
               </a:rPr>
-              <a:t>Aula</a:t>
+              <a:t>Aula teórica</a:t>
             </a:r>
             <a:endParaRPr lang="en-US" sz="1400" dirty="0"/>
           </a:p>
@@ -8198,7 +8157,7 @@
               <a:buNone/>
             </a:pPr>
             <a:r>
-              <a:rPr lang="en-US" sz="1300" i="1" dirty="0">
+              <a:rPr lang="en-US" sz="1500" i="1" dirty="0">
                 <a:solidFill>
                   <a:srgbClr val="64748B"/>
                 </a:solidFill>
@@ -8208,7 +8167,7 @@
               </a:rPr>
               <a:t>O crédito nasce no medidor da usina, em quilowatt-hora. O valor em reais só aparece na fatura do cliente.</a:t>
             </a:r>
-            <a:endParaRPr lang="en-US" sz="1300" dirty="0"/>
+            <a:endParaRPr lang="en-US" sz="1500" dirty="0"/>
           </a:p>
         </p:txBody>
       </p:sp>
@@ -8373,7 +8332,7 @@
               <a:buNone/>
             </a:pPr>
             <a:r>
-              <a:rPr lang="en-US" sz="1300" i="1" dirty="0">
+              <a:rPr lang="en-US" sz="1500" i="1" dirty="0">
                 <a:solidFill>
                   <a:srgbClr val="64748B"/>
                 </a:solidFill>
@@ -8383,7 +8342,7 @@
               </a:rPr>
               <a:t>Os créditos são divididos pela lista de rateio, em percentuais. Se a usina gera menos, todos recebem proporcionalmente menos. E atualizar essa lista é tarefa mensal da sua operação.</a:t>
             </a:r>
-            <a:endParaRPr lang="en-US" sz="1300" dirty="0"/>
+            <a:endParaRPr lang="en-US" sz="1500" dirty="0"/>
           </a:p>
         </p:txBody>
       </p:sp>
@@ -9441,7 +9400,7 @@
               <a:buNone/>
             </a:pPr>
             <a:r>
-              <a:rPr lang="en-US" sz="1300" i="1" dirty="0">
+              <a:rPr lang="en-US" sz="1400" i="1" dirty="0">
                 <a:solidFill>
                   <a:srgbClr val="64748B"/>
                 </a:solidFill>
@@ -9451,7 +9410,7 @@
               </a:rPr>
               <a:t>Sobras ficam acumuladas por até sessenta meses. Sobra recorrente é sinal de cota alta demais.</a:t>
             </a:r>
-            <a:endParaRPr lang="en-US" sz="1300" dirty="0"/>
+            <a:endParaRPr lang="en-US" sz="1400" dirty="0"/>
           </a:p>
         </p:txBody>
       </p:sp>
@@ -9661,7 +9620,7 @@
               <a:buNone/>
             </a:pPr>
             <a:r>
-              <a:rPr lang="en-US" sz="1300" i="1" dirty="0">
+              <a:rPr lang="en-US" sz="1400" i="1" dirty="0">
                 <a:solidFill>
                   <a:srgbClr val="64748B"/>
                 </a:solidFill>
@@ -9671,7 +9630,7 @@
               </a:rPr>
               <a:t>A distribuidora mede, rateia e fatura. A sua empresa mantém o rateio, confere as faturas, cobra e paga o produtor. A fatura é a base da sua cobrança.</a:t>
             </a:r>
-            <a:endParaRPr lang="en-US" sz="1300" dirty="0"/>
+            <a:endParaRPr lang="en-US" sz="1400" dirty="0"/>
           </a:p>
         </p:txBody>
       </p:sp>
@@ -10645,7 +10604,7 @@
             <a:r>
               <a:rPr lang="en-US" sz="11000" b="1" dirty="0">
                 <a:solidFill>
-                  <a:srgbClr val="11396F"/>
+                  <a:srgbClr val="F7A23B"/>
                 </a:solidFill>
                 <a:latin typeface="Arial" pitchFamily="34" charset="0"/>
                 <a:ea typeface="Arial" pitchFamily="34" charset="-122"/>
@@ -10768,7 +10727,7 @@
                 <a:ea typeface="Arial" pitchFamily="34" charset="-122"/>
                 <a:cs typeface="Arial" pitchFamily="34" charset="-120"/>
               </a:rPr>
-              <a:t>Aula</a:t>
+              <a:t>Aula teórica</a:t>
             </a:r>
             <a:endParaRPr lang="en-US" sz="1400" dirty="0"/>
           </a:p>
@@ -11749,7 +11708,7 @@
             <a:r>
               <a:rPr lang="en-US" sz="11000" b="1" dirty="0">
                 <a:solidFill>
-                  <a:srgbClr val="11396F"/>
+                  <a:srgbClr val="F7A23B"/>
                 </a:solidFill>
                 <a:latin typeface="Arial" pitchFamily="34" charset="0"/>
                 <a:ea typeface="Arial" pitchFamily="34" charset="-122"/>
@@ -11872,7 +11831,7 @@
                 <a:ea typeface="Arial" pitchFamily="34" charset="-122"/>
                 <a:cs typeface="Arial" pitchFamily="34" charset="-120"/>
               </a:rPr>
-              <a:t>Aula</a:t>
+              <a:t>Aula teórica</a:t>
             </a:r>
             <a:endParaRPr lang="en-US" sz="1400" dirty="0"/>
           </a:p>
@@ -14522,7 +14481,7 @@
               <a:buNone/>
             </a:pPr>
             <a:r>
-              <a:rPr lang="en-US" sz="1300" i="1" dirty="0">
+              <a:rPr lang="en-US" sz="1400" i="1" dirty="0">
                 <a:solidFill>
                   <a:srgbClr val="64748B"/>
                 </a:solidFill>
@@ -14532,7 +14491,7 @@
               </a:rPr>
               <a:t>O GD três atinge usinas acima de quinhentos quilowatts com um participante concentrando vinte e cinco por cento ou mais dos créditos. Evite essa concentração.</a:t>
             </a:r>
-            <a:endParaRPr lang="en-US" sz="1300" dirty="0"/>
+            <a:endParaRPr lang="en-US" sz="1400" dirty="0"/>
           </a:p>
         </p:txBody>
       </p:sp>
@@ -14805,7 +14764,7 @@
               <a:buNone/>
             </a:pPr>
             <a:r>
-              <a:rPr lang="en-US" sz="1300" i="1" dirty="0">
+              <a:rPr lang="en-US" sz="1400" i="1" dirty="0">
                 <a:solidFill>
                   <a:srgbClr val="64748B"/>
                 </a:solidFill>
@@ -14815,7 +14774,7 @@
               </a:rPr>
               <a:t>Para enquadrar uma usina, olhe data do pedido, potência, modalidade e concentração, e confirme com a distribuidora.</a:t>
             </a:r>
-            <a:endParaRPr lang="en-US" sz="1300" dirty="0"/>
+            <a:endParaRPr lang="en-US" sz="1400" dirty="0"/>
           </a:p>
         </p:txBody>
       </p:sp>
@@ -15789,7 +15748,7 @@
             <a:r>
               <a:rPr lang="en-US" sz="11000" b="1" dirty="0">
                 <a:solidFill>
-                  <a:srgbClr val="11396F"/>
+                  <a:srgbClr val="F7A23B"/>
                 </a:solidFill>
                 <a:latin typeface="Arial" pitchFamily="34" charset="0"/>
                 <a:ea typeface="Arial" pitchFamily="34" charset="-122"/>
@@ -15912,7 +15871,7 @@
                 <a:ea typeface="Arial" pitchFamily="34" charset="-122"/>
                 <a:cs typeface="Arial" pitchFamily="34" charset="-120"/>
               </a:rPr>
-              <a:t>Aula</a:t>
+              <a:t>Aula teórica</a:t>
             </a:r>
             <a:endParaRPr lang="en-US" sz="1400" dirty="0"/>
           </a:p>
@@ -19788,7 +19747,7 @@
               <a:buNone/>
             </a:pPr>
             <a:r>
-              <a:rPr lang="en-US" sz="1300" i="1" dirty="0">
+              <a:rPr lang="en-US" sz="1500" i="1" dirty="0">
                 <a:solidFill>
                   <a:srgbClr val="64748B"/>
                 </a:solidFill>
@@ -19798,7 +19757,7 @@
               </a:rPr>
               <a:t>Geração distribuída é micro e minigeração conectada à rede da distribuidora, com compensação: quem gera recebe créditos, não dinheiro.</a:t>
             </a:r>
-            <a:endParaRPr lang="en-US" sz="1300" dirty="0"/>
+            <a:endParaRPr lang="en-US" sz="1500" dirty="0"/>
           </a:p>
         </p:txBody>
       </p:sp>
@@ -19963,7 +19922,7 @@
               <a:buNone/>
             </a:pPr>
             <a:r>
-              <a:rPr lang="en-US" sz="1300" i="1" dirty="0">
+              <a:rPr lang="en-US" sz="1500" i="1" dirty="0">
                 <a:solidFill>
                   <a:srgbClr val="64748B"/>
                 </a:solidFill>
@@ -19973,7 +19932,7 @@
               </a:rPr>
               <a:t>Tudo começou em 2012, com a criação do sistema de compensação.</a:t>
             </a:r>
-            <a:endParaRPr lang="en-US" sz="1300" dirty="0"/>
+            <a:endParaRPr lang="en-US" sz="1500" dirty="0"/>
           </a:p>
         </p:txBody>
       </p:sp>
@@ -20266,7 +20225,7 @@
               <a:buNone/>
             </a:pPr>
             <a:r>
-              <a:rPr lang="en-US" sz="1300" i="1" dirty="0">
+              <a:rPr lang="en-US" sz="1400" i="1" dirty="0">
                 <a:solidFill>
                   <a:srgbClr val="64748B"/>
                 </a:solidFill>
@@ -20276,7 +20235,7 @@
               </a:rPr>
               <a:t>Em 2015 veio a virada: geração compartilhada e créditos por sessenta meses. É daí que nasce o negócio da assinatura.</a:t>
             </a:r>
-            <a:endParaRPr lang="en-US" sz="1300" dirty="0"/>
+            <a:endParaRPr lang="en-US" sz="1400" dirty="0"/>
           </a:p>
         </p:txBody>
       </p:sp>
@@ -20407,7 +20366,7 @@
             <a:r>
               <a:rPr lang="en-US" sz="11000" b="1" dirty="0">
                 <a:solidFill>
-                  <a:srgbClr val="11396F"/>
+                  <a:srgbClr val="F7A23B"/>
                 </a:solidFill>
                 <a:latin typeface="Arial" pitchFamily="34" charset="0"/>
                 <a:ea typeface="Arial" pitchFamily="34" charset="-122"/>
@@ -20595,7 +20554,7 @@
                 <a:ea typeface="Arial" pitchFamily="34" charset="-122"/>
                 <a:cs typeface="Arial" pitchFamily="34" charset="-120"/>
               </a:rPr>
-              <a:t>concessionária, tarifa GD e a calculadora de Fio B</a:t>
+              <a:t>Concessionária, tarifa GD e a calculadora de Fio B</a:t>
             </a:r>
             <a:endParaRPr lang="en-US" sz="3200" dirty="0"/>
           </a:p>
@@ -29085,7 +29044,7 @@
               <a:buNone/>
             </a:pPr>
             <a:r>
-              <a:rPr lang="en-US" sz="1300" i="1" dirty="0">
+              <a:rPr lang="en-US" sz="1400" i="1" dirty="0">
                 <a:solidFill>
                   <a:srgbClr val="64748B"/>
                 </a:solidFill>
@@ -29095,7 +29054,7 @@
               </a:rPr>
               <a:t>Em 2022, a Lei 14.300 trouxe segurança jurídica, a transição do Fio B e o direito adquirido até 2045.</a:t>
             </a:r>
-            <a:endParaRPr lang="en-US" sz="1300" dirty="0"/>
+            <a:endParaRPr lang="en-US" sz="1400" dirty="0"/>
           </a:p>
         </p:txBody>
       </p:sp>
@@ -29305,7 +29264,7 @@
               <a:buNone/>
             </a:pPr>
             <a:r>
-              <a:rPr lang="en-US" sz="1300" i="1" dirty="0">
+              <a:rPr lang="en-US" sz="1400" i="1" dirty="0">
                 <a:solidFill>
                   <a:srgbClr val="64748B"/>
                 </a:solidFill>
@@ -29315,7 +29274,7 @@
               </a:rPr>
               <a:t>Em 2023, a ANEEL regulamentou a lei. Os detalhes operacionais estão na Resolução Normativa mil.</a:t>
             </a:r>
-            <a:endParaRPr lang="en-US" sz="1300" dirty="0"/>
+            <a:endParaRPr lang="en-US" sz="1400" dirty="0"/>
           </a:p>
         </p:txBody>
       </p:sp>
@@ -29546,7 +29505,7 @@
               <a:buNone/>
             </a:pPr>
             <a:r>
-              <a:rPr lang="en-US" sz="1300" i="1" dirty="0">
+              <a:rPr lang="en-US" sz="1400" i="1" dirty="0">
                 <a:solidFill>
                   <a:srgbClr val="64748B"/>
                 </a:solidFill>
@@ -29556,7 +29515,7 @@
               </a:rPr>
               <a:t>O mercado é grande e consolidado, mas a regra muda. Empresa saudável acompanha a regulação e faz contas com cenários.</a:t>
             </a:r>
-            <a:endParaRPr lang="en-US" sz="1300" dirty="0"/>
+            <a:endParaRPr lang="en-US" sz="1400" dirty="0"/>
           </a:p>
         </p:txBody>
       </p:sp>
@@ -29687,7 +29646,7 @@
             <a:r>
               <a:rPr lang="en-US" sz="11000" b="1" dirty="0">
                 <a:solidFill>
-                  <a:srgbClr val="11396F"/>
+                  <a:srgbClr val="F7A23B"/>
                 </a:solidFill>
                 <a:latin typeface="Arial" pitchFamily="34" charset="0"/>
                 <a:ea typeface="Arial" pitchFamily="34" charset="-122"/>
@@ -29810,7 +29769,7 @@
                 <a:ea typeface="Arial" pitchFamily="34" charset="-122"/>
                 <a:cs typeface="Arial" pitchFamily="34" charset="-120"/>
               </a:rPr>
-              <a:t>Aula</a:t>
+              <a:t>Aula teórica</a:t>
             </a:r>
             <a:endParaRPr lang="en-US" sz="1400" dirty="0"/>
           </a:p>
@@ -30430,7 +30389,7 @@
               <a:buNone/>
             </a:pPr>
             <a:r>
-              <a:rPr lang="en-US" sz="1300" i="1" dirty="0">
+              <a:rPr lang="en-US" sz="1500" i="1" dirty="0">
                 <a:solidFill>
                   <a:srgbClr val="64748B"/>
                 </a:solidFill>
@@ -30440,7 +30399,7 @@
               </a:rPr>
               <a:t>A microgeração vai até setenta e cinco quilowatts. Para assinatura, costuma ser pequena demais.</a:t>
             </a:r>
-            <a:endParaRPr lang="en-US" sz="1300" dirty="0"/>
+            <a:endParaRPr lang="en-US" sz="1500" dirty="0"/>
           </a:p>
         </p:txBody>
       </p:sp>
@@ -30691,7 +30650,7 @@
               <a:buNone/>
             </a:pPr>
             <a:r>
-              <a:rPr lang="en-US" sz="1300" i="1" dirty="0">
+              <a:rPr lang="en-US" sz="1400" i="1" dirty="0">
                 <a:solidFill>
                   <a:srgbClr val="64748B"/>
                 </a:solidFill>
@@ -30701,7 +30660,7 @@
               </a:rPr>
               <a:t>A minigeração vai além, com limite de três megawatts para a solar nas regras atuais. É a faixa das usinas de assinatura.</a:t>
             </a:r>
-            <a:endParaRPr lang="en-US" sz="1300" dirty="0"/>
+            <a:endParaRPr lang="en-US" sz="1400" dirty="0"/>
           </a:p>
         </p:txBody>
       </p:sp>
@@ -31394,7 +31353,7 @@
               <a:buNone/>
             </a:pPr>
             <a:r>
-              <a:rPr lang="en-US" sz="1300" i="1" dirty="0">
+              <a:rPr lang="en-US" sz="1500" i="1" dirty="0">
                 <a:solidFill>
                   <a:srgbClr val="64748B"/>
                 </a:solidFill>
@@ -31404,7 +31363,7 @@
               </a:rPr>
               <a:t>É proibido dividir uma usina grande em várias pequenas para caber nas regras. Desconfie desse atalho.</a:t>
             </a:r>
-            <a:endParaRPr lang="en-US" sz="1300" dirty="0"/>
+            <a:endParaRPr lang="en-US" sz="1500" dirty="0"/>
           </a:p>
         </p:txBody>
       </p:sp>
@@ -31655,7 +31614,7 @@
               <a:buNone/>
             </a:pPr>
             <a:r>
-              <a:rPr lang="en-US" sz="1300" i="1" dirty="0">
+              <a:rPr lang="en-US" sz="1400" i="1" dirty="0">
                 <a:solidFill>
                   <a:srgbClr val="64748B"/>
                 </a:solidFill>
@@ -31665,7 +31624,7 @@
               </a:rPr>
               <a:t>Guarde a marca de quinhentos quilowatts: acima dela entra uma regra mais pesada para certos casos, que vamos ver na aula cinco.</a:t>
             </a:r>
-            <a:endParaRPr lang="en-US" sz="1300" dirty="0"/>
+            <a:endParaRPr lang="en-US" sz="1400" dirty="0"/>
           </a:p>
         </p:txBody>
       </p:sp>
@@ -31796,7 +31755,7 @@
             <a:r>
               <a:rPr lang="en-US" sz="11000" b="1" dirty="0">
                 <a:solidFill>
-                  <a:srgbClr val="11396F"/>
+                  <a:srgbClr val="F7A23B"/>
                 </a:solidFill>
                 <a:latin typeface="Arial" pitchFamily="34" charset="0"/>
                 <a:ea typeface="Arial" pitchFamily="34" charset="-122"/>
@@ -31919,7 +31878,7 @@
                 <a:ea typeface="Arial" pitchFamily="34" charset="-122"/>
                 <a:cs typeface="Arial" pitchFamily="34" charset="-120"/>
               </a:rPr>
-              <a:t>Aula</a:t>
+              <a:t>Aula teórica</a:t>
             </a:r>
             <a:endParaRPr lang="en-US" sz="1400" dirty="0"/>
           </a:p>
@@ -32539,7 +32498,7 @@
               <a:buNone/>
             </a:pPr>
             <a:r>
-              <a:rPr lang="en-US" sz="1300" i="1" dirty="0">
+              <a:rPr lang="en-US" sz="1500" i="1" dirty="0">
                 <a:solidFill>
                   <a:srgbClr val="64748B"/>
                 </a:solidFill>
@@ -32549,7 +32508,7 @@
               </a:rPr>
               <a:t>No autoconsumo local, gera-se e consome-se no mesmo lugar. É o que as integradoras vendem.</a:t>
             </a:r>
-            <a:endParaRPr lang="en-US" sz="1300" dirty="0"/>
+            <a:endParaRPr lang="en-US" sz="1500" dirty="0"/>
           </a:p>
         </p:txBody>
       </p:sp>
@@ -32714,7 +32673,7 @@
               <a:buNone/>
             </a:pPr>
             <a:r>
-              <a:rPr lang="en-US" sz="1300" i="1" dirty="0">
+              <a:rPr lang="en-US" sz="1500" i="1" dirty="0">
                 <a:solidFill>
                   <a:srgbClr val="64748B"/>
                 </a:solidFill>
@@ -32724,7 +32683,7 @@
               </a:rPr>
               <a:t>No autoconsumo remoto, a usina fica em outro lugar, mas os créditos vão só para unidades do mesmo titular.</a:t>
             </a:r>
-            <a:endParaRPr lang="en-US" sz="1300" dirty="0"/>
+            <a:endParaRPr lang="en-US" sz="1500" dirty="0"/>
           </a:p>
         </p:txBody>
       </p:sp>
@@ -32889,7 +32848,7 @@
               <a:buNone/>
             </a:pPr>
             <a:r>
-              <a:rPr lang="en-US" sz="1300" i="1" dirty="0">
+              <a:rPr lang="en-US" sz="1500" i="1" dirty="0">
                 <a:solidFill>
                   <a:srgbClr val="64748B"/>
                 </a:solidFill>
@@ -32899,7 +32858,7 @@
               </a:rPr>
               <a:t>Na geração compartilhada, consumidores diferentes se reúnem numa entidade, como consórcio ou cooperativa, e dividem os créditos. É esse o mecanismo da assinatura.</a:t>
             </a:r>
-            <a:endParaRPr lang="en-US" sz="1300" dirty="0"/>
+            <a:endParaRPr lang="en-US" sz="1500" dirty="0"/>
           </a:p>
         </p:txBody>
       </p:sp>
